--- a/ppt/Grade08/G8_S34_Energy_2.pptx
+++ b/ppt/Grade08/G8_S34_Energy_2.pptx
@@ -40,6 +40,7 @@
     <p:sldId id="288" r:id="rId40"/>
     <p:sldId id="289" r:id="rId41"/>
     <p:sldId id="290" r:id="rId42"/>
+    <p:sldId id="291" r:id="rId43"/>
   </p:sldIdLst>
   <p:sldSz cx="12191695" cy="6858000" type="screen4x3"/>
   <p:notesSz cx="6858000" cy="9144000"/>
@@ -561,6 +562,76 @@
 </p:notes>
 </file>
 
+<file path=ppt/notesSlides/notesSlide10.xml><?xml version="1.0" encoding="utf-8"?>
+<p:notes xmlns:a="http://schemas.openxmlformats.org/drawingml/2006/main" xmlns:p="http://schemas.openxmlformats.org/presentationml/2006/main" xmlns:r="http://schemas.openxmlformats.org/officeDocument/2006/relationships">
+  <p:cSld>
+    <p:spTree>
+      <p:nvGrpSpPr>
+        <p:cNvPr id="1" name=""/>
+        <p:cNvGrpSpPr/>
+        <p:nvPr/>
+      </p:nvGrpSpPr>
+      <p:grpSpPr>
+        <a:xfrm>
+          <a:off x="0" y="0"/>
+          <a:ext cx="0" cy="0"/>
+          <a:chOff x="0" y="0"/>
+          <a:chExt cx="0" cy="0"/>
+        </a:xfrm>
+      </p:grpSpPr>
+      <p:sp>
+        <p:nvSpPr>
+          <p:cNvPr id="2" name="Slide Image Placeholder 1"/>
+          <p:cNvSpPr>
+            <a:spLocks noGrp="1"/>
+          </p:cNvSpPr>
+          <p:nvPr>
+            <p:ph type="sldImg" idx="2"/>
+          </p:nvPr>
+        </p:nvSpPr>
+        <p:spPr/>
+      </p:sp>
+      <p:sp>
+        <p:nvSpPr>
+          <p:cNvPr id="3" name="Notes Placeholder 2"/>
+          <p:cNvSpPr>
+            <a:spLocks noGrp="1"/>
+          </p:cNvSpPr>
+          <p:nvPr>
+            <p:ph type="body" idx="3" sz="quarter"/>
+          </p:nvPr>
+        </p:nvSpPr>
+        <p:spPr/>
+        <p:txBody>
+          <a:bodyPr/>
+          <a:lstStyle/>
+          <a:p>
+            <a:r>
+              <a:t>Rapid recap; PE = mgh, KE = ½mv² and conservation are the key results.</a:t>
+            </a:r>
+          </a:p>
+        </p:txBody>
+      </p:sp>
+      <p:sp>
+        <p:nvSpPr>
+          <p:cNvPr id="4" name="Slide Number Placeholder 3"/>
+          <p:cNvSpPr>
+            <a:spLocks noGrp="1"/>
+          </p:cNvSpPr>
+          <p:nvPr>
+            <p:ph type="sldNum" idx="5" sz="quarter"/>
+          </p:nvPr>
+        </p:nvSpPr>
+        <p:spPr/>
+      </p:sp>
+    </p:spTree>
+  </p:cSld>
+  <p:clrMapOvr>
+    <a:masterClrMapping/>
+  </p:clrMapOvr>
+</p:notes>
+</file>
+
 <file path=ppt/notesSlides/notesSlide2.xml><?xml version="1.0" encoding="utf-8"?>
 <p:notes xmlns:a="http://schemas.openxmlformats.org/drawingml/2006/main" xmlns:p="http://schemas.openxmlformats.org/presentationml/2006/main" xmlns:r="http://schemas.openxmlformats.org/officeDocument/2006/relationships">
   <p:cSld>
@@ -1096,7 +1167,7 @@
           <a:lstStyle/>
           <a:p>
             <a:r>
-              <a:t>Rapid recap; PE = mgh, KE = ½mv² and conservation are the key results.</a:t>
+              <a:t>Energy sources: the Sun is ultimate; renewables (clean, replenished) vs non-renewables (finite fossil fuels). Conserve and shift to renewables.</a:t>
             </a:r>
           </a:p>
         </p:txBody>
@@ -17048,7 +17119,7 @@
                 </a:solidFill>
                 <a:latin typeface="Arial"/>
               </a:rPr>
-              <a:t>WRAP UP</a:t>
+              <a:t>SOURCES</a:t>
             </a:r>
           </a:p>
         </p:txBody>
@@ -17083,7 +17154,7 @@
                 </a:solidFill>
                 <a:latin typeface="Calibri"/>
               </a:rPr>
-              <a:t>Quick Recap</a:t>
+              <a:t>Sources of Energy</a:t>
             </a:r>
           </a:p>
         </p:txBody>
@@ -17096,12 +17167,12 @@
         </p:nvSpPr>
         <p:spPr>
           <a:xfrm>
-            <a:off x="640080" y="1828800"/>
-            <a:ext cx="10881360" cy="4114800"/>
+            <a:off x="640080" y="1920240"/>
+            <a:ext cx="5212080" cy="1600200"/>
           </a:xfrm>
           <a:prstGeom prst="roundRect">
             <a:avLst>
-              <a:gd name="adj" fmla="val 3000"/>
+              <a:gd name="adj" fmla="val 5000"/>
             </a:avLst>
           </a:prstGeom>
           <a:solidFill>
@@ -17142,14 +17213,84 @@
       </p:sp>
       <p:sp>
         <p:nvSpPr>
-          <p:cNvPr id="7" name="TextBox 6"/>
-          <p:cNvSpPr txBox="1"/>
-          <p:nvPr/>
-        </p:nvSpPr>
-        <p:spPr>
-          <a:xfrm>
-            <a:off x="1005840" y="2148840"/>
-            <a:ext cx="10058400" cy="3657600"/>
+          <p:cNvPr id="7" name="Rounded Rectangle 6"/>
+          <p:cNvSpPr/>
+          <p:nvPr/>
+        </p:nvSpPr>
+        <p:spPr>
+          <a:xfrm>
+            <a:off x="960119" y="2212848"/>
+            <a:ext cx="502920" cy="502920"/>
+          </a:xfrm>
+          <a:prstGeom prst="roundRect">
+            <a:avLst>
+              <a:gd name="adj" fmla="val 30000"/>
+            </a:avLst>
+          </a:prstGeom>
+          <a:solidFill>
+            <a:srgbClr val="0A9396"/>
+          </a:solidFill>
+          <a:ln>
+            <a:noFill/>
+          </a:ln>
+          <a:effectLst/>
+        </p:spPr>
+        <p:style>
+          <a:lnRef idx="1">
+            <a:schemeClr val="accent1"/>
+          </a:lnRef>
+          <a:fillRef idx="3">
+            <a:schemeClr val="accent1"/>
+          </a:fillRef>
+          <a:effectRef idx="2">
+            <a:schemeClr val="accent1"/>
+          </a:effectRef>
+          <a:fontRef idx="minor">
+            <a:schemeClr val="lt1"/>
+          </a:fontRef>
+        </p:style>
+        <p:txBody>
+          <a:bodyPr rtlCol="0" anchor="ctr"/>
+          <a:lstStyle/>
+          <a:p>
+            <a:pPr algn="ctr"/>
+          </a:p>
+        </p:txBody>
+      </p:sp>
+      <p:pic>
+        <p:nvPicPr>
+          <p:cNvPr id="8" name="Picture 7" descr="sun_FFFFFF.png"/>
+          <p:cNvPicPr>
+            <a:picLocks noChangeAspect="1"/>
+          </p:cNvPicPr>
+          <p:nvPr/>
+        </p:nvPicPr>
+        <p:blipFill>
+          <a:blip r:embed="rId2"/>
+          <a:stretch>
+            <a:fillRect/>
+          </a:stretch>
+        </p:blipFill>
+        <p:spPr>
+          <a:xfrm>
+            <a:off x="1070762" y="2323490"/>
+            <a:ext cx="281635" cy="281635"/>
+          </a:xfrm>
+          <a:prstGeom prst="rect">
+            <a:avLst/>
+          </a:prstGeom>
+        </p:spPr>
+      </p:pic>
+      <p:sp>
+        <p:nvSpPr>
+          <p:cNvPr id="9" name="TextBox 8"/>
+          <p:cNvSpPr txBox="1"/>
+          <p:nvPr/>
+        </p:nvSpPr>
+        <p:spPr>
+          <a:xfrm>
+            <a:off x="1645920" y="2176272"/>
+            <a:ext cx="3931920" cy="457200"/>
           </a:xfrm>
           <a:prstGeom prst="rect">
             <a:avLst/>
@@ -17162,225 +17303,626 @@
           </a:bodyPr>
           <a:lstStyle/>
           <a:p>
-            <a:pPr algn="l">
-              <a:lnSpc>
-                <a:spcPct val="105000"/>
-              </a:lnSpc>
-              <a:spcAft>
-                <a:spcPts val="1200"/>
-              </a:spcAft>
-            </a:pPr>
-            <a:r>
-              <a:rPr sz="1600" b="1" i="0">
-                <a:solidFill>
-                  <a:srgbClr val="2A9D8F"/>
-                </a:solidFill>
-                <a:latin typeface="Calibri"/>
-              </a:rPr>
-              <a:t>✓  </a:t>
-            </a:r>
-            <a:r>
-              <a:rPr sz="1600" b="1" i="0">
+            <a:pPr algn="l"/>
+            <a:r>
+              <a:rPr sz="1700" b="1" i="0">
                 <a:solidFill>
                   <a:srgbClr val="1D2433"/>
                 </a:solidFill>
                 <a:latin typeface="Calibri"/>
               </a:rPr>
-              <a:t>Gravitational PE  —  </a:t>
-            </a:r>
-            <a:r>
-              <a:rPr sz="1500" b="0" i="0">
+              <a:t>The Sun</a:t>
+            </a:r>
+          </a:p>
+        </p:txBody>
+      </p:sp>
+      <p:sp>
+        <p:nvSpPr>
+          <p:cNvPr id="10" name="TextBox 9"/>
+          <p:cNvSpPr txBox="1"/>
+          <p:nvPr/>
+        </p:nvSpPr>
+        <p:spPr>
+          <a:xfrm>
+            <a:off x="1645920" y="2670048"/>
+            <a:ext cx="3931920" cy="685800"/>
+          </a:xfrm>
+          <a:prstGeom prst="rect">
+            <a:avLst/>
+          </a:prstGeom>
+          <a:noFill/>
+        </p:spPr>
+        <p:txBody>
+          <a:bodyPr wrap="square" anchor="t" lIns="0" rIns="0" tIns="0" bIns="0">
+            <a:spAutoFit/>
+          </a:bodyPr>
+          <a:lstStyle/>
+          <a:p>
+            <a:pPr algn="l"/>
+            <a:r>
+              <a:rPr sz="1350" b="0" i="0">
                 <a:solidFill>
                   <a:srgbClr val="6B7280"/>
                 </a:solidFill>
                 <a:latin typeface="Calibri"/>
               </a:rPr>
-              <a:t>PE = m g h; grows with mass and height</a:t>
-            </a:r>
-          </a:p>
-          <a:p>
-            <a:pPr algn="l">
-              <a:lnSpc>
-                <a:spcPct val="105000"/>
-              </a:lnSpc>
-              <a:spcAft>
-                <a:spcPts val="1200"/>
-              </a:spcAft>
-            </a:pPr>
-            <a:r>
-              <a:rPr sz="1600" b="1" i="0">
-                <a:solidFill>
-                  <a:srgbClr val="2A9D8F"/>
-                </a:solidFill>
-                <a:latin typeface="Calibri"/>
-              </a:rPr>
-              <a:t>✓  </a:t>
-            </a:r>
-            <a:r>
-              <a:rPr sz="1600" b="1" i="0">
+              <a:t>The ultimate source of almost all energy on Earth.</a:t>
+            </a:r>
+          </a:p>
+        </p:txBody>
+      </p:sp>
+      <p:sp>
+        <p:nvSpPr>
+          <p:cNvPr id="11" name="Rounded Rectangle 10"/>
+          <p:cNvSpPr/>
+          <p:nvPr/>
+        </p:nvSpPr>
+        <p:spPr>
+          <a:xfrm>
+            <a:off x="6217920" y="1920240"/>
+            <a:ext cx="5212080" cy="1600200"/>
+          </a:xfrm>
+          <a:prstGeom prst="roundRect">
+            <a:avLst>
+              <a:gd name="adj" fmla="val 5000"/>
+            </a:avLst>
+          </a:prstGeom>
+          <a:solidFill>
+            <a:srgbClr val="FFFFFF"/>
+          </a:solidFill>
+          <a:ln>
+            <a:noFill/>
+          </a:ln>
+          <a:effectLst>
+            <a:outerShdw blurRad="88900" dist="38100" dir="5400000" rotWithShape="0" algn="bl">
+              <a:srgbClr val="000000">
+                <a:alpha val="16000"/>
+              </a:srgbClr>
+            </a:outerShdw>
+          </a:effectLst>
+        </p:spPr>
+        <p:style>
+          <a:lnRef idx="1">
+            <a:schemeClr val="accent1"/>
+          </a:lnRef>
+          <a:fillRef idx="3">
+            <a:schemeClr val="accent1"/>
+          </a:fillRef>
+          <a:effectRef idx="2">
+            <a:schemeClr val="accent1"/>
+          </a:effectRef>
+          <a:fontRef idx="minor">
+            <a:schemeClr val="lt1"/>
+          </a:fontRef>
+        </p:style>
+        <p:txBody>
+          <a:bodyPr rtlCol="0" anchor="ctr"/>
+          <a:lstStyle/>
+          <a:p>
+            <a:pPr algn="ctr"/>
+          </a:p>
+        </p:txBody>
+      </p:sp>
+      <p:sp>
+        <p:nvSpPr>
+          <p:cNvPr id="12" name="Rounded Rectangle 11"/>
+          <p:cNvSpPr/>
+          <p:nvPr/>
+        </p:nvSpPr>
+        <p:spPr>
+          <a:xfrm>
+            <a:off x="6537960" y="2212848"/>
+            <a:ext cx="502920" cy="502920"/>
+          </a:xfrm>
+          <a:prstGeom prst="roundRect">
+            <a:avLst>
+              <a:gd name="adj" fmla="val 30000"/>
+            </a:avLst>
+          </a:prstGeom>
+          <a:solidFill>
+            <a:srgbClr val="F4801A"/>
+          </a:solidFill>
+          <a:ln>
+            <a:noFill/>
+          </a:ln>
+          <a:effectLst/>
+        </p:spPr>
+        <p:style>
+          <a:lnRef idx="1">
+            <a:schemeClr val="accent1"/>
+          </a:lnRef>
+          <a:fillRef idx="3">
+            <a:schemeClr val="accent1"/>
+          </a:fillRef>
+          <a:effectRef idx="2">
+            <a:schemeClr val="accent1"/>
+          </a:effectRef>
+          <a:fontRef idx="minor">
+            <a:schemeClr val="lt1"/>
+          </a:fontRef>
+        </p:style>
+        <p:txBody>
+          <a:bodyPr rtlCol="0" anchor="ctr"/>
+          <a:lstStyle/>
+          <a:p>
+            <a:pPr algn="ctr"/>
+          </a:p>
+        </p:txBody>
+      </p:sp>
+      <p:pic>
+        <p:nvPicPr>
+          <p:cNvPr id="13" name="Picture 12" descr="spark_FFFFFF.png"/>
+          <p:cNvPicPr>
+            <a:picLocks noChangeAspect="1"/>
+          </p:cNvPicPr>
+          <p:nvPr/>
+        </p:nvPicPr>
+        <p:blipFill>
+          <a:blip r:embed="rId3"/>
+          <a:stretch>
+            <a:fillRect/>
+          </a:stretch>
+        </p:blipFill>
+        <p:spPr>
+          <a:xfrm>
+            <a:off x="6648602" y="2323490"/>
+            <a:ext cx="281635" cy="281635"/>
+          </a:xfrm>
+          <a:prstGeom prst="rect">
+            <a:avLst/>
+          </a:prstGeom>
+        </p:spPr>
+      </p:pic>
+      <p:sp>
+        <p:nvSpPr>
+          <p:cNvPr id="14" name="TextBox 13"/>
+          <p:cNvSpPr txBox="1"/>
+          <p:nvPr/>
+        </p:nvSpPr>
+        <p:spPr>
+          <a:xfrm>
+            <a:off x="7223760" y="2176272"/>
+            <a:ext cx="3931920" cy="457200"/>
+          </a:xfrm>
+          <a:prstGeom prst="rect">
+            <a:avLst/>
+          </a:prstGeom>
+          <a:noFill/>
+        </p:spPr>
+        <p:txBody>
+          <a:bodyPr wrap="square" anchor="t" lIns="0" rIns="0" tIns="0" bIns="0">
+            <a:spAutoFit/>
+          </a:bodyPr>
+          <a:lstStyle/>
+          <a:p>
+            <a:pPr algn="l"/>
+            <a:r>
+              <a:rPr sz="1700" b="1" i="0">
                 <a:solidFill>
                   <a:srgbClr val="1D2433"/>
                 </a:solidFill>
                 <a:latin typeface="Calibri"/>
               </a:rPr>
-              <a:t>Kinetic energy  —  </a:t>
-            </a:r>
-            <a:r>
-              <a:rPr sz="1500" b="0" i="0">
+              <a:t>Renewable</a:t>
+            </a:r>
+          </a:p>
+        </p:txBody>
+      </p:sp>
+      <p:sp>
+        <p:nvSpPr>
+          <p:cNvPr id="15" name="TextBox 14"/>
+          <p:cNvSpPr txBox="1"/>
+          <p:nvPr/>
+        </p:nvSpPr>
+        <p:spPr>
+          <a:xfrm>
+            <a:off x="7223760" y="2670048"/>
+            <a:ext cx="3931920" cy="685800"/>
+          </a:xfrm>
+          <a:prstGeom prst="rect">
+            <a:avLst/>
+          </a:prstGeom>
+          <a:noFill/>
+        </p:spPr>
+        <p:txBody>
+          <a:bodyPr wrap="square" anchor="t" lIns="0" rIns="0" tIns="0" bIns="0">
+            <a:spAutoFit/>
+          </a:bodyPr>
+          <a:lstStyle/>
+          <a:p>
+            <a:pPr algn="l"/>
+            <a:r>
+              <a:rPr sz="1350" b="0" i="0">
                 <a:solidFill>
                   <a:srgbClr val="6B7280"/>
                 </a:solidFill>
                 <a:latin typeface="Calibri"/>
               </a:rPr>
-              <a:t>KE = ½ m v²; grows with the square of speed</a:t>
-            </a:r>
-          </a:p>
-          <a:p>
-            <a:pPr algn="l">
-              <a:lnSpc>
-                <a:spcPct val="105000"/>
-              </a:lnSpc>
-              <a:spcAft>
-                <a:spcPts val="1200"/>
-              </a:spcAft>
-            </a:pPr>
-            <a:r>
-              <a:rPr sz="1600" b="1" i="0">
-                <a:solidFill>
-                  <a:srgbClr val="2A9D8F"/>
-                </a:solidFill>
-                <a:latin typeface="Calibri"/>
-              </a:rPr>
-              <a:t>✓  </a:t>
-            </a:r>
-            <a:r>
-              <a:rPr sz="1600" b="1" i="0">
+              <a:t>Replenished naturally and clean — solar, wind, water (hydro) and biomass.</a:t>
+            </a:r>
+          </a:p>
+        </p:txBody>
+      </p:sp>
+      <p:sp>
+        <p:nvSpPr>
+          <p:cNvPr id="16" name="Rounded Rectangle 15"/>
+          <p:cNvSpPr/>
+          <p:nvPr/>
+        </p:nvSpPr>
+        <p:spPr>
+          <a:xfrm>
+            <a:off x="640080" y="3749039"/>
+            <a:ext cx="5212080" cy="1600200"/>
+          </a:xfrm>
+          <a:prstGeom prst="roundRect">
+            <a:avLst>
+              <a:gd name="adj" fmla="val 5000"/>
+            </a:avLst>
+          </a:prstGeom>
+          <a:solidFill>
+            <a:srgbClr val="FFFFFF"/>
+          </a:solidFill>
+          <a:ln>
+            <a:noFill/>
+          </a:ln>
+          <a:effectLst>
+            <a:outerShdw blurRad="88900" dist="38100" dir="5400000" rotWithShape="0" algn="bl">
+              <a:srgbClr val="000000">
+                <a:alpha val="16000"/>
+              </a:srgbClr>
+            </a:outerShdw>
+          </a:effectLst>
+        </p:spPr>
+        <p:style>
+          <a:lnRef idx="1">
+            <a:schemeClr val="accent1"/>
+          </a:lnRef>
+          <a:fillRef idx="3">
+            <a:schemeClr val="accent1"/>
+          </a:fillRef>
+          <a:effectRef idx="2">
+            <a:schemeClr val="accent1"/>
+          </a:effectRef>
+          <a:fontRef idx="minor">
+            <a:schemeClr val="lt1"/>
+          </a:fontRef>
+        </p:style>
+        <p:txBody>
+          <a:bodyPr rtlCol="0" anchor="ctr"/>
+          <a:lstStyle/>
+          <a:p>
+            <a:pPr algn="ctr"/>
+          </a:p>
+        </p:txBody>
+      </p:sp>
+      <p:sp>
+        <p:nvSpPr>
+          <p:cNvPr id="17" name="Rounded Rectangle 16"/>
+          <p:cNvSpPr/>
+          <p:nvPr/>
+        </p:nvSpPr>
+        <p:spPr>
+          <a:xfrm>
+            <a:off x="960119" y="4041648"/>
+            <a:ext cx="502920" cy="502920"/>
+          </a:xfrm>
+          <a:prstGeom prst="roundRect">
+            <a:avLst>
+              <a:gd name="adj" fmla="val 30000"/>
+            </a:avLst>
+          </a:prstGeom>
+          <a:solidFill>
+            <a:srgbClr val="6A4C93"/>
+          </a:solidFill>
+          <a:ln>
+            <a:noFill/>
+          </a:ln>
+          <a:effectLst/>
+        </p:spPr>
+        <p:style>
+          <a:lnRef idx="1">
+            <a:schemeClr val="accent1"/>
+          </a:lnRef>
+          <a:fillRef idx="3">
+            <a:schemeClr val="accent1"/>
+          </a:fillRef>
+          <a:effectRef idx="2">
+            <a:schemeClr val="accent1"/>
+          </a:effectRef>
+          <a:fontRef idx="minor">
+            <a:schemeClr val="lt1"/>
+          </a:fontRef>
+        </p:style>
+        <p:txBody>
+          <a:bodyPr rtlCol="0" anchor="ctr"/>
+          <a:lstStyle/>
+          <a:p>
+            <a:pPr algn="ctr"/>
+          </a:p>
+        </p:txBody>
+      </p:sp>
+      <p:pic>
+        <p:nvPicPr>
+          <p:cNvPr id="18" name="Picture 17" descr="spark_FFFFFF.png"/>
+          <p:cNvPicPr>
+            <a:picLocks noChangeAspect="1"/>
+          </p:cNvPicPr>
+          <p:nvPr/>
+        </p:nvPicPr>
+        <p:blipFill>
+          <a:blip r:embed="rId3"/>
+          <a:stretch>
+            <a:fillRect/>
+          </a:stretch>
+        </p:blipFill>
+        <p:spPr>
+          <a:xfrm>
+            <a:off x="1070762" y="4152290"/>
+            <a:ext cx="281635" cy="281635"/>
+          </a:xfrm>
+          <a:prstGeom prst="rect">
+            <a:avLst/>
+          </a:prstGeom>
+        </p:spPr>
+      </p:pic>
+      <p:sp>
+        <p:nvSpPr>
+          <p:cNvPr id="19" name="TextBox 18"/>
+          <p:cNvSpPr txBox="1"/>
+          <p:nvPr/>
+        </p:nvSpPr>
+        <p:spPr>
+          <a:xfrm>
+            <a:off x="1645920" y="4005072"/>
+            <a:ext cx="3931920" cy="457200"/>
+          </a:xfrm>
+          <a:prstGeom prst="rect">
+            <a:avLst/>
+          </a:prstGeom>
+          <a:noFill/>
+        </p:spPr>
+        <p:txBody>
+          <a:bodyPr wrap="square" anchor="t" lIns="0" rIns="0" tIns="0" bIns="0">
+            <a:spAutoFit/>
+          </a:bodyPr>
+          <a:lstStyle/>
+          <a:p>
+            <a:pPr algn="l"/>
+            <a:r>
+              <a:rPr sz="1700" b="1" i="0">
                 <a:solidFill>
                   <a:srgbClr val="1D2433"/>
                 </a:solidFill>
                 <a:latin typeface="Calibri"/>
               </a:rPr>
-              <a:t>PE → KE  —  </a:t>
-            </a:r>
-            <a:r>
-              <a:rPr sz="1500" b="0" i="0">
+              <a:t>Non-renewable</a:t>
+            </a:r>
+          </a:p>
+        </p:txBody>
+      </p:sp>
+      <p:sp>
+        <p:nvSpPr>
+          <p:cNvPr id="20" name="TextBox 19"/>
+          <p:cNvSpPr txBox="1"/>
+          <p:nvPr/>
+        </p:nvSpPr>
+        <p:spPr>
+          <a:xfrm>
+            <a:off x="1645920" y="4498848"/>
+            <a:ext cx="3931920" cy="685800"/>
+          </a:xfrm>
+          <a:prstGeom prst="rect">
+            <a:avLst/>
+          </a:prstGeom>
+          <a:noFill/>
+        </p:spPr>
+        <p:txBody>
+          <a:bodyPr wrap="square" anchor="t" lIns="0" rIns="0" tIns="0" bIns="0">
+            <a:spAutoFit/>
+          </a:bodyPr>
+          <a:lstStyle/>
+          <a:p>
+            <a:pPr algn="l"/>
+            <a:r>
+              <a:rPr sz="1350" b="0" i="0">
                 <a:solidFill>
                   <a:srgbClr val="6B7280"/>
                 </a:solidFill>
                 <a:latin typeface="Calibri"/>
               </a:rPr>
-              <a:t>a falling body converts PE into KE</a:t>
-            </a:r>
-          </a:p>
-          <a:p>
-            <a:pPr algn="l">
-              <a:lnSpc>
-                <a:spcPct val="105000"/>
-              </a:lnSpc>
-              <a:spcAft>
-                <a:spcPts val="1200"/>
-              </a:spcAft>
-            </a:pPr>
-            <a:r>
-              <a:rPr sz="1600" b="1" i="0">
-                <a:solidFill>
-                  <a:srgbClr val="2A9D8F"/>
-                </a:solidFill>
-                <a:latin typeface="Calibri"/>
-              </a:rPr>
-              <a:t>✓  </a:t>
-            </a:r>
-            <a:r>
-              <a:rPr sz="1600" b="1" i="0">
+              <a:t>Finite and polluting — coal, petroleum and natural gas (the fossil fuels).</a:t>
+            </a:r>
+          </a:p>
+        </p:txBody>
+      </p:sp>
+      <p:sp>
+        <p:nvSpPr>
+          <p:cNvPr id="21" name="Rounded Rectangle 20"/>
+          <p:cNvSpPr/>
+          <p:nvPr/>
+        </p:nvSpPr>
+        <p:spPr>
+          <a:xfrm>
+            <a:off x="6217920" y="3749039"/>
+            <a:ext cx="5212080" cy="1600200"/>
+          </a:xfrm>
+          <a:prstGeom prst="roundRect">
+            <a:avLst>
+              <a:gd name="adj" fmla="val 5000"/>
+            </a:avLst>
+          </a:prstGeom>
+          <a:solidFill>
+            <a:srgbClr val="FFFFFF"/>
+          </a:solidFill>
+          <a:ln>
+            <a:noFill/>
+          </a:ln>
+          <a:effectLst>
+            <a:outerShdw blurRad="88900" dist="38100" dir="5400000" rotWithShape="0" algn="bl">
+              <a:srgbClr val="000000">
+                <a:alpha val="16000"/>
+              </a:srgbClr>
+            </a:outerShdw>
+          </a:effectLst>
+        </p:spPr>
+        <p:style>
+          <a:lnRef idx="1">
+            <a:schemeClr val="accent1"/>
+          </a:lnRef>
+          <a:fillRef idx="3">
+            <a:schemeClr val="accent1"/>
+          </a:fillRef>
+          <a:effectRef idx="2">
+            <a:schemeClr val="accent1"/>
+          </a:effectRef>
+          <a:fontRef idx="minor">
+            <a:schemeClr val="lt1"/>
+          </a:fontRef>
+        </p:style>
+        <p:txBody>
+          <a:bodyPr rtlCol="0" anchor="ctr"/>
+          <a:lstStyle/>
+          <a:p>
+            <a:pPr algn="ctr"/>
+          </a:p>
+        </p:txBody>
+      </p:sp>
+      <p:sp>
+        <p:nvSpPr>
+          <p:cNvPr id="22" name="Rounded Rectangle 21"/>
+          <p:cNvSpPr/>
+          <p:nvPr/>
+        </p:nvSpPr>
+        <p:spPr>
+          <a:xfrm>
+            <a:off x="6537960" y="4041648"/>
+            <a:ext cx="502920" cy="502920"/>
+          </a:xfrm>
+          <a:prstGeom prst="roundRect">
+            <a:avLst>
+              <a:gd name="adj" fmla="val 30000"/>
+            </a:avLst>
+          </a:prstGeom>
+          <a:solidFill>
+            <a:srgbClr val="E63946"/>
+          </a:solidFill>
+          <a:ln>
+            <a:noFill/>
+          </a:ln>
+          <a:effectLst/>
+        </p:spPr>
+        <p:style>
+          <a:lnRef idx="1">
+            <a:schemeClr val="accent1"/>
+          </a:lnRef>
+          <a:fillRef idx="3">
+            <a:schemeClr val="accent1"/>
+          </a:fillRef>
+          <a:effectRef idx="2">
+            <a:schemeClr val="accent1"/>
+          </a:effectRef>
+          <a:fontRef idx="minor">
+            <a:schemeClr val="lt1"/>
+          </a:fontRef>
+        </p:style>
+        <p:txBody>
+          <a:bodyPr rtlCol="0" anchor="ctr"/>
+          <a:lstStyle/>
+          <a:p>
+            <a:pPr algn="ctr"/>
+          </a:p>
+        </p:txBody>
+      </p:sp>
+      <p:pic>
+        <p:nvPicPr>
+          <p:cNvPr id="23" name="Picture 22" descr="target_FFFFFF.png"/>
+          <p:cNvPicPr>
+            <a:picLocks noChangeAspect="1"/>
+          </p:cNvPicPr>
+          <p:nvPr/>
+        </p:nvPicPr>
+        <p:blipFill>
+          <a:blip r:embed="rId4"/>
+          <a:stretch>
+            <a:fillRect/>
+          </a:stretch>
+        </p:blipFill>
+        <p:spPr>
+          <a:xfrm>
+            <a:off x="6648602" y="4152290"/>
+            <a:ext cx="281635" cy="281635"/>
+          </a:xfrm>
+          <a:prstGeom prst="rect">
+            <a:avLst/>
+          </a:prstGeom>
+        </p:spPr>
+      </p:pic>
+      <p:sp>
+        <p:nvSpPr>
+          <p:cNvPr id="24" name="TextBox 23"/>
+          <p:cNvSpPr txBox="1"/>
+          <p:nvPr/>
+        </p:nvSpPr>
+        <p:spPr>
+          <a:xfrm>
+            <a:off x="7223760" y="4005072"/>
+            <a:ext cx="3931920" cy="457200"/>
+          </a:xfrm>
+          <a:prstGeom prst="rect">
+            <a:avLst/>
+          </a:prstGeom>
+          <a:noFill/>
+        </p:spPr>
+        <p:txBody>
+          <a:bodyPr wrap="square" anchor="t" lIns="0" rIns="0" tIns="0" bIns="0">
+            <a:spAutoFit/>
+          </a:bodyPr>
+          <a:lstStyle/>
+          <a:p>
+            <a:pPr algn="l"/>
+            <a:r>
+              <a:rPr sz="1700" b="1" i="0">
                 <a:solidFill>
                   <a:srgbClr val="1D2433"/>
                 </a:solidFill>
                 <a:latin typeface="Calibri"/>
               </a:rPr>
-              <a:t>Forms  —  </a:t>
-            </a:r>
-            <a:r>
-              <a:rPr sz="1500" b="0" i="0">
+              <a:t>Use wisely</a:t>
+            </a:r>
+          </a:p>
+        </p:txBody>
+      </p:sp>
+      <p:sp>
+        <p:nvSpPr>
+          <p:cNvPr id="25" name="TextBox 24"/>
+          <p:cNvSpPr txBox="1"/>
+          <p:nvPr/>
+        </p:nvSpPr>
+        <p:spPr>
+          <a:xfrm>
+            <a:off x="7223760" y="4498848"/>
+            <a:ext cx="3931920" cy="685800"/>
+          </a:xfrm>
+          <a:prstGeom prst="rect">
+            <a:avLst/>
+          </a:prstGeom>
+          <a:noFill/>
+        </p:spPr>
+        <p:txBody>
+          <a:bodyPr wrap="square" anchor="t" lIns="0" rIns="0" tIns="0" bIns="0">
+            <a:spAutoFit/>
+          </a:bodyPr>
+          <a:lstStyle/>
+          <a:p>
+            <a:pPr algn="l"/>
+            <a:r>
+              <a:rPr sz="1350" b="0" i="0">
                 <a:solidFill>
                   <a:srgbClr val="6B7280"/>
                 </a:solidFill>
                 <a:latin typeface="Calibri"/>
               </a:rPr>
-              <a:t>mechanical, heat, light, sound, electrical, chemical, nuclear</a:t>
-            </a:r>
-          </a:p>
-          <a:p>
-            <a:pPr algn="l">
-              <a:lnSpc>
-                <a:spcPct val="105000"/>
-              </a:lnSpc>
-              <a:spcAft>
-                <a:spcPts val="1200"/>
-              </a:spcAft>
-            </a:pPr>
-            <a:r>
-              <a:rPr sz="1600" b="1" i="0">
-                <a:solidFill>
-                  <a:srgbClr val="2A9D8F"/>
-                </a:solidFill>
-                <a:latin typeface="Calibri"/>
-              </a:rPr>
-              <a:t>✓  </a:t>
-            </a:r>
-            <a:r>
-              <a:rPr sz="1600" b="1" i="0">
-                <a:solidFill>
-                  <a:srgbClr val="1D2433"/>
-                </a:solidFill>
-                <a:latin typeface="Calibri"/>
-              </a:rPr>
-              <a:t>Transformations  —  </a:t>
-            </a:r>
-            <a:r>
-              <a:rPr sz="1500" b="0" i="0">
-                <a:solidFill>
-                  <a:srgbClr val="6B7280"/>
-                </a:solidFill>
-                <a:latin typeface="Calibri"/>
-              </a:rPr>
-              <a:t>devices change one form into others</a:t>
-            </a:r>
-          </a:p>
-          <a:p>
-            <a:pPr algn="l">
-              <a:lnSpc>
-                <a:spcPct val="105000"/>
-              </a:lnSpc>
-              <a:spcAft>
-                <a:spcPts val="1200"/>
-              </a:spcAft>
-            </a:pPr>
-            <a:r>
-              <a:rPr sz="1600" b="1" i="0">
-                <a:solidFill>
-                  <a:srgbClr val="2A9D8F"/>
-                </a:solidFill>
-                <a:latin typeface="Calibri"/>
-              </a:rPr>
-              <a:t>✓  </a:t>
-            </a:r>
-            <a:r>
-              <a:rPr sz="1600" b="1" i="0">
-                <a:solidFill>
-                  <a:srgbClr val="1D2433"/>
-                </a:solidFill>
-                <a:latin typeface="Calibri"/>
-              </a:rPr>
-              <a:t>Conservation  —  </a:t>
-            </a:r>
-            <a:r>
-              <a:rPr sz="1500" b="0" i="0">
-                <a:solidFill>
-                  <a:srgbClr val="6B7280"/>
-                </a:solidFill>
-                <a:latin typeface="Calibri"/>
-              </a:rPr>
-              <a:t>energy is never created or destroyed</a:t>
+              <a:t>Save energy and prefer renewables, since fossil fuels will run out.</a:t>
             </a:r>
           </a:p>
         </p:txBody>
@@ -17394,6 +17936,487 @@
 </file>
 
 <file path=ppt/slides/slide24.xml><?xml version="1.0" encoding="utf-8"?>
+<p:sld xmlns:a="http://schemas.openxmlformats.org/drawingml/2006/main" xmlns:p="http://schemas.openxmlformats.org/presentationml/2006/main" xmlns:r="http://schemas.openxmlformats.org/officeDocument/2006/relationships">
+  <p:cSld>
+    <p:bg>
+      <p:bgPr>
+        <a:solidFill>
+          <a:srgbClr val="F4F6F8"/>
+        </a:solidFill>
+        <a:effectLst/>
+      </p:bgPr>
+    </p:bg>
+    <p:spTree>
+      <p:nvGrpSpPr>
+        <p:cNvPr id="1" name=""/>
+        <p:cNvGrpSpPr/>
+        <p:nvPr/>
+      </p:nvGrpSpPr>
+      <p:grpSpPr/>
+      <p:sp>
+        <p:nvSpPr>
+          <p:cNvPr id="2" name="Oval 1"/>
+          <p:cNvSpPr/>
+          <p:nvPr/>
+        </p:nvSpPr>
+        <p:spPr>
+          <a:xfrm>
+            <a:off x="10927080" y="365760"/>
+            <a:ext cx="868680" cy="868680"/>
+          </a:xfrm>
+          <a:prstGeom prst="ellipse">
+            <a:avLst/>
+          </a:prstGeom>
+          <a:noFill/>
+          <a:ln w="15875">
+            <a:solidFill>
+              <a:srgbClr val="DDE2E8"/>
+            </a:solidFill>
+          </a:ln>
+          <a:effectLst/>
+        </p:spPr>
+        <p:style>
+          <a:lnRef idx="1">
+            <a:schemeClr val="accent1"/>
+          </a:lnRef>
+          <a:fillRef idx="3">
+            <a:schemeClr val="accent1"/>
+          </a:fillRef>
+          <a:effectRef idx="2">
+            <a:schemeClr val="accent1"/>
+          </a:effectRef>
+          <a:fontRef idx="minor">
+            <a:schemeClr val="lt1"/>
+          </a:fontRef>
+        </p:style>
+        <p:txBody>
+          <a:bodyPr rtlCol="0" anchor="ctr"/>
+          <a:lstStyle/>
+          <a:p>
+            <a:pPr algn="ctr"/>
+          </a:p>
+        </p:txBody>
+      </p:sp>
+      <p:sp>
+        <p:nvSpPr>
+          <p:cNvPr id="3" name="Rectangle 2"/>
+          <p:cNvSpPr/>
+          <p:nvPr/>
+        </p:nvSpPr>
+        <p:spPr>
+          <a:xfrm>
+            <a:off x="548640" y="502920"/>
+            <a:ext cx="256032" cy="256032"/>
+          </a:xfrm>
+          <a:prstGeom prst="rect">
+            <a:avLst/>
+          </a:prstGeom>
+          <a:solidFill>
+            <a:srgbClr val="0A9396"/>
+          </a:solidFill>
+          <a:ln>
+            <a:noFill/>
+          </a:ln>
+          <a:effectLst/>
+        </p:spPr>
+        <p:style>
+          <a:lnRef idx="1">
+            <a:schemeClr val="accent1"/>
+          </a:lnRef>
+          <a:fillRef idx="3">
+            <a:schemeClr val="accent1"/>
+          </a:fillRef>
+          <a:effectRef idx="2">
+            <a:schemeClr val="accent1"/>
+          </a:effectRef>
+          <a:fontRef idx="minor">
+            <a:schemeClr val="lt1"/>
+          </a:fontRef>
+        </p:style>
+        <p:txBody>
+          <a:bodyPr rtlCol="0" anchor="ctr"/>
+          <a:lstStyle/>
+          <a:p>
+            <a:pPr algn="ctr"/>
+          </a:p>
+        </p:txBody>
+      </p:sp>
+      <p:sp>
+        <p:nvSpPr>
+          <p:cNvPr id="4" name="TextBox 3"/>
+          <p:cNvSpPr txBox="1"/>
+          <p:nvPr/>
+        </p:nvSpPr>
+        <p:spPr>
+          <a:xfrm>
+            <a:off x="914400" y="457200"/>
+            <a:ext cx="9509760" cy="320040"/>
+          </a:xfrm>
+          <a:prstGeom prst="rect">
+            <a:avLst/>
+          </a:prstGeom>
+          <a:noFill/>
+        </p:spPr>
+        <p:txBody>
+          <a:bodyPr wrap="square" anchor="t" lIns="0" rIns="0" tIns="0" bIns="0">
+            <a:spAutoFit/>
+          </a:bodyPr>
+          <a:lstStyle/>
+          <a:p>
+            <a:pPr algn="l"/>
+            <a:r>
+              <a:rPr sz="1300" b="1" i="0">
+                <a:solidFill>
+                  <a:srgbClr val="0A9396"/>
+                </a:solidFill>
+                <a:latin typeface="Arial"/>
+              </a:rPr>
+              <a:t>WRAP UP</a:t>
+            </a:r>
+          </a:p>
+        </p:txBody>
+      </p:sp>
+      <p:sp>
+        <p:nvSpPr>
+          <p:cNvPr id="5" name="TextBox 4"/>
+          <p:cNvSpPr txBox="1"/>
+          <p:nvPr/>
+        </p:nvSpPr>
+        <p:spPr>
+          <a:xfrm>
+            <a:off x="548640" y="777240"/>
+            <a:ext cx="9966960" cy="822960"/>
+          </a:xfrm>
+          <a:prstGeom prst="rect">
+            <a:avLst/>
+          </a:prstGeom>
+          <a:noFill/>
+        </p:spPr>
+        <p:txBody>
+          <a:bodyPr wrap="square" anchor="t" lIns="0" rIns="0" tIns="0" bIns="0">
+            <a:spAutoFit/>
+          </a:bodyPr>
+          <a:lstStyle/>
+          <a:p>
+            <a:pPr algn="l"/>
+            <a:r>
+              <a:rPr sz="3000" b="1" i="0">
+                <a:solidFill>
+                  <a:srgbClr val="1D2433"/>
+                </a:solidFill>
+                <a:latin typeface="Calibri"/>
+              </a:rPr>
+              <a:t>Quick Recap</a:t>
+            </a:r>
+          </a:p>
+        </p:txBody>
+      </p:sp>
+      <p:sp>
+        <p:nvSpPr>
+          <p:cNvPr id="6" name="Rounded Rectangle 5"/>
+          <p:cNvSpPr/>
+          <p:nvPr/>
+        </p:nvSpPr>
+        <p:spPr>
+          <a:xfrm>
+            <a:off x="640080" y="1828800"/>
+            <a:ext cx="10881360" cy="4114800"/>
+          </a:xfrm>
+          <a:prstGeom prst="roundRect">
+            <a:avLst>
+              <a:gd name="adj" fmla="val 3000"/>
+            </a:avLst>
+          </a:prstGeom>
+          <a:solidFill>
+            <a:srgbClr val="FFFFFF"/>
+          </a:solidFill>
+          <a:ln>
+            <a:noFill/>
+          </a:ln>
+          <a:effectLst>
+            <a:outerShdw blurRad="88900" dist="38100" dir="5400000" rotWithShape="0" algn="bl">
+              <a:srgbClr val="000000">
+                <a:alpha val="16000"/>
+              </a:srgbClr>
+            </a:outerShdw>
+          </a:effectLst>
+        </p:spPr>
+        <p:style>
+          <a:lnRef idx="1">
+            <a:schemeClr val="accent1"/>
+          </a:lnRef>
+          <a:fillRef idx="3">
+            <a:schemeClr val="accent1"/>
+          </a:fillRef>
+          <a:effectRef idx="2">
+            <a:schemeClr val="accent1"/>
+          </a:effectRef>
+          <a:fontRef idx="minor">
+            <a:schemeClr val="lt1"/>
+          </a:fontRef>
+        </p:style>
+        <p:txBody>
+          <a:bodyPr rtlCol="0" anchor="ctr"/>
+          <a:lstStyle/>
+          <a:p>
+            <a:pPr algn="ctr"/>
+          </a:p>
+        </p:txBody>
+      </p:sp>
+      <p:sp>
+        <p:nvSpPr>
+          <p:cNvPr id="7" name="TextBox 6"/>
+          <p:cNvSpPr txBox="1"/>
+          <p:nvPr/>
+        </p:nvSpPr>
+        <p:spPr>
+          <a:xfrm>
+            <a:off x="1005840" y="2148840"/>
+            <a:ext cx="10058400" cy="3657600"/>
+          </a:xfrm>
+          <a:prstGeom prst="rect">
+            <a:avLst/>
+          </a:prstGeom>
+          <a:noFill/>
+        </p:spPr>
+        <p:txBody>
+          <a:bodyPr wrap="square" anchor="t" lIns="0" rIns="0" tIns="0" bIns="0">
+            <a:spAutoFit/>
+          </a:bodyPr>
+          <a:lstStyle/>
+          <a:p>
+            <a:pPr algn="l">
+              <a:lnSpc>
+                <a:spcPct val="105000"/>
+              </a:lnSpc>
+              <a:spcAft>
+                <a:spcPts val="1200"/>
+              </a:spcAft>
+            </a:pPr>
+            <a:r>
+              <a:rPr sz="1600" b="1" i="0">
+                <a:solidFill>
+                  <a:srgbClr val="2A9D8F"/>
+                </a:solidFill>
+                <a:latin typeface="Calibri"/>
+              </a:rPr>
+              <a:t>✓  </a:t>
+            </a:r>
+            <a:r>
+              <a:rPr sz="1600" b="1" i="0">
+                <a:solidFill>
+                  <a:srgbClr val="1D2433"/>
+                </a:solidFill>
+                <a:latin typeface="Calibri"/>
+              </a:rPr>
+              <a:t>Gravitational PE  —  </a:t>
+            </a:r>
+            <a:r>
+              <a:rPr sz="1500" b="0" i="0">
+                <a:solidFill>
+                  <a:srgbClr val="6B7280"/>
+                </a:solidFill>
+                <a:latin typeface="Calibri"/>
+              </a:rPr>
+              <a:t>PE = m g h; grows with mass and height</a:t>
+            </a:r>
+          </a:p>
+          <a:p>
+            <a:pPr algn="l">
+              <a:lnSpc>
+                <a:spcPct val="105000"/>
+              </a:lnSpc>
+              <a:spcAft>
+                <a:spcPts val="1200"/>
+              </a:spcAft>
+            </a:pPr>
+            <a:r>
+              <a:rPr sz="1600" b="1" i="0">
+                <a:solidFill>
+                  <a:srgbClr val="2A9D8F"/>
+                </a:solidFill>
+                <a:latin typeface="Calibri"/>
+              </a:rPr>
+              <a:t>✓  </a:t>
+            </a:r>
+            <a:r>
+              <a:rPr sz="1600" b="1" i="0">
+                <a:solidFill>
+                  <a:srgbClr val="1D2433"/>
+                </a:solidFill>
+                <a:latin typeface="Calibri"/>
+              </a:rPr>
+              <a:t>Kinetic energy  —  </a:t>
+            </a:r>
+            <a:r>
+              <a:rPr sz="1500" b="0" i="0">
+                <a:solidFill>
+                  <a:srgbClr val="6B7280"/>
+                </a:solidFill>
+                <a:latin typeface="Calibri"/>
+              </a:rPr>
+              <a:t>KE = ½ m v²; grows with the square of speed</a:t>
+            </a:r>
+          </a:p>
+          <a:p>
+            <a:pPr algn="l">
+              <a:lnSpc>
+                <a:spcPct val="105000"/>
+              </a:lnSpc>
+              <a:spcAft>
+                <a:spcPts val="1200"/>
+              </a:spcAft>
+            </a:pPr>
+            <a:r>
+              <a:rPr sz="1600" b="1" i="0">
+                <a:solidFill>
+                  <a:srgbClr val="2A9D8F"/>
+                </a:solidFill>
+                <a:latin typeface="Calibri"/>
+              </a:rPr>
+              <a:t>✓  </a:t>
+            </a:r>
+            <a:r>
+              <a:rPr sz="1600" b="1" i="0">
+                <a:solidFill>
+                  <a:srgbClr val="1D2433"/>
+                </a:solidFill>
+                <a:latin typeface="Calibri"/>
+              </a:rPr>
+              <a:t>PE → KE  —  </a:t>
+            </a:r>
+            <a:r>
+              <a:rPr sz="1500" b="0" i="0">
+                <a:solidFill>
+                  <a:srgbClr val="6B7280"/>
+                </a:solidFill>
+                <a:latin typeface="Calibri"/>
+              </a:rPr>
+              <a:t>a falling body converts PE into KE</a:t>
+            </a:r>
+          </a:p>
+          <a:p>
+            <a:pPr algn="l">
+              <a:lnSpc>
+                <a:spcPct val="105000"/>
+              </a:lnSpc>
+              <a:spcAft>
+                <a:spcPts val="1200"/>
+              </a:spcAft>
+            </a:pPr>
+            <a:r>
+              <a:rPr sz="1600" b="1" i="0">
+                <a:solidFill>
+                  <a:srgbClr val="2A9D8F"/>
+                </a:solidFill>
+                <a:latin typeface="Calibri"/>
+              </a:rPr>
+              <a:t>✓  </a:t>
+            </a:r>
+            <a:r>
+              <a:rPr sz="1600" b="1" i="0">
+                <a:solidFill>
+                  <a:srgbClr val="1D2433"/>
+                </a:solidFill>
+                <a:latin typeface="Calibri"/>
+              </a:rPr>
+              <a:t>Forms  —  </a:t>
+            </a:r>
+            <a:r>
+              <a:rPr sz="1500" b="0" i="0">
+                <a:solidFill>
+                  <a:srgbClr val="6B7280"/>
+                </a:solidFill>
+                <a:latin typeface="Calibri"/>
+              </a:rPr>
+              <a:t>mechanical, heat, light, sound, electrical, chemical, nuclear</a:t>
+            </a:r>
+          </a:p>
+          <a:p>
+            <a:pPr algn="l">
+              <a:lnSpc>
+                <a:spcPct val="105000"/>
+              </a:lnSpc>
+              <a:spcAft>
+                <a:spcPts val="1200"/>
+              </a:spcAft>
+            </a:pPr>
+            <a:r>
+              <a:rPr sz="1600" b="1" i="0">
+                <a:solidFill>
+                  <a:srgbClr val="2A9D8F"/>
+                </a:solidFill>
+                <a:latin typeface="Calibri"/>
+              </a:rPr>
+              <a:t>✓  </a:t>
+            </a:r>
+            <a:r>
+              <a:rPr sz="1600" b="1" i="0">
+                <a:solidFill>
+                  <a:srgbClr val="1D2433"/>
+                </a:solidFill>
+                <a:latin typeface="Calibri"/>
+              </a:rPr>
+              <a:t>Transformations  —  </a:t>
+            </a:r>
+            <a:r>
+              <a:rPr sz="1500" b="0" i="0">
+                <a:solidFill>
+                  <a:srgbClr val="6B7280"/>
+                </a:solidFill>
+                <a:latin typeface="Calibri"/>
+              </a:rPr>
+              <a:t>devices change one form into others</a:t>
+            </a:r>
+          </a:p>
+          <a:p>
+            <a:pPr algn="l">
+              <a:lnSpc>
+                <a:spcPct val="105000"/>
+              </a:lnSpc>
+              <a:spcAft>
+                <a:spcPts val="1200"/>
+              </a:spcAft>
+            </a:pPr>
+            <a:r>
+              <a:rPr sz="1600" b="1" i="0">
+                <a:solidFill>
+                  <a:srgbClr val="2A9D8F"/>
+                </a:solidFill>
+                <a:latin typeface="Calibri"/>
+              </a:rPr>
+              <a:t>✓  </a:t>
+            </a:r>
+            <a:r>
+              <a:rPr sz="1600" b="1" i="0">
+                <a:solidFill>
+                  <a:srgbClr val="1D2433"/>
+                </a:solidFill>
+                <a:latin typeface="Calibri"/>
+              </a:rPr>
+              <a:t>Conservation  —  </a:t>
+            </a:r>
+            <a:r>
+              <a:rPr sz="1500" b="0" i="0">
+                <a:solidFill>
+                  <a:srgbClr val="6B7280"/>
+                </a:solidFill>
+                <a:latin typeface="Calibri"/>
+              </a:rPr>
+              <a:t>energy is never created or destroyed</a:t>
+            </a:r>
+          </a:p>
+        </p:txBody>
+      </p:sp>
+    </p:spTree>
+  </p:cSld>
+  <p:clrMapOvr>
+    <a:masterClrMapping/>
+  </p:clrMapOvr>
+</p:sld>
+</file>
+
+<file path=ppt/slides/slide25.xml><?xml version="1.0" encoding="utf-8"?>
 <p:sld xmlns:a="http://schemas.openxmlformats.org/drawingml/2006/main" xmlns:p="http://schemas.openxmlformats.org/presentationml/2006/main" xmlns:r="http://schemas.openxmlformats.org/officeDocument/2006/relationships">
   <p:cSld>
     <p:bg>
@@ -17556,917 +18579,6 @@
                 <a:latin typeface="Calibri"/>
               </a:rPr>
               <a:t>5 questions  •  think before the answer reveals on the next slide</a:t>
-            </a:r>
-          </a:p>
-        </p:txBody>
-      </p:sp>
-    </p:spTree>
-  </p:cSld>
-  <p:clrMapOvr>
-    <a:masterClrMapping/>
-  </p:clrMapOvr>
-</p:sld>
-</file>
-
-<file path=ppt/slides/slide25.xml><?xml version="1.0" encoding="utf-8"?>
-<p:sld xmlns:a="http://schemas.openxmlformats.org/drawingml/2006/main" xmlns:p="http://schemas.openxmlformats.org/presentationml/2006/main" xmlns:r="http://schemas.openxmlformats.org/officeDocument/2006/relationships">
-  <p:cSld>
-    <p:bg>
-      <p:bgPr>
-        <a:solidFill>
-          <a:srgbClr val="F4F6F8"/>
-        </a:solidFill>
-        <a:effectLst/>
-      </p:bgPr>
-    </p:bg>
-    <p:spTree>
-      <p:nvGrpSpPr>
-        <p:cNvPr id="1" name=""/>
-        <p:cNvGrpSpPr/>
-        <p:nvPr/>
-      </p:nvGrpSpPr>
-      <p:grpSpPr/>
-      <p:sp>
-        <p:nvSpPr>
-          <p:cNvPr id="2" name="Oval 1"/>
-          <p:cNvSpPr/>
-          <p:nvPr/>
-        </p:nvSpPr>
-        <p:spPr>
-          <a:xfrm>
-            <a:off x="10927080" y="365760"/>
-            <a:ext cx="868680" cy="868680"/>
-          </a:xfrm>
-          <a:prstGeom prst="ellipse">
-            <a:avLst/>
-          </a:prstGeom>
-          <a:noFill/>
-          <a:ln w="15875">
-            <a:solidFill>
-              <a:srgbClr val="DDE2E8"/>
-            </a:solidFill>
-          </a:ln>
-          <a:effectLst/>
-        </p:spPr>
-        <p:style>
-          <a:lnRef idx="1">
-            <a:schemeClr val="accent1"/>
-          </a:lnRef>
-          <a:fillRef idx="3">
-            <a:schemeClr val="accent1"/>
-          </a:fillRef>
-          <a:effectRef idx="2">
-            <a:schemeClr val="accent1"/>
-          </a:effectRef>
-          <a:fontRef idx="minor">
-            <a:schemeClr val="lt1"/>
-          </a:fontRef>
-        </p:style>
-        <p:txBody>
-          <a:bodyPr rtlCol="0" anchor="ctr"/>
-          <a:lstStyle/>
-          <a:p>
-            <a:pPr algn="ctr"/>
-          </a:p>
-        </p:txBody>
-      </p:sp>
-      <p:sp>
-        <p:nvSpPr>
-          <p:cNvPr id="3" name="Rectangle 2"/>
-          <p:cNvSpPr/>
-          <p:nvPr/>
-        </p:nvSpPr>
-        <p:spPr>
-          <a:xfrm>
-            <a:off x="548640" y="502920"/>
-            <a:ext cx="256032" cy="256032"/>
-          </a:xfrm>
-          <a:prstGeom prst="rect">
-            <a:avLst/>
-          </a:prstGeom>
-          <a:solidFill>
-            <a:srgbClr val="0A9396"/>
-          </a:solidFill>
-          <a:ln>
-            <a:noFill/>
-          </a:ln>
-          <a:effectLst/>
-        </p:spPr>
-        <p:style>
-          <a:lnRef idx="1">
-            <a:schemeClr val="accent1"/>
-          </a:lnRef>
-          <a:fillRef idx="3">
-            <a:schemeClr val="accent1"/>
-          </a:fillRef>
-          <a:effectRef idx="2">
-            <a:schemeClr val="accent1"/>
-          </a:effectRef>
-          <a:fontRef idx="minor">
-            <a:schemeClr val="lt1"/>
-          </a:fontRef>
-        </p:style>
-        <p:txBody>
-          <a:bodyPr rtlCol="0" anchor="ctr"/>
-          <a:lstStyle/>
-          <a:p>
-            <a:pPr algn="ctr"/>
-          </a:p>
-        </p:txBody>
-      </p:sp>
-      <p:sp>
-        <p:nvSpPr>
-          <p:cNvPr id="4" name="TextBox 3"/>
-          <p:cNvSpPr txBox="1"/>
-          <p:nvPr/>
-        </p:nvSpPr>
-        <p:spPr>
-          <a:xfrm>
-            <a:off x="914400" y="457200"/>
-            <a:ext cx="9509760" cy="320040"/>
-          </a:xfrm>
-          <a:prstGeom prst="rect">
-            <a:avLst/>
-          </a:prstGeom>
-          <a:noFill/>
-        </p:spPr>
-        <p:txBody>
-          <a:bodyPr wrap="square" anchor="t" lIns="0" rIns="0" tIns="0" bIns="0">
-            <a:spAutoFit/>
-          </a:bodyPr>
-          <a:lstStyle/>
-          <a:p>
-            <a:pPr algn="l"/>
-            <a:r>
-              <a:rPr sz="1300" b="1" i="0">
-                <a:solidFill>
-                  <a:srgbClr val="0A9396"/>
-                </a:solidFill>
-                <a:latin typeface="Arial"/>
-              </a:rPr>
-              <a:t>QUIZ QUESTION</a:t>
-            </a:r>
-          </a:p>
-        </p:txBody>
-      </p:sp>
-      <p:sp>
-        <p:nvSpPr>
-          <p:cNvPr id="5" name="TextBox 4"/>
-          <p:cNvSpPr txBox="1"/>
-          <p:nvPr/>
-        </p:nvSpPr>
-        <p:spPr>
-          <a:xfrm>
-            <a:off x="548640" y="777240"/>
-            <a:ext cx="9966960" cy="822960"/>
-          </a:xfrm>
-          <a:prstGeom prst="rect">
-            <a:avLst/>
-          </a:prstGeom>
-          <a:noFill/>
-        </p:spPr>
-        <p:txBody>
-          <a:bodyPr wrap="square" anchor="t" lIns="0" rIns="0" tIns="0" bIns="0">
-            <a:spAutoFit/>
-          </a:bodyPr>
-          <a:lstStyle/>
-          <a:p>
-            <a:pPr algn="l"/>
-            <a:r>
-              <a:rPr sz="3000" b="1" i="0">
-                <a:solidFill>
-                  <a:srgbClr val="1D2433"/>
-                </a:solidFill>
-                <a:latin typeface="Calibri"/>
-              </a:rPr>
-              <a:t>Q1 — KE Value</a:t>
-            </a:r>
-          </a:p>
-        </p:txBody>
-      </p:sp>
-      <p:sp>
-        <p:nvSpPr>
-          <p:cNvPr id="6" name="Rounded Rectangle 5"/>
-          <p:cNvSpPr/>
-          <p:nvPr/>
-        </p:nvSpPr>
-        <p:spPr>
-          <a:xfrm>
-            <a:off x="640080" y="1783080"/>
-            <a:ext cx="10881360" cy="1325880"/>
-          </a:xfrm>
-          <a:prstGeom prst="roundRect">
-            <a:avLst>
-              <a:gd name="adj" fmla="val 4000"/>
-            </a:avLst>
-          </a:prstGeom>
-          <a:solidFill>
-            <a:srgbClr val="FFFFFF"/>
-          </a:solidFill>
-          <a:ln>
-            <a:noFill/>
-          </a:ln>
-          <a:effectLst>
-            <a:outerShdw blurRad="88900" dist="38100" dir="5400000" rotWithShape="0" algn="bl">
-              <a:srgbClr val="000000">
-                <a:alpha val="16000"/>
-              </a:srgbClr>
-            </a:outerShdw>
-          </a:effectLst>
-        </p:spPr>
-        <p:style>
-          <a:lnRef idx="1">
-            <a:schemeClr val="accent1"/>
-          </a:lnRef>
-          <a:fillRef idx="3">
-            <a:schemeClr val="accent1"/>
-          </a:fillRef>
-          <a:effectRef idx="2">
-            <a:schemeClr val="accent1"/>
-          </a:effectRef>
-          <a:fontRef idx="minor">
-            <a:schemeClr val="lt1"/>
-          </a:fontRef>
-        </p:style>
-        <p:txBody>
-          <a:bodyPr rtlCol="0" anchor="ctr"/>
-          <a:lstStyle/>
-          <a:p>
-            <a:pPr algn="ctr"/>
-          </a:p>
-        </p:txBody>
-      </p:sp>
-      <p:sp>
-        <p:nvSpPr>
-          <p:cNvPr id="7" name="TextBox 6"/>
-          <p:cNvSpPr txBox="1"/>
-          <p:nvPr/>
-        </p:nvSpPr>
-        <p:spPr>
-          <a:xfrm>
-            <a:off x="1005840" y="1783080"/>
-            <a:ext cx="10149840" cy="1325880"/>
-          </a:xfrm>
-          <a:prstGeom prst="rect">
-            <a:avLst/>
-          </a:prstGeom>
-          <a:noFill/>
-        </p:spPr>
-        <p:txBody>
-          <a:bodyPr wrap="square" anchor="ctr" lIns="0" rIns="0" tIns="0" bIns="0">
-            <a:spAutoFit/>
-          </a:bodyPr>
-          <a:lstStyle/>
-          <a:p>
-            <a:pPr algn="l"/>
-            <a:r>
-              <a:rPr sz="1800" b="1" i="0">
-                <a:solidFill>
-                  <a:srgbClr val="1D2433"/>
-                </a:solidFill>
-                <a:latin typeface="Calibri"/>
-              </a:rPr>
-              <a:t>A 2 kg ball moves at 3 m/s. Its kinetic energy is:</a:t>
-            </a:r>
-          </a:p>
-        </p:txBody>
-      </p:sp>
-      <p:sp>
-        <p:nvSpPr>
-          <p:cNvPr id="8" name="Rounded Rectangle 7"/>
-          <p:cNvSpPr/>
-          <p:nvPr/>
-        </p:nvSpPr>
-        <p:spPr>
-          <a:xfrm>
-            <a:off x="640080" y="3337560"/>
-            <a:ext cx="5349240" cy="868680"/>
-          </a:xfrm>
-          <a:prstGeom prst="roundRect">
-            <a:avLst>
-              <a:gd name="adj" fmla="val 12000"/>
-            </a:avLst>
-          </a:prstGeom>
-          <a:solidFill>
-            <a:srgbClr val="EAF1F4"/>
-          </a:solidFill>
-          <a:ln>
-            <a:noFill/>
-          </a:ln>
-          <a:effectLst/>
-        </p:spPr>
-        <p:style>
-          <a:lnRef idx="1">
-            <a:schemeClr val="accent1"/>
-          </a:lnRef>
-          <a:fillRef idx="3">
-            <a:schemeClr val="accent1"/>
-          </a:fillRef>
-          <a:effectRef idx="2">
-            <a:schemeClr val="accent1"/>
-          </a:effectRef>
-          <a:fontRef idx="minor">
-            <a:schemeClr val="lt1"/>
-          </a:fontRef>
-        </p:style>
-        <p:txBody>
-          <a:bodyPr rtlCol="0" anchor="ctr"/>
-          <a:lstStyle/>
-          <a:p>
-            <a:pPr algn="ctr"/>
-          </a:p>
-        </p:txBody>
-      </p:sp>
-      <p:sp>
-        <p:nvSpPr>
-          <p:cNvPr id="9" name="Oval 8"/>
-          <p:cNvSpPr/>
-          <p:nvPr/>
-        </p:nvSpPr>
-        <p:spPr>
-          <a:xfrm>
-            <a:off x="914400" y="3566160"/>
-            <a:ext cx="411480" cy="411480"/>
-          </a:xfrm>
-          <a:prstGeom prst="ellipse">
-            <a:avLst/>
-          </a:prstGeom>
-          <a:solidFill>
-            <a:srgbClr val="0A9396"/>
-          </a:solidFill>
-          <a:ln>
-            <a:noFill/>
-          </a:ln>
-          <a:effectLst/>
-        </p:spPr>
-        <p:style>
-          <a:lnRef idx="1">
-            <a:schemeClr val="accent1"/>
-          </a:lnRef>
-          <a:fillRef idx="3">
-            <a:schemeClr val="accent1"/>
-          </a:fillRef>
-          <a:effectRef idx="2">
-            <a:schemeClr val="accent1"/>
-          </a:effectRef>
-          <a:fontRef idx="minor">
-            <a:schemeClr val="lt1"/>
-          </a:fontRef>
-        </p:style>
-        <p:txBody>
-          <a:bodyPr rtlCol="0" anchor="ctr"/>
-          <a:lstStyle/>
-          <a:p>
-            <a:pPr algn="ctr"/>
-          </a:p>
-        </p:txBody>
-      </p:sp>
-      <p:sp>
-        <p:nvSpPr>
-          <p:cNvPr id="10" name="TextBox 9"/>
-          <p:cNvSpPr txBox="1"/>
-          <p:nvPr/>
-        </p:nvSpPr>
-        <p:spPr>
-          <a:xfrm>
-            <a:off x="914400" y="3566160"/>
-            <a:ext cx="411480" cy="411480"/>
-          </a:xfrm>
-          <a:prstGeom prst="rect">
-            <a:avLst/>
-          </a:prstGeom>
-          <a:noFill/>
-        </p:spPr>
-        <p:txBody>
-          <a:bodyPr wrap="square" anchor="ctr" lIns="0" rIns="0" tIns="0" bIns="0">
-            <a:spAutoFit/>
-          </a:bodyPr>
-          <a:lstStyle/>
-          <a:p>
-            <a:pPr algn="ctr"/>
-            <a:r>
-              <a:rPr sz="1400" b="1" i="0">
-                <a:solidFill>
-                  <a:srgbClr val="FFFFFF"/>
-                </a:solidFill>
-                <a:latin typeface="Calibri"/>
-              </a:rPr>
-              <a:t>A</a:t>
-            </a:r>
-          </a:p>
-        </p:txBody>
-      </p:sp>
-      <p:sp>
-        <p:nvSpPr>
-          <p:cNvPr id="11" name="TextBox 10"/>
-          <p:cNvSpPr txBox="1"/>
-          <p:nvPr/>
-        </p:nvSpPr>
-        <p:spPr>
-          <a:xfrm>
-            <a:off x="1508760" y="3337560"/>
-            <a:ext cx="4297680" cy="868680"/>
-          </a:xfrm>
-          <a:prstGeom prst="rect">
-            <a:avLst/>
-          </a:prstGeom>
-          <a:noFill/>
-        </p:spPr>
-        <p:txBody>
-          <a:bodyPr wrap="square" anchor="ctr" lIns="0" rIns="0" tIns="0" bIns="0">
-            <a:spAutoFit/>
-          </a:bodyPr>
-          <a:lstStyle/>
-          <a:p>
-            <a:pPr algn="l"/>
-            <a:r>
-              <a:rPr sz="1450" b="0" i="0">
-                <a:solidFill>
-                  <a:srgbClr val="1D2433"/>
-                </a:solidFill>
-                <a:latin typeface="Calibri"/>
-              </a:rPr>
-              <a:t>3 J</a:t>
-            </a:r>
-          </a:p>
-        </p:txBody>
-      </p:sp>
-      <p:sp>
-        <p:nvSpPr>
-          <p:cNvPr id="12" name="Rounded Rectangle 11"/>
-          <p:cNvSpPr/>
-          <p:nvPr/>
-        </p:nvSpPr>
-        <p:spPr>
-          <a:xfrm>
-            <a:off x="6172200" y="3337560"/>
-            <a:ext cx="5349240" cy="868680"/>
-          </a:xfrm>
-          <a:prstGeom prst="roundRect">
-            <a:avLst>
-              <a:gd name="adj" fmla="val 12000"/>
-            </a:avLst>
-          </a:prstGeom>
-          <a:solidFill>
-            <a:srgbClr val="EAF1F4"/>
-          </a:solidFill>
-          <a:ln>
-            <a:noFill/>
-          </a:ln>
-          <a:effectLst/>
-        </p:spPr>
-        <p:style>
-          <a:lnRef idx="1">
-            <a:schemeClr val="accent1"/>
-          </a:lnRef>
-          <a:fillRef idx="3">
-            <a:schemeClr val="accent1"/>
-          </a:fillRef>
-          <a:effectRef idx="2">
-            <a:schemeClr val="accent1"/>
-          </a:effectRef>
-          <a:fontRef idx="minor">
-            <a:schemeClr val="lt1"/>
-          </a:fontRef>
-        </p:style>
-        <p:txBody>
-          <a:bodyPr rtlCol="0" anchor="ctr"/>
-          <a:lstStyle/>
-          <a:p>
-            <a:pPr algn="ctr"/>
-          </a:p>
-        </p:txBody>
-      </p:sp>
-      <p:sp>
-        <p:nvSpPr>
-          <p:cNvPr id="13" name="Oval 12"/>
-          <p:cNvSpPr/>
-          <p:nvPr/>
-        </p:nvSpPr>
-        <p:spPr>
-          <a:xfrm>
-            <a:off x="6446520" y="3566160"/>
-            <a:ext cx="411480" cy="411480"/>
-          </a:xfrm>
-          <a:prstGeom prst="ellipse">
-            <a:avLst/>
-          </a:prstGeom>
-          <a:solidFill>
-            <a:srgbClr val="0A9396"/>
-          </a:solidFill>
-          <a:ln>
-            <a:noFill/>
-          </a:ln>
-          <a:effectLst/>
-        </p:spPr>
-        <p:style>
-          <a:lnRef idx="1">
-            <a:schemeClr val="accent1"/>
-          </a:lnRef>
-          <a:fillRef idx="3">
-            <a:schemeClr val="accent1"/>
-          </a:fillRef>
-          <a:effectRef idx="2">
-            <a:schemeClr val="accent1"/>
-          </a:effectRef>
-          <a:fontRef idx="minor">
-            <a:schemeClr val="lt1"/>
-          </a:fontRef>
-        </p:style>
-        <p:txBody>
-          <a:bodyPr rtlCol="0" anchor="ctr"/>
-          <a:lstStyle/>
-          <a:p>
-            <a:pPr algn="ctr"/>
-          </a:p>
-        </p:txBody>
-      </p:sp>
-      <p:sp>
-        <p:nvSpPr>
-          <p:cNvPr id="14" name="TextBox 13"/>
-          <p:cNvSpPr txBox="1"/>
-          <p:nvPr/>
-        </p:nvSpPr>
-        <p:spPr>
-          <a:xfrm>
-            <a:off x="6446520" y="3566160"/>
-            <a:ext cx="411480" cy="411480"/>
-          </a:xfrm>
-          <a:prstGeom prst="rect">
-            <a:avLst/>
-          </a:prstGeom>
-          <a:noFill/>
-        </p:spPr>
-        <p:txBody>
-          <a:bodyPr wrap="square" anchor="ctr" lIns="0" rIns="0" tIns="0" bIns="0">
-            <a:spAutoFit/>
-          </a:bodyPr>
-          <a:lstStyle/>
-          <a:p>
-            <a:pPr algn="ctr"/>
-            <a:r>
-              <a:rPr sz="1400" b="1" i="0">
-                <a:solidFill>
-                  <a:srgbClr val="FFFFFF"/>
-                </a:solidFill>
-                <a:latin typeface="Calibri"/>
-              </a:rPr>
-              <a:t>B</a:t>
-            </a:r>
-          </a:p>
-        </p:txBody>
-      </p:sp>
-      <p:sp>
-        <p:nvSpPr>
-          <p:cNvPr id="15" name="TextBox 14"/>
-          <p:cNvSpPr txBox="1"/>
-          <p:nvPr/>
-        </p:nvSpPr>
-        <p:spPr>
-          <a:xfrm>
-            <a:off x="7040880" y="3337560"/>
-            <a:ext cx="4297680" cy="868680"/>
-          </a:xfrm>
-          <a:prstGeom prst="rect">
-            <a:avLst/>
-          </a:prstGeom>
-          <a:noFill/>
-        </p:spPr>
-        <p:txBody>
-          <a:bodyPr wrap="square" anchor="ctr" lIns="0" rIns="0" tIns="0" bIns="0">
-            <a:spAutoFit/>
-          </a:bodyPr>
-          <a:lstStyle/>
-          <a:p>
-            <a:pPr algn="l"/>
-            <a:r>
-              <a:rPr sz="1450" b="0" i="0">
-                <a:solidFill>
-                  <a:srgbClr val="1D2433"/>
-                </a:solidFill>
-                <a:latin typeface="Calibri"/>
-              </a:rPr>
-              <a:t>6 J</a:t>
-            </a:r>
-          </a:p>
-        </p:txBody>
-      </p:sp>
-      <p:sp>
-        <p:nvSpPr>
-          <p:cNvPr id="16" name="Rounded Rectangle 15"/>
-          <p:cNvSpPr/>
-          <p:nvPr/>
-        </p:nvSpPr>
-        <p:spPr>
-          <a:xfrm>
-            <a:off x="640080" y="4370831"/>
-            <a:ext cx="5349240" cy="868680"/>
-          </a:xfrm>
-          <a:prstGeom prst="roundRect">
-            <a:avLst>
-              <a:gd name="adj" fmla="val 12000"/>
-            </a:avLst>
-          </a:prstGeom>
-          <a:solidFill>
-            <a:srgbClr val="EAF1F4"/>
-          </a:solidFill>
-          <a:ln>
-            <a:noFill/>
-          </a:ln>
-          <a:effectLst/>
-        </p:spPr>
-        <p:style>
-          <a:lnRef idx="1">
-            <a:schemeClr val="accent1"/>
-          </a:lnRef>
-          <a:fillRef idx="3">
-            <a:schemeClr val="accent1"/>
-          </a:fillRef>
-          <a:effectRef idx="2">
-            <a:schemeClr val="accent1"/>
-          </a:effectRef>
-          <a:fontRef idx="minor">
-            <a:schemeClr val="lt1"/>
-          </a:fontRef>
-        </p:style>
-        <p:txBody>
-          <a:bodyPr rtlCol="0" anchor="ctr"/>
-          <a:lstStyle/>
-          <a:p>
-            <a:pPr algn="ctr"/>
-          </a:p>
-        </p:txBody>
-      </p:sp>
-      <p:sp>
-        <p:nvSpPr>
-          <p:cNvPr id="17" name="Oval 16"/>
-          <p:cNvSpPr/>
-          <p:nvPr/>
-        </p:nvSpPr>
-        <p:spPr>
-          <a:xfrm>
-            <a:off x="914400" y="4599431"/>
-            <a:ext cx="411480" cy="411480"/>
-          </a:xfrm>
-          <a:prstGeom prst="ellipse">
-            <a:avLst/>
-          </a:prstGeom>
-          <a:solidFill>
-            <a:srgbClr val="0A9396"/>
-          </a:solidFill>
-          <a:ln>
-            <a:noFill/>
-          </a:ln>
-          <a:effectLst/>
-        </p:spPr>
-        <p:style>
-          <a:lnRef idx="1">
-            <a:schemeClr val="accent1"/>
-          </a:lnRef>
-          <a:fillRef idx="3">
-            <a:schemeClr val="accent1"/>
-          </a:fillRef>
-          <a:effectRef idx="2">
-            <a:schemeClr val="accent1"/>
-          </a:effectRef>
-          <a:fontRef idx="minor">
-            <a:schemeClr val="lt1"/>
-          </a:fontRef>
-        </p:style>
-        <p:txBody>
-          <a:bodyPr rtlCol="0" anchor="ctr"/>
-          <a:lstStyle/>
-          <a:p>
-            <a:pPr algn="ctr"/>
-          </a:p>
-        </p:txBody>
-      </p:sp>
-      <p:sp>
-        <p:nvSpPr>
-          <p:cNvPr id="18" name="TextBox 17"/>
-          <p:cNvSpPr txBox="1"/>
-          <p:nvPr/>
-        </p:nvSpPr>
-        <p:spPr>
-          <a:xfrm>
-            <a:off x="914400" y="4599431"/>
-            <a:ext cx="411480" cy="411480"/>
-          </a:xfrm>
-          <a:prstGeom prst="rect">
-            <a:avLst/>
-          </a:prstGeom>
-          <a:noFill/>
-        </p:spPr>
-        <p:txBody>
-          <a:bodyPr wrap="square" anchor="ctr" lIns="0" rIns="0" tIns="0" bIns="0">
-            <a:spAutoFit/>
-          </a:bodyPr>
-          <a:lstStyle/>
-          <a:p>
-            <a:pPr algn="ctr"/>
-            <a:r>
-              <a:rPr sz="1400" b="1" i="0">
-                <a:solidFill>
-                  <a:srgbClr val="FFFFFF"/>
-                </a:solidFill>
-                <a:latin typeface="Calibri"/>
-              </a:rPr>
-              <a:t>C</a:t>
-            </a:r>
-          </a:p>
-        </p:txBody>
-      </p:sp>
-      <p:sp>
-        <p:nvSpPr>
-          <p:cNvPr id="19" name="TextBox 18"/>
-          <p:cNvSpPr txBox="1"/>
-          <p:nvPr/>
-        </p:nvSpPr>
-        <p:spPr>
-          <a:xfrm>
-            <a:off x="1508760" y="4370831"/>
-            <a:ext cx="4297680" cy="868680"/>
-          </a:xfrm>
-          <a:prstGeom prst="rect">
-            <a:avLst/>
-          </a:prstGeom>
-          <a:noFill/>
-        </p:spPr>
-        <p:txBody>
-          <a:bodyPr wrap="square" anchor="ctr" lIns="0" rIns="0" tIns="0" bIns="0">
-            <a:spAutoFit/>
-          </a:bodyPr>
-          <a:lstStyle/>
-          <a:p>
-            <a:pPr algn="l"/>
-            <a:r>
-              <a:rPr sz="1450" b="0" i="0">
-                <a:solidFill>
-                  <a:srgbClr val="1D2433"/>
-                </a:solidFill>
-                <a:latin typeface="Calibri"/>
-              </a:rPr>
-              <a:t>9 J</a:t>
-            </a:r>
-          </a:p>
-        </p:txBody>
-      </p:sp>
-      <p:sp>
-        <p:nvSpPr>
-          <p:cNvPr id="20" name="Rounded Rectangle 19"/>
-          <p:cNvSpPr/>
-          <p:nvPr/>
-        </p:nvSpPr>
-        <p:spPr>
-          <a:xfrm>
-            <a:off x="6172200" y="4370831"/>
-            <a:ext cx="5349240" cy="868680"/>
-          </a:xfrm>
-          <a:prstGeom prst="roundRect">
-            <a:avLst>
-              <a:gd name="adj" fmla="val 12000"/>
-            </a:avLst>
-          </a:prstGeom>
-          <a:solidFill>
-            <a:srgbClr val="EAF1F4"/>
-          </a:solidFill>
-          <a:ln>
-            <a:noFill/>
-          </a:ln>
-          <a:effectLst/>
-        </p:spPr>
-        <p:style>
-          <a:lnRef idx="1">
-            <a:schemeClr val="accent1"/>
-          </a:lnRef>
-          <a:fillRef idx="3">
-            <a:schemeClr val="accent1"/>
-          </a:fillRef>
-          <a:effectRef idx="2">
-            <a:schemeClr val="accent1"/>
-          </a:effectRef>
-          <a:fontRef idx="minor">
-            <a:schemeClr val="lt1"/>
-          </a:fontRef>
-        </p:style>
-        <p:txBody>
-          <a:bodyPr rtlCol="0" anchor="ctr"/>
-          <a:lstStyle/>
-          <a:p>
-            <a:pPr algn="ctr"/>
-          </a:p>
-        </p:txBody>
-      </p:sp>
-      <p:sp>
-        <p:nvSpPr>
-          <p:cNvPr id="21" name="Oval 20"/>
-          <p:cNvSpPr/>
-          <p:nvPr/>
-        </p:nvSpPr>
-        <p:spPr>
-          <a:xfrm>
-            <a:off x="6446520" y="4599431"/>
-            <a:ext cx="411480" cy="411480"/>
-          </a:xfrm>
-          <a:prstGeom prst="ellipse">
-            <a:avLst/>
-          </a:prstGeom>
-          <a:solidFill>
-            <a:srgbClr val="0A9396"/>
-          </a:solidFill>
-          <a:ln>
-            <a:noFill/>
-          </a:ln>
-          <a:effectLst/>
-        </p:spPr>
-        <p:style>
-          <a:lnRef idx="1">
-            <a:schemeClr val="accent1"/>
-          </a:lnRef>
-          <a:fillRef idx="3">
-            <a:schemeClr val="accent1"/>
-          </a:fillRef>
-          <a:effectRef idx="2">
-            <a:schemeClr val="accent1"/>
-          </a:effectRef>
-          <a:fontRef idx="minor">
-            <a:schemeClr val="lt1"/>
-          </a:fontRef>
-        </p:style>
-        <p:txBody>
-          <a:bodyPr rtlCol="0" anchor="ctr"/>
-          <a:lstStyle/>
-          <a:p>
-            <a:pPr algn="ctr"/>
-          </a:p>
-        </p:txBody>
-      </p:sp>
-      <p:sp>
-        <p:nvSpPr>
-          <p:cNvPr id="22" name="TextBox 21"/>
-          <p:cNvSpPr txBox="1"/>
-          <p:nvPr/>
-        </p:nvSpPr>
-        <p:spPr>
-          <a:xfrm>
-            <a:off x="6446520" y="4599431"/>
-            <a:ext cx="411480" cy="411480"/>
-          </a:xfrm>
-          <a:prstGeom prst="rect">
-            <a:avLst/>
-          </a:prstGeom>
-          <a:noFill/>
-        </p:spPr>
-        <p:txBody>
-          <a:bodyPr wrap="square" anchor="ctr" lIns="0" rIns="0" tIns="0" bIns="0">
-            <a:spAutoFit/>
-          </a:bodyPr>
-          <a:lstStyle/>
-          <a:p>
-            <a:pPr algn="ctr"/>
-            <a:r>
-              <a:rPr sz="1400" b="1" i="0">
-                <a:solidFill>
-                  <a:srgbClr val="FFFFFF"/>
-                </a:solidFill>
-                <a:latin typeface="Calibri"/>
-              </a:rPr>
-              <a:t>D</a:t>
-            </a:r>
-          </a:p>
-        </p:txBody>
-      </p:sp>
-      <p:sp>
-        <p:nvSpPr>
-          <p:cNvPr id="23" name="TextBox 22"/>
-          <p:cNvSpPr txBox="1"/>
-          <p:nvPr/>
-        </p:nvSpPr>
-        <p:spPr>
-          <a:xfrm>
-            <a:off x="7040880" y="4370831"/>
-            <a:ext cx="4297680" cy="868680"/>
-          </a:xfrm>
-          <a:prstGeom prst="rect">
-            <a:avLst/>
-          </a:prstGeom>
-          <a:noFill/>
-        </p:spPr>
-        <p:txBody>
-          <a:bodyPr wrap="square" anchor="ctr" lIns="0" rIns="0" tIns="0" bIns="0">
-            <a:spAutoFit/>
-          </a:bodyPr>
-          <a:lstStyle/>
-          <a:p>
-            <a:pPr algn="l"/>
-            <a:r>
-              <a:rPr sz="1450" b="0" i="0">
-                <a:solidFill>
-                  <a:srgbClr val="1D2433"/>
-                </a:solidFill>
-                <a:latin typeface="Calibri"/>
-              </a:rPr>
-              <a:t>18 J</a:t>
             </a:r>
           </a:p>
         </p:txBody>
@@ -18556,7 +18668,7 @@
             <a:avLst/>
           </a:prstGeom>
           <a:solidFill>
-            <a:srgbClr val="2A9D8F"/>
+            <a:srgbClr val="0A9396"/>
           </a:solidFill>
           <a:ln>
             <a:noFill/>
@@ -18611,11 +18723,11 @@
             <a:r>
               <a:rPr sz="1300" b="1" i="0">
                 <a:solidFill>
-                  <a:srgbClr val="2A9D8F"/>
+                  <a:srgbClr val="0A9396"/>
                 </a:solidFill>
                 <a:latin typeface="Arial"/>
               </a:rPr>
-              <a:t>ANSWER REVEALED</a:t>
+              <a:t>QUIZ QUESTION</a:t>
             </a:r>
           </a:p>
         </p:txBody>
@@ -18803,7 +18915,7 @@
             <a:avLst/>
           </a:prstGeom>
           <a:solidFill>
-            <a:srgbClr val="B7C2CC"/>
+            <a:srgbClr val="0A9396"/>
           </a:solidFill>
           <a:ln>
             <a:noFill/>
@@ -18893,7 +19005,7 @@
             <a:r>
               <a:rPr sz="1450" b="0" i="0">
                 <a:solidFill>
-                  <a:srgbClr val="6B7280"/>
+                  <a:srgbClr val="1D2433"/>
                 </a:solidFill>
                 <a:latin typeface="Calibri"/>
               </a:rPr>
@@ -18963,7 +19075,7 @@
             <a:avLst/>
           </a:prstGeom>
           <a:solidFill>
-            <a:srgbClr val="B7C2CC"/>
+            <a:srgbClr val="0A9396"/>
           </a:solidFill>
           <a:ln>
             <a:noFill/>
@@ -19053,7 +19165,7 @@
             <a:r>
               <a:rPr sz="1450" b="0" i="0">
                 <a:solidFill>
-                  <a:srgbClr val="6B7280"/>
+                  <a:srgbClr val="1D2433"/>
                 </a:solidFill>
                 <a:latin typeface="Calibri"/>
               </a:rPr>
@@ -19071,168 +19183,6 @@
         <p:spPr>
           <a:xfrm>
             <a:off x="640080" y="4370831"/>
-            <a:ext cx="5349240" cy="868680"/>
-          </a:xfrm>
-          <a:prstGeom prst="roundRect">
-            <a:avLst>
-              <a:gd name="adj" fmla="val 12000"/>
-            </a:avLst>
-          </a:prstGeom>
-          <a:solidFill>
-            <a:srgbClr val="E9F5F0"/>
-          </a:solidFill>
-          <a:ln w="25400">
-            <a:solidFill>
-              <a:srgbClr val="2A9D8F"/>
-            </a:solidFill>
-          </a:ln>
-          <a:effectLst/>
-        </p:spPr>
-        <p:style>
-          <a:lnRef idx="1">
-            <a:schemeClr val="accent1"/>
-          </a:lnRef>
-          <a:fillRef idx="3">
-            <a:schemeClr val="accent1"/>
-          </a:fillRef>
-          <a:effectRef idx="2">
-            <a:schemeClr val="accent1"/>
-          </a:effectRef>
-          <a:fontRef idx="minor">
-            <a:schemeClr val="lt1"/>
-          </a:fontRef>
-        </p:style>
-        <p:txBody>
-          <a:bodyPr rtlCol="0" anchor="ctr"/>
-          <a:lstStyle/>
-          <a:p>
-            <a:pPr algn="ctr"/>
-          </a:p>
-        </p:txBody>
-      </p:sp>
-      <p:sp>
-        <p:nvSpPr>
-          <p:cNvPr id="17" name="Oval 16"/>
-          <p:cNvSpPr/>
-          <p:nvPr/>
-        </p:nvSpPr>
-        <p:spPr>
-          <a:xfrm>
-            <a:off x="914400" y="4599431"/>
-            <a:ext cx="411480" cy="411480"/>
-          </a:xfrm>
-          <a:prstGeom prst="ellipse">
-            <a:avLst/>
-          </a:prstGeom>
-          <a:solidFill>
-            <a:srgbClr val="2A9D8F"/>
-          </a:solidFill>
-          <a:ln>
-            <a:noFill/>
-          </a:ln>
-          <a:effectLst/>
-        </p:spPr>
-        <p:style>
-          <a:lnRef idx="1">
-            <a:schemeClr val="accent1"/>
-          </a:lnRef>
-          <a:fillRef idx="3">
-            <a:schemeClr val="accent1"/>
-          </a:fillRef>
-          <a:effectRef idx="2">
-            <a:schemeClr val="accent1"/>
-          </a:effectRef>
-          <a:fontRef idx="minor">
-            <a:schemeClr val="lt1"/>
-          </a:fontRef>
-        </p:style>
-        <p:txBody>
-          <a:bodyPr rtlCol="0" anchor="ctr"/>
-          <a:lstStyle/>
-          <a:p>
-            <a:pPr algn="ctr"/>
-          </a:p>
-        </p:txBody>
-      </p:sp>
-      <p:sp>
-        <p:nvSpPr>
-          <p:cNvPr id="18" name="TextBox 17"/>
-          <p:cNvSpPr txBox="1"/>
-          <p:nvPr/>
-        </p:nvSpPr>
-        <p:spPr>
-          <a:xfrm>
-            <a:off x="914400" y="4599431"/>
-            <a:ext cx="411480" cy="411480"/>
-          </a:xfrm>
-          <a:prstGeom prst="rect">
-            <a:avLst/>
-          </a:prstGeom>
-          <a:noFill/>
-        </p:spPr>
-        <p:txBody>
-          <a:bodyPr wrap="square" anchor="ctr" lIns="0" rIns="0" tIns="0" bIns="0">
-            <a:spAutoFit/>
-          </a:bodyPr>
-          <a:lstStyle/>
-          <a:p>
-            <a:pPr algn="ctr"/>
-            <a:r>
-              <a:rPr sz="1400" b="1" i="0">
-                <a:solidFill>
-                  <a:srgbClr val="FFFFFF"/>
-                </a:solidFill>
-                <a:latin typeface="Calibri"/>
-              </a:rPr>
-              <a:t>✓</a:t>
-            </a:r>
-          </a:p>
-        </p:txBody>
-      </p:sp>
-      <p:sp>
-        <p:nvSpPr>
-          <p:cNvPr id="19" name="TextBox 18"/>
-          <p:cNvSpPr txBox="1"/>
-          <p:nvPr/>
-        </p:nvSpPr>
-        <p:spPr>
-          <a:xfrm>
-            <a:off x="1508760" y="4370831"/>
-            <a:ext cx="4297680" cy="868680"/>
-          </a:xfrm>
-          <a:prstGeom prst="rect">
-            <a:avLst/>
-          </a:prstGeom>
-          <a:noFill/>
-        </p:spPr>
-        <p:txBody>
-          <a:bodyPr wrap="square" anchor="ctr" lIns="0" rIns="0" tIns="0" bIns="0">
-            <a:spAutoFit/>
-          </a:bodyPr>
-          <a:lstStyle/>
-          <a:p>
-            <a:pPr algn="l"/>
-            <a:r>
-              <a:rPr sz="1450" b="1" i="0">
-                <a:solidFill>
-                  <a:srgbClr val="1D2433"/>
-                </a:solidFill>
-                <a:latin typeface="Calibri"/>
-              </a:rPr>
-              <a:t>9 J</a:t>
-            </a:r>
-          </a:p>
-        </p:txBody>
-      </p:sp>
-      <p:sp>
-        <p:nvSpPr>
-          <p:cNvPr id="20" name="Rounded Rectangle 19"/>
-          <p:cNvSpPr/>
-          <p:nvPr/>
-        </p:nvSpPr>
-        <p:spPr>
-          <a:xfrm>
-            <a:off x="6172200" y="4370831"/>
             <a:ext cx="5349240" cy="868680"/>
           </a:xfrm>
           <a:prstGeom prst="roundRect">
@@ -19272,20 +19222,20 @@
       </p:sp>
       <p:sp>
         <p:nvSpPr>
-          <p:cNvPr id="21" name="Oval 20"/>
+          <p:cNvPr id="17" name="Oval 16"/>
           <p:cNvSpPr/>
           <p:nvPr/>
         </p:nvSpPr>
         <p:spPr>
           <a:xfrm>
-            <a:off x="6446520" y="4599431"/>
+            <a:off x="914400" y="4599431"/>
             <a:ext cx="411480" cy="411480"/>
           </a:xfrm>
           <a:prstGeom prst="ellipse">
             <a:avLst/>
           </a:prstGeom>
           <a:solidFill>
-            <a:srgbClr val="B7C2CC"/>
+            <a:srgbClr val="0A9396"/>
           </a:solidFill>
           <a:ln>
             <a:noFill/>
@@ -19316,13 +19266,13 @@
       </p:sp>
       <p:sp>
         <p:nvSpPr>
-          <p:cNvPr id="22" name="TextBox 21"/>
-          <p:cNvSpPr txBox="1"/>
-          <p:nvPr/>
-        </p:nvSpPr>
-        <p:spPr>
-          <a:xfrm>
-            <a:off x="6446520" y="4599431"/>
+          <p:cNvPr id="18" name="TextBox 17"/>
+          <p:cNvSpPr txBox="1"/>
+          <p:nvPr/>
+        </p:nvSpPr>
+        <p:spPr>
+          <a:xfrm>
+            <a:off x="914400" y="4599431"/>
             <a:ext cx="411480" cy="411480"/>
           </a:xfrm>
           <a:prstGeom prst="rect">
@@ -19344,20 +19294,20 @@
                 </a:solidFill>
                 <a:latin typeface="Calibri"/>
               </a:rPr>
-              <a:t>D</a:t>
-            </a:r>
-          </a:p>
-        </p:txBody>
-      </p:sp>
-      <p:sp>
-        <p:nvSpPr>
-          <p:cNvPr id="23" name="TextBox 22"/>
-          <p:cNvSpPr txBox="1"/>
-          <p:nvPr/>
-        </p:nvSpPr>
-        <p:spPr>
-          <a:xfrm>
-            <a:off x="7040880" y="4370831"/>
+              <a:t>C</a:t>
+            </a:r>
+          </a:p>
+        </p:txBody>
+      </p:sp>
+      <p:sp>
+        <p:nvSpPr>
+          <p:cNvPr id="19" name="TextBox 18"/>
+          <p:cNvSpPr txBox="1"/>
+          <p:nvPr/>
+        </p:nvSpPr>
+        <p:spPr>
+          <a:xfrm>
+            <a:off x="1508760" y="4370831"/>
             <a:ext cx="4297680" cy="868680"/>
           </a:xfrm>
           <a:prstGeom prst="rect">
@@ -19375,44 +19325,38 @@
             <a:r>
               <a:rPr sz="1450" b="0" i="0">
                 <a:solidFill>
-                  <a:srgbClr val="6B7280"/>
-                </a:solidFill>
-                <a:latin typeface="Calibri"/>
-              </a:rPr>
-              <a:t>18 J</a:t>
-            </a:r>
-          </a:p>
-        </p:txBody>
-      </p:sp>
-      <p:sp>
-        <p:nvSpPr>
-          <p:cNvPr id="24" name="Rounded Rectangle 23"/>
+                  <a:srgbClr val="1D2433"/>
+                </a:solidFill>
+                <a:latin typeface="Calibri"/>
+              </a:rPr>
+              <a:t>9 J</a:t>
+            </a:r>
+          </a:p>
+        </p:txBody>
+      </p:sp>
+      <p:sp>
+        <p:nvSpPr>
+          <p:cNvPr id="20" name="Rounded Rectangle 19"/>
           <p:cNvSpPr/>
           <p:nvPr/>
         </p:nvSpPr>
         <p:spPr>
           <a:xfrm>
-            <a:off x="640080" y="5440680"/>
-            <a:ext cx="10881360" cy="1097280"/>
+            <a:off x="6172200" y="4370831"/>
+            <a:ext cx="5349240" cy="868680"/>
           </a:xfrm>
           <a:prstGeom prst="roundRect">
             <a:avLst>
-              <a:gd name="adj" fmla="val 5000"/>
+              <a:gd name="adj" fmla="val 12000"/>
             </a:avLst>
           </a:prstGeom>
           <a:solidFill>
-            <a:srgbClr val="FFFFFF"/>
+            <a:srgbClr val="EAF1F4"/>
           </a:solidFill>
           <a:ln>
             <a:noFill/>
           </a:ln>
-          <a:effectLst>
-            <a:outerShdw blurRad="88900" dist="38100" dir="5400000" rotWithShape="0" algn="bl">
-              <a:srgbClr val="000000">
-                <a:alpha val="16000"/>
-              </a:srgbClr>
-            </a:outerShdw>
-          </a:effectLst>
+          <a:effectLst/>
         </p:spPr>
         <p:style>
           <a:lnRef idx="1">
@@ -19438,74 +19382,114 @@
       </p:sp>
       <p:sp>
         <p:nvSpPr>
-          <p:cNvPr id="25" name="TextBox 24"/>
-          <p:cNvSpPr txBox="1"/>
-          <p:nvPr/>
-        </p:nvSpPr>
-        <p:spPr>
-          <a:xfrm>
-            <a:off x="1005840" y="5596128"/>
-            <a:ext cx="4572000" cy="320040"/>
-          </a:xfrm>
-          <a:prstGeom prst="rect">
-            <a:avLst/>
-          </a:prstGeom>
-          <a:noFill/>
-        </p:spPr>
-        <p:txBody>
-          <a:bodyPr wrap="square" anchor="t" lIns="0" rIns="0" tIns="0" bIns="0">
+          <p:cNvPr id="21" name="Oval 20"/>
+          <p:cNvSpPr/>
+          <p:nvPr/>
+        </p:nvSpPr>
+        <p:spPr>
+          <a:xfrm>
+            <a:off x="6446520" y="4599431"/>
+            <a:ext cx="411480" cy="411480"/>
+          </a:xfrm>
+          <a:prstGeom prst="ellipse">
+            <a:avLst/>
+          </a:prstGeom>
+          <a:solidFill>
+            <a:srgbClr val="0A9396"/>
+          </a:solidFill>
+          <a:ln>
+            <a:noFill/>
+          </a:ln>
+          <a:effectLst/>
+        </p:spPr>
+        <p:style>
+          <a:lnRef idx="1">
+            <a:schemeClr val="accent1"/>
+          </a:lnRef>
+          <a:fillRef idx="3">
+            <a:schemeClr val="accent1"/>
+          </a:fillRef>
+          <a:effectRef idx="2">
+            <a:schemeClr val="accent1"/>
+          </a:effectRef>
+          <a:fontRef idx="minor">
+            <a:schemeClr val="lt1"/>
+          </a:fontRef>
+        </p:style>
+        <p:txBody>
+          <a:bodyPr rtlCol="0" anchor="ctr"/>
+          <a:lstStyle/>
+          <a:p>
+            <a:pPr algn="ctr"/>
+          </a:p>
+        </p:txBody>
+      </p:sp>
+      <p:sp>
+        <p:nvSpPr>
+          <p:cNvPr id="22" name="TextBox 21"/>
+          <p:cNvSpPr txBox="1"/>
+          <p:nvPr/>
+        </p:nvSpPr>
+        <p:spPr>
+          <a:xfrm>
+            <a:off x="6446520" y="4599431"/>
+            <a:ext cx="411480" cy="411480"/>
+          </a:xfrm>
+          <a:prstGeom prst="rect">
+            <a:avLst/>
+          </a:prstGeom>
+          <a:noFill/>
+        </p:spPr>
+        <p:txBody>
+          <a:bodyPr wrap="square" anchor="ctr" lIns="0" rIns="0" tIns="0" bIns="0">
+            <a:spAutoFit/>
+          </a:bodyPr>
+          <a:lstStyle/>
+          <a:p>
+            <a:pPr algn="ctr"/>
+            <a:r>
+              <a:rPr sz="1400" b="1" i="0">
+                <a:solidFill>
+                  <a:srgbClr val="FFFFFF"/>
+                </a:solidFill>
+                <a:latin typeface="Calibri"/>
+              </a:rPr>
+              <a:t>D</a:t>
+            </a:r>
+          </a:p>
+        </p:txBody>
+      </p:sp>
+      <p:sp>
+        <p:nvSpPr>
+          <p:cNvPr id="23" name="TextBox 22"/>
+          <p:cNvSpPr txBox="1"/>
+          <p:nvPr/>
+        </p:nvSpPr>
+        <p:spPr>
+          <a:xfrm>
+            <a:off x="7040880" y="4370831"/>
+            <a:ext cx="4297680" cy="868680"/>
+          </a:xfrm>
+          <a:prstGeom prst="rect">
+            <a:avLst/>
+          </a:prstGeom>
+          <a:noFill/>
+        </p:spPr>
+        <p:txBody>
+          <a:bodyPr wrap="square" anchor="ctr" lIns="0" rIns="0" tIns="0" bIns="0">
             <a:spAutoFit/>
           </a:bodyPr>
           <a:lstStyle/>
           <a:p>
             <a:pPr algn="l"/>
             <a:r>
-              <a:rPr sz="1300" b="1" i="0">
-                <a:solidFill>
-                  <a:srgbClr val="2A9D8F"/>
-                </a:solidFill>
-                <a:latin typeface="Arial"/>
-              </a:rPr>
-              <a:t>WHY</a:t>
-            </a:r>
-          </a:p>
-        </p:txBody>
-      </p:sp>
-      <p:sp>
-        <p:nvSpPr>
-          <p:cNvPr id="26" name="TextBox 25"/>
-          <p:cNvSpPr txBox="1"/>
-          <p:nvPr/>
-        </p:nvSpPr>
-        <p:spPr>
-          <a:xfrm>
-            <a:off x="1005840" y="5943600"/>
-            <a:ext cx="10149840" cy="548640"/>
-          </a:xfrm>
-          <a:prstGeom prst="rect">
-            <a:avLst/>
-          </a:prstGeom>
-          <a:noFill/>
-        </p:spPr>
-        <p:txBody>
-          <a:bodyPr wrap="square" anchor="t" lIns="0" rIns="0" tIns="0" bIns="0">
-            <a:spAutoFit/>
-          </a:bodyPr>
-          <a:lstStyle/>
-          <a:p>
-            <a:pPr algn="l">
-              <a:lnSpc>
-                <a:spcPct val="105000"/>
-              </a:lnSpc>
-            </a:pPr>
-            <a:r>
               <a:rPr sz="1450" b="0" i="0">
                 <a:solidFill>
                   <a:srgbClr val="1D2433"/>
                 </a:solidFill>
                 <a:latin typeface="Calibri"/>
               </a:rPr>
-              <a:t>KE = ½ m v² = ½ × 2 × 3² = ½ × 2 × 9 = 9 J. Remember to square the speed first.</a:t>
+              <a:t>18 J</a:t>
             </a:r>
           </a:p>
         </p:txBody>
@@ -19595,7 +19579,7 @@
             <a:avLst/>
           </a:prstGeom>
           <a:solidFill>
-            <a:srgbClr val="0A9396"/>
+            <a:srgbClr val="2A9D8F"/>
           </a:solidFill>
           <a:ln>
             <a:noFill/>
@@ -19650,11 +19634,11 @@
             <a:r>
               <a:rPr sz="1300" b="1" i="0">
                 <a:solidFill>
-                  <a:srgbClr val="0A9396"/>
+                  <a:srgbClr val="2A9D8F"/>
                 </a:solidFill>
                 <a:latin typeface="Arial"/>
               </a:rPr>
-              <a:t>QUIZ QUESTION</a:t>
+              <a:t>ANSWER REVEALED</a:t>
             </a:r>
           </a:p>
         </p:txBody>
@@ -19689,7 +19673,7 @@
                 </a:solidFill>
                 <a:latin typeface="Calibri"/>
               </a:rPr>
-              <a:t>Q2 — Hydroelectric</a:t>
+              <a:t>Q1 — KE Value</a:t>
             </a:r>
           </a:p>
         </p:txBody>
@@ -19776,7 +19760,7 @@
                 </a:solidFill>
                 <a:latin typeface="Calibri"/>
               </a:rPr>
-              <a:t>In a hydroelectric dam, the main energy transformation is:</a:t>
+              <a:t>A 2 kg ball moves at 3 m/s. Its kinetic energy is:</a:t>
             </a:r>
           </a:p>
         </p:txBody>
@@ -19842,7 +19826,7 @@
             <a:avLst/>
           </a:prstGeom>
           <a:solidFill>
-            <a:srgbClr val="0A9396"/>
+            <a:srgbClr val="B7C2CC"/>
           </a:solidFill>
           <a:ln>
             <a:noFill/>
@@ -19932,11 +19916,11 @@
             <a:r>
               <a:rPr sz="1450" b="0" i="0">
                 <a:solidFill>
-                  <a:srgbClr val="1D2433"/>
-                </a:solidFill>
-                <a:latin typeface="Calibri"/>
-              </a:rPr>
-              <a:t>Heat → light</a:t>
+                  <a:srgbClr val="6B7280"/>
+                </a:solidFill>
+                <a:latin typeface="Calibri"/>
+              </a:rPr>
+              <a:t>3 J</a:t>
             </a:r>
           </a:p>
         </p:txBody>
@@ -20002,7 +19986,7 @@
             <a:avLst/>
           </a:prstGeom>
           <a:solidFill>
-            <a:srgbClr val="0A9396"/>
+            <a:srgbClr val="B7C2CC"/>
           </a:solidFill>
           <a:ln>
             <a:noFill/>
@@ -20092,11 +20076,11 @@
             <a:r>
               <a:rPr sz="1450" b="0" i="0">
                 <a:solidFill>
-                  <a:srgbClr val="1D2433"/>
-                </a:solidFill>
-                <a:latin typeface="Calibri"/>
-              </a:rPr>
-              <a:t>Potential → kinetic → electrical</a:t>
+                  <a:srgbClr val="6B7280"/>
+                </a:solidFill>
+                <a:latin typeface="Calibri"/>
+              </a:rPr>
+              <a:t>6 J</a:t>
             </a:r>
           </a:p>
         </p:txBody>
@@ -20110,6 +20094,168 @@
         <p:spPr>
           <a:xfrm>
             <a:off x="640080" y="4370831"/>
+            <a:ext cx="5349240" cy="868680"/>
+          </a:xfrm>
+          <a:prstGeom prst="roundRect">
+            <a:avLst>
+              <a:gd name="adj" fmla="val 12000"/>
+            </a:avLst>
+          </a:prstGeom>
+          <a:solidFill>
+            <a:srgbClr val="E9F5F0"/>
+          </a:solidFill>
+          <a:ln w="25400">
+            <a:solidFill>
+              <a:srgbClr val="2A9D8F"/>
+            </a:solidFill>
+          </a:ln>
+          <a:effectLst/>
+        </p:spPr>
+        <p:style>
+          <a:lnRef idx="1">
+            <a:schemeClr val="accent1"/>
+          </a:lnRef>
+          <a:fillRef idx="3">
+            <a:schemeClr val="accent1"/>
+          </a:fillRef>
+          <a:effectRef idx="2">
+            <a:schemeClr val="accent1"/>
+          </a:effectRef>
+          <a:fontRef idx="minor">
+            <a:schemeClr val="lt1"/>
+          </a:fontRef>
+        </p:style>
+        <p:txBody>
+          <a:bodyPr rtlCol="0" anchor="ctr"/>
+          <a:lstStyle/>
+          <a:p>
+            <a:pPr algn="ctr"/>
+          </a:p>
+        </p:txBody>
+      </p:sp>
+      <p:sp>
+        <p:nvSpPr>
+          <p:cNvPr id="17" name="Oval 16"/>
+          <p:cNvSpPr/>
+          <p:nvPr/>
+        </p:nvSpPr>
+        <p:spPr>
+          <a:xfrm>
+            <a:off x="914400" y="4599431"/>
+            <a:ext cx="411480" cy="411480"/>
+          </a:xfrm>
+          <a:prstGeom prst="ellipse">
+            <a:avLst/>
+          </a:prstGeom>
+          <a:solidFill>
+            <a:srgbClr val="2A9D8F"/>
+          </a:solidFill>
+          <a:ln>
+            <a:noFill/>
+          </a:ln>
+          <a:effectLst/>
+        </p:spPr>
+        <p:style>
+          <a:lnRef idx="1">
+            <a:schemeClr val="accent1"/>
+          </a:lnRef>
+          <a:fillRef idx="3">
+            <a:schemeClr val="accent1"/>
+          </a:fillRef>
+          <a:effectRef idx="2">
+            <a:schemeClr val="accent1"/>
+          </a:effectRef>
+          <a:fontRef idx="minor">
+            <a:schemeClr val="lt1"/>
+          </a:fontRef>
+        </p:style>
+        <p:txBody>
+          <a:bodyPr rtlCol="0" anchor="ctr"/>
+          <a:lstStyle/>
+          <a:p>
+            <a:pPr algn="ctr"/>
+          </a:p>
+        </p:txBody>
+      </p:sp>
+      <p:sp>
+        <p:nvSpPr>
+          <p:cNvPr id="18" name="TextBox 17"/>
+          <p:cNvSpPr txBox="1"/>
+          <p:nvPr/>
+        </p:nvSpPr>
+        <p:spPr>
+          <a:xfrm>
+            <a:off x="914400" y="4599431"/>
+            <a:ext cx="411480" cy="411480"/>
+          </a:xfrm>
+          <a:prstGeom prst="rect">
+            <a:avLst/>
+          </a:prstGeom>
+          <a:noFill/>
+        </p:spPr>
+        <p:txBody>
+          <a:bodyPr wrap="square" anchor="ctr" lIns="0" rIns="0" tIns="0" bIns="0">
+            <a:spAutoFit/>
+          </a:bodyPr>
+          <a:lstStyle/>
+          <a:p>
+            <a:pPr algn="ctr"/>
+            <a:r>
+              <a:rPr sz="1400" b="1" i="0">
+                <a:solidFill>
+                  <a:srgbClr val="FFFFFF"/>
+                </a:solidFill>
+                <a:latin typeface="Calibri"/>
+              </a:rPr>
+              <a:t>✓</a:t>
+            </a:r>
+          </a:p>
+        </p:txBody>
+      </p:sp>
+      <p:sp>
+        <p:nvSpPr>
+          <p:cNvPr id="19" name="TextBox 18"/>
+          <p:cNvSpPr txBox="1"/>
+          <p:nvPr/>
+        </p:nvSpPr>
+        <p:spPr>
+          <a:xfrm>
+            <a:off x="1508760" y="4370831"/>
+            <a:ext cx="4297680" cy="868680"/>
+          </a:xfrm>
+          <a:prstGeom prst="rect">
+            <a:avLst/>
+          </a:prstGeom>
+          <a:noFill/>
+        </p:spPr>
+        <p:txBody>
+          <a:bodyPr wrap="square" anchor="ctr" lIns="0" rIns="0" tIns="0" bIns="0">
+            <a:spAutoFit/>
+          </a:bodyPr>
+          <a:lstStyle/>
+          <a:p>
+            <a:pPr algn="l"/>
+            <a:r>
+              <a:rPr sz="1450" b="1" i="0">
+                <a:solidFill>
+                  <a:srgbClr val="1D2433"/>
+                </a:solidFill>
+                <a:latin typeface="Calibri"/>
+              </a:rPr>
+              <a:t>9 J</a:t>
+            </a:r>
+          </a:p>
+        </p:txBody>
+      </p:sp>
+      <p:sp>
+        <p:nvSpPr>
+          <p:cNvPr id="20" name="Rounded Rectangle 19"/>
+          <p:cNvSpPr/>
+          <p:nvPr/>
+        </p:nvSpPr>
+        <p:spPr>
+          <a:xfrm>
+            <a:off x="6172200" y="4370831"/>
             <a:ext cx="5349240" cy="868680"/>
           </a:xfrm>
           <a:prstGeom prst="roundRect">
@@ -20149,20 +20295,20 @@
       </p:sp>
       <p:sp>
         <p:nvSpPr>
-          <p:cNvPr id="17" name="Oval 16"/>
+          <p:cNvPr id="21" name="Oval 20"/>
           <p:cNvSpPr/>
           <p:nvPr/>
         </p:nvSpPr>
         <p:spPr>
           <a:xfrm>
-            <a:off x="914400" y="4599431"/>
+            <a:off x="6446520" y="4599431"/>
             <a:ext cx="411480" cy="411480"/>
           </a:xfrm>
           <a:prstGeom prst="ellipse">
             <a:avLst/>
           </a:prstGeom>
           <a:solidFill>
-            <a:srgbClr val="0A9396"/>
+            <a:srgbClr val="B7C2CC"/>
           </a:solidFill>
           <a:ln>
             <a:noFill/>
@@ -20193,13 +20339,13 @@
       </p:sp>
       <p:sp>
         <p:nvSpPr>
-          <p:cNvPr id="18" name="TextBox 17"/>
-          <p:cNvSpPr txBox="1"/>
-          <p:nvPr/>
-        </p:nvSpPr>
-        <p:spPr>
-          <a:xfrm>
-            <a:off x="914400" y="4599431"/>
+          <p:cNvPr id="22" name="TextBox 21"/>
+          <p:cNvSpPr txBox="1"/>
+          <p:nvPr/>
+        </p:nvSpPr>
+        <p:spPr>
+          <a:xfrm>
+            <a:off x="6446520" y="4599431"/>
             <a:ext cx="411480" cy="411480"/>
           </a:xfrm>
           <a:prstGeom prst="rect">
@@ -20221,20 +20367,20 @@
                 </a:solidFill>
                 <a:latin typeface="Calibri"/>
               </a:rPr>
-              <a:t>C</a:t>
-            </a:r>
-          </a:p>
-        </p:txBody>
-      </p:sp>
-      <p:sp>
-        <p:nvSpPr>
-          <p:cNvPr id="19" name="TextBox 18"/>
-          <p:cNvSpPr txBox="1"/>
-          <p:nvPr/>
-        </p:nvSpPr>
-        <p:spPr>
-          <a:xfrm>
-            <a:off x="1508760" y="4370831"/>
+              <a:t>D</a:t>
+            </a:r>
+          </a:p>
+        </p:txBody>
+      </p:sp>
+      <p:sp>
+        <p:nvSpPr>
+          <p:cNvPr id="23" name="TextBox 22"/>
+          <p:cNvSpPr txBox="1"/>
+          <p:nvPr/>
+        </p:nvSpPr>
+        <p:spPr>
+          <a:xfrm>
+            <a:off x="7040880" y="4370831"/>
             <a:ext cx="4297680" cy="868680"/>
           </a:xfrm>
           <a:prstGeom prst="rect">
@@ -20252,38 +20398,44 @@
             <a:r>
               <a:rPr sz="1450" b="0" i="0">
                 <a:solidFill>
-                  <a:srgbClr val="1D2433"/>
-                </a:solidFill>
-                <a:latin typeface="Calibri"/>
-              </a:rPr>
-              <a:t>Sound → electrical</a:t>
-            </a:r>
-          </a:p>
-        </p:txBody>
-      </p:sp>
-      <p:sp>
-        <p:nvSpPr>
-          <p:cNvPr id="20" name="Rounded Rectangle 19"/>
+                  <a:srgbClr val="6B7280"/>
+                </a:solidFill>
+                <a:latin typeface="Calibri"/>
+              </a:rPr>
+              <a:t>18 J</a:t>
+            </a:r>
+          </a:p>
+        </p:txBody>
+      </p:sp>
+      <p:sp>
+        <p:nvSpPr>
+          <p:cNvPr id="24" name="Rounded Rectangle 23"/>
           <p:cNvSpPr/>
           <p:nvPr/>
         </p:nvSpPr>
         <p:spPr>
           <a:xfrm>
-            <a:off x="6172200" y="4370831"/>
-            <a:ext cx="5349240" cy="868680"/>
+            <a:off x="640080" y="5440680"/>
+            <a:ext cx="10881360" cy="1097280"/>
           </a:xfrm>
           <a:prstGeom prst="roundRect">
             <a:avLst>
-              <a:gd name="adj" fmla="val 12000"/>
+              <a:gd name="adj" fmla="val 5000"/>
             </a:avLst>
           </a:prstGeom>
           <a:solidFill>
-            <a:srgbClr val="EAF1F4"/>
+            <a:srgbClr val="FFFFFF"/>
           </a:solidFill>
           <a:ln>
             <a:noFill/>
           </a:ln>
-          <a:effectLst/>
+          <a:effectLst>
+            <a:outerShdw blurRad="88900" dist="38100" dir="5400000" rotWithShape="0" algn="bl">
+              <a:srgbClr val="000000">
+                <a:alpha val="16000"/>
+              </a:srgbClr>
+            </a:outerShdw>
+          </a:effectLst>
         </p:spPr>
         <p:style>
           <a:lnRef idx="1">
@@ -20309,114 +20461,74 @@
       </p:sp>
       <p:sp>
         <p:nvSpPr>
-          <p:cNvPr id="21" name="Oval 20"/>
-          <p:cNvSpPr/>
-          <p:nvPr/>
-        </p:nvSpPr>
-        <p:spPr>
-          <a:xfrm>
-            <a:off x="6446520" y="4599431"/>
-            <a:ext cx="411480" cy="411480"/>
-          </a:xfrm>
-          <a:prstGeom prst="ellipse">
-            <a:avLst/>
-          </a:prstGeom>
-          <a:solidFill>
-            <a:srgbClr val="0A9396"/>
-          </a:solidFill>
-          <a:ln>
-            <a:noFill/>
-          </a:ln>
-          <a:effectLst/>
-        </p:spPr>
-        <p:style>
-          <a:lnRef idx="1">
-            <a:schemeClr val="accent1"/>
-          </a:lnRef>
-          <a:fillRef idx="3">
-            <a:schemeClr val="accent1"/>
-          </a:fillRef>
-          <a:effectRef idx="2">
-            <a:schemeClr val="accent1"/>
-          </a:effectRef>
-          <a:fontRef idx="minor">
-            <a:schemeClr val="lt1"/>
-          </a:fontRef>
-        </p:style>
-        <p:txBody>
-          <a:bodyPr rtlCol="0" anchor="ctr"/>
-          <a:lstStyle/>
-          <a:p>
-            <a:pPr algn="ctr"/>
-          </a:p>
-        </p:txBody>
-      </p:sp>
-      <p:sp>
-        <p:nvSpPr>
-          <p:cNvPr id="22" name="TextBox 21"/>
-          <p:cNvSpPr txBox="1"/>
-          <p:nvPr/>
-        </p:nvSpPr>
-        <p:spPr>
-          <a:xfrm>
-            <a:off x="6446520" y="4599431"/>
-            <a:ext cx="411480" cy="411480"/>
-          </a:xfrm>
-          <a:prstGeom prst="rect">
-            <a:avLst/>
-          </a:prstGeom>
-          <a:noFill/>
-        </p:spPr>
-        <p:txBody>
-          <a:bodyPr wrap="square" anchor="ctr" lIns="0" rIns="0" tIns="0" bIns="0">
-            <a:spAutoFit/>
-          </a:bodyPr>
-          <a:lstStyle/>
-          <a:p>
-            <a:pPr algn="ctr"/>
-            <a:r>
-              <a:rPr sz="1400" b="1" i="0">
-                <a:solidFill>
-                  <a:srgbClr val="FFFFFF"/>
-                </a:solidFill>
-                <a:latin typeface="Calibri"/>
-              </a:rPr>
-              <a:t>D</a:t>
-            </a:r>
-          </a:p>
-        </p:txBody>
-      </p:sp>
-      <p:sp>
-        <p:nvSpPr>
-          <p:cNvPr id="23" name="TextBox 22"/>
-          <p:cNvSpPr txBox="1"/>
-          <p:nvPr/>
-        </p:nvSpPr>
-        <p:spPr>
-          <a:xfrm>
-            <a:off x="7040880" y="4370831"/>
-            <a:ext cx="4297680" cy="868680"/>
-          </a:xfrm>
-          <a:prstGeom prst="rect">
-            <a:avLst/>
-          </a:prstGeom>
-          <a:noFill/>
-        </p:spPr>
-        <p:txBody>
-          <a:bodyPr wrap="square" anchor="ctr" lIns="0" rIns="0" tIns="0" bIns="0">
+          <p:cNvPr id="25" name="TextBox 24"/>
+          <p:cNvSpPr txBox="1"/>
+          <p:nvPr/>
+        </p:nvSpPr>
+        <p:spPr>
+          <a:xfrm>
+            <a:off x="1005840" y="5596128"/>
+            <a:ext cx="4572000" cy="320040"/>
+          </a:xfrm>
+          <a:prstGeom prst="rect">
+            <a:avLst/>
+          </a:prstGeom>
+          <a:noFill/>
+        </p:spPr>
+        <p:txBody>
+          <a:bodyPr wrap="square" anchor="t" lIns="0" rIns="0" tIns="0" bIns="0">
             <a:spAutoFit/>
           </a:bodyPr>
           <a:lstStyle/>
           <a:p>
             <a:pPr algn="l"/>
             <a:r>
+              <a:rPr sz="1300" b="1" i="0">
+                <a:solidFill>
+                  <a:srgbClr val="2A9D8F"/>
+                </a:solidFill>
+                <a:latin typeface="Arial"/>
+              </a:rPr>
+              <a:t>WHY</a:t>
+            </a:r>
+          </a:p>
+        </p:txBody>
+      </p:sp>
+      <p:sp>
+        <p:nvSpPr>
+          <p:cNvPr id="26" name="TextBox 25"/>
+          <p:cNvSpPr txBox="1"/>
+          <p:nvPr/>
+        </p:nvSpPr>
+        <p:spPr>
+          <a:xfrm>
+            <a:off x="1005840" y="5943600"/>
+            <a:ext cx="10149840" cy="548640"/>
+          </a:xfrm>
+          <a:prstGeom prst="rect">
+            <a:avLst/>
+          </a:prstGeom>
+          <a:noFill/>
+        </p:spPr>
+        <p:txBody>
+          <a:bodyPr wrap="square" anchor="t" lIns="0" rIns="0" tIns="0" bIns="0">
+            <a:spAutoFit/>
+          </a:bodyPr>
+          <a:lstStyle/>
+          <a:p>
+            <a:pPr algn="l">
+              <a:lnSpc>
+                <a:spcPct val="105000"/>
+              </a:lnSpc>
+            </a:pPr>
+            <a:r>
               <a:rPr sz="1450" b="0" i="0">
                 <a:solidFill>
                   <a:srgbClr val="1D2433"/>
                 </a:solidFill>
                 <a:latin typeface="Calibri"/>
               </a:rPr>
-              <a:t>Chemical → nuclear</a:t>
+              <a:t>KE = ½ m v² = ½ × 2 × 3² = ½ × 2 × 9 = 9 J. Remember to square the speed first.</a:t>
             </a:r>
           </a:p>
         </p:txBody>
@@ -20506,7 +20618,7 @@
             <a:avLst/>
           </a:prstGeom>
           <a:solidFill>
-            <a:srgbClr val="2A9D8F"/>
+            <a:srgbClr val="0A9396"/>
           </a:solidFill>
           <a:ln>
             <a:noFill/>
@@ -20561,11 +20673,11 @@
             <a:r>
               <a:rPr sz="1300" b="1" i="0">
                 <a:solidFill>
-                  <a:srgbClr val="2A9D8F"/>
+                  <a:srgbClr val="0A9396"/>
                 </a:solidFill>
                 <a:latin typeface="Arial"/>
               </a:rPr>
-              <a:t>ANSWER REVEALED</a:t>
+              <a:t>QUIZ QUESTION</a:t>
             </a:r>
           </a:p>
         </p:txBody>
@@ -20753,7 +20865,7 @@
             <a:avLst/>
           </a:prstGeom>
           <a:solidFill>
-            <a:srgbClr val="B7C2CC"/>
+            <a:srgbClr val="0A9396"/>
           </a:solidFill>
           <a:ln>
             <a:noFill/>
@@ -20843,7 +20955,7 @@
             <a:r>
               <a:rPr sz="1450" b="0" i="0">
                 <a:solidFill>
-                  <a:srgbClr val="6B7280"/>
+                  <a:srgbClr val="1D2433"/>
                 </a:solidFill>
                 <a:latin typeface="Calibri"/>
               </a:rPr>
@@ -20861,168 +20973,6 @@
         <p:spPr>
           <a:xfrm>
             <a:off x="6172200" y="3337560"/>
-            <a:ext cx="5349240" cy="868680"/>
-          </a:xfrm>
-          <a:prstGeom prst="roundRect">
-            <a:avLst>
-              <a:gd name="adj" fmla="val 12000"/>
-            </a:avLst>
-          </a:prstGeom>
-          <a:solidFill>
-            <a:srgbClr val="E9F5F0"/>
-          </a:solidFill>
-          <a:ln w="25400">
-            <a:solidFill>
-              <a:srgbClr val="2A9D8F"/>
-            </a:solidFill>
-          </a:ln>
-          <a:effectLst/>
-        </p:spPr>
-        <p:style>
-          <a:lnRef idx="1">
-            <a:schemeClr val="accent1"/>
-          </a:lnRef>
-          <a:fillRef idx="3">
-            <a:schemeClr val="accent1"/>
-          </a:fillRef>
-          <a:effectRef idx="2">
-            <a:schemeClr val="accent1"/>
-          </a:effectRef>
-          <a:fontRef idx="minor">
-            <a:schemeClr val="lt1"/>
-          </a:fontRef>
-        </p:style>
-        <p:txBody>
-          <a:bodyPr rtlCol="0" anchor="ctr"/>
-          <a:lstStyle/>
-          <a:p>
-            <a:pPr algn="ctr"/>
-          </a:p>
-        </p:txBody>
-      </p:sp>
-      <p:sp>
-        <p:nvSpPr>
-          <p:cNvPr id="13" name="Oval 12"/>
-          <p:cNvSpPr/>
-          <p:nvPr/>
-        </p:nvSpPr>
-        <p:spPr>
-          <a:xfrm>
-            <a:off x="6446520" y="3566160"/>
-            <a:ext cx="411480" cy="411480"/>
-          </a:xfrm>
-          <a:prstGeom prst="ellipse">
-            <a:avLst/>
-          </a:prstGeom>
-          <a:solidFill>
-            <a:srgbClr val="2A9D8F"/>
-          </a:solidFill>
-          <a:ln>
-            <a:noFill/>
-          </a:ln>
-          <a:effectLst/>
-        </p:spPr>
-        <p:style>
-          <a:lnRef idx="1">
-            <a:schemeClr val="accent1"/>
-          </a:lnRef>
-          <a:fillRef idx="3">
-            <a:schemeClr val="accent1"/>
-          </a:fillRef>
-          <a:effectRef idx="2">
-            <a:schemeClr val="accent1"/>
-          </a:effectRef>
-          <a:fontRef idx="minor">
-            <a:schemeClr val="lt1"/>
-          </a:fontRef>
-        </p:style>
-        <p:txBody>
-          <a:bodyPr rtlCol="0" anchor="ctr"/>
-          <a:lstStyle/>
-          <a:p>
-            <a:pPr algn="ctr"/>
-          </a:p>
-        </p:txBody>
-      </p:sp>
-      <p:sp>
-        <p:nvSpPr>
-          <p:cNvPr id="14" name="TextBox 13"/>
-          <p:cNvSpPr txBox="1"/>
-          <p:nvPr/>
-        </p:nvSpPr>
-        <p:spPr>
-          <a:xfrm>
-            <a:off x="6446520" y="3566160"/>
-            <a:ext cx="411480" cy="411480"/>
-          </a:xfrm>
-          <a:prstGeom prst="rect">
-            <a:avLst/>
-          </a:prstGeom>
-          <a:noFill/>
-        </p:spPr>
-        <p:txBody>
-          <a:bodyPr wrap="square" anchor="ctr" lIns="0" rIns="0" tIns="0" bIns="0">
-            <a:spAutoFit/>
-          </a:bodyPr>
-          <a:lstStyle/>
-          <a:p>
-            <a:pPr algn="ctr"/>
-            <a:r>
-              <a:rPr sz="1400" b="1" i="0">
-                <a:solidFill>
-                  <a:srgbClr val="FFFFFF"/>
-                </a:solidFill>
-                <a:latin typeface="Calibri"/>
-              </a:rPr>
-              <a:t>✓</a:t>
-            </a:r>
-          </a:p>
-        </p:txBody>
-      </p:sp>
-      <p:sp>
-        <p:nvSpPr>
-          <p:cNvPr id="15" name="TextBox 14"/>
-          <p:cNvSpPr txBox="1"/>
-          <p:nvPr/>
-        </p:nvSpPr>
-        <p:spPr>
-          <a:xfrm>
-            <a:off x="7040880" y="3337560"/>
-            <a:ext cx="4297680" cy="868680"/>
-          </a:xfrm>
-          <a:prstGeom prst="rect">
-            <a:avLst/>
-          </a:prstGeom>
-          <a:noFill/>
-        </p:spPr>
-        <p:txBody>
-          <a:bodyPr wrap="square" anchor="ctr" lIns="0" rIns="0" tIns="0" bIns="0">
-            <a:spAutoFit/>
-          </a:bodyPr>
-          <a:lstStyle/>
-          <a:p>
-            <a:pPr algn="l"/>
-            <a:r>
-              <a:rPr sz="1450" b="1" i="0">
-                <a:solidFill>
-                  <a:srgbClr val="1D2433"/>
-                </a:solidFill>
-                <a:latin typeface="Calibri"/>
-              </a:rPr>
-              <a:t>Potential → kinetic → electrical</a:t>
-            </a:r>
-          </a:p>
-        </p:txBody>
-      </p:sp>
-      <p:sp>
-        <p:nvSpPr>
-          <p:cNvPr id="16" name="Rounded Rectangle 15"/>
-          <p:cNvSpPr/>
-          <p:nvPr/>
-        </p:nvSpPr>
-        <p:spPr>
-          <a:xfrm>
-            <a:off x="640080" y="4370831"/>
             <a:ext cx="5349240" cy="868680"/>
           </a:xfrm>
           <a:prstGeom prst="roundRect">
@@ -21062,20 +21012,20 @@
       </p:sp>
       <p:sp>
         <p:nvSpPr>
-          <p:cNvPr id="17" name="Oval 16"/>
+          <p:cNvPr id="13" name="Oval 12"/>
           <p:cNvSpPr/>
           <p:nvPr/>
         </p:nvSpPr>
         <p:spPr>
           <a:xfrm>
-            <a:off x="914400" y="4599431"/>
+            <a:off x="6446520" y="3566160"/>
             <a:ext cx="411480" cy="411480"/>
           </a:xfrm>
           <a:prstGeom prst="ellipse">
             <a:avLst/>
           </a:prstGeom>
           <a:solidFill>
-            <a:srgbClr val="B7C2CC"/>
+            <a:srgbClr val="0A9396"/>
           </a:solidFill>
           <a:ln>
             <a:noFill/>
@@ -21106,13 +21056,13 @@
       </p:sp>
       <p:sp>
         <p:nvSpPr>
-          <p:cNvPr id="18" name="TextBox 17"/>
-          <p:cNvSpPr txBox="1"/>
-          <p:nvPr/>
-        </p:nvSpPr>
-        <p:spPr>
-          <a:xfrm>
-            <a:off x="914400" y="4599431"/>
+          <p:cNvPr id="14" name="TextBox 13"/>
+          <p:cNvSpPr txBox="1"/>
+          <p:nvPr/>
+        </p:nvSpPr>
+        <p:spPr>
+          <a:xfrm>
+            <a:off x="6446520" y="3566160"/>
             <a:ext cx="411480" cy="411480"/>
           </a:xfrm>
           <a:prstGeom prst="rect">
@@ -21134,20 +21084,20 @@
                 </a:solidFill>
                 <a:latin typeface="Calibri"/>
               </a:rPr>
-              <a:t>C</a:t>
-            </a:r>
-          </a:p>
-        </p:txBody>
-      </p:sp>
-      <p:sp>
-        <p:nvSpPr>
-          <p:cNvPr id="19" name="TextBox 18"/>
-          <p:cNvSpPr txBox="1"/>
-          <p:nvPr/>
-        </p:nvSpPr>
-        <p:spPr>
-          <a:xfrm>
-            <a:off x="1508760" y="4370831"/>
+              <a:t>B</a:t>
+            </a:r>
+          </a:p>
+        </p:txBody>
+      </p:sp>
+      <p:sp>
+        <p:nvSpPr>
+          <p:cNvPr id="15" name="TextBox 14"/>
+          <p:cNvSpPr txBox="1"/>
+          <p:nvPr/>
+        </p:nvSpPr>
+        <p:spPr>
+          <a:xfrm>
+            <a:off x="7040880" y="3337560"/>
             <a:ext cx="4297680" cy="868680"/>
           </a:xfrm>
           <a:prstGeom prst="rect">
@@ -21165,24 +21115,24 @@
             <a:r>
               <a:rPr sz="1450" b="0" i="0">
                 <a:solidFill>
-                  <a:srgbClr val="6B7280"/>
-                </a:solidFill>
-                <a:latin typeface="Calibri"/>
-              </a:rPr>
-              <a:t>Sound → electrical</a:t>
-            </a:r>
-          </a:p>
-        </p:txBody>
-      </p:sp>
-      <p:sp>
-        <p:nvSpPr>
-          <p:cNvPr id="20" name="Rounded Rectangle 19"/>
+                  <a:srgbClr val="1D2433"/>
+                </a:solidFill>
+                <a:latin typeface="Calibri"/>
+              </a:rPr>
+              <a:t>Potential → kinetic → electrical</a:t>
+            </a:r>
+          </a:p>
+        </p:txBody>
+      </p:sp>
+      <p:sp>
+        <p:nvSpPr>
+          <p:cNvPr id="16" name="Rounded Rectangle 15"/>
           <p:cNvSpPr/>
           <p:nvPr/>
         </p:nvSpPr>
         <p:spPr>
           <a:xfrm>
-            <a:off x="6172200" y="4370831"/>
+            <a:off x="640080" y="4370831"/>
             <a:ext cx="5349240" cy="868680"/>
           </a:xfrm>
           <a:prstGeom prst="roundRect">
@@ -21222,20 +21172,20 @@
       </p:sp>
       <p:sp>
         <p:nvSpPr>
-          <p:cNvPr id="21" name="Oval 20"/>
+          <p:cNvPr id="17" name="Oval 16"/>
           <p:cNvSpPr/>
           <p:nvPr/>
         </p:nvSpPr>
         <p:spPr>
           <a:xfrm>
-            <a:off x="6446520" y="4599431"/>
+            <a:off x="914400" y="4599431"/>
             <a:ext cx="411480" cy="411480"/>
           </a:xfrm>
           <a:prstGeom prst="ellipse">
             <a:avLst/>
           </a:prstGeom>
           <a:solidFill>
-            <a:srgbClr val="B7C2CC"/>
+            <a:srgbClr val="0A9396"/>
           </a:solidFill>
           <a:ln>
             <a:noFill/>
@@ -21266,13 +21216,13 @@
       </p:sp>
       <p:sp>
         <p:nvSpPr>
-          <p:cNvPr id="22" name="TextBox 21"/>
-          <p:cNvSpPr txBox="1"/>
-          <p:nvPr/>
-        </p:nvSpPr>
-        <p:spPr>
-          <a:xfrm>
-            <a:off x="6446520" y="4599431"/>
+          <p:cNvPr id="18" name="TextBox 17"/>
+          <p:cNvSpPr txBox="1"/>
+          <p:nvPr/>
+        </p:nvSpPr>
+        <p:spPr>
+          <a:xfrm>
+            <a:off x="914400" y="4599431"/>
             <a:ext cx="411480" cy="411480"/>
           </a:xfrm>
           <a:prstGeom prst="rect">
@@ -21294,20 +21244,20 @@
                 </a:solidFill>
                 <a:latin typeface="Calibri"/>
               </a:rPr>
-              <a:t>D</a:t>
-            </a:r>
-          </a:p>
-        </p:txBody>
-      </p:sp>
-      <p:sp>
-        <p:nvSpPr>
-          <p:cNvPr id="23" name="TextBox 22"/>
-          <p:cNvSpPr txBox="1"/>
-          <p:nvPr/>
-        </p:nvSpPr>
-        <p:spPr>
-          <a:xfrm>
-            <a:off x="7040880" y="4370831"/>
+              <a:t>C</a:t>
+            </a:r>
+          </a:p>
+        </p:txBody>
+      </p:sp>
+      <p:sp>
+        <p:nvSpPr>
+          <p:cNvPr id="19" name="TextBox 18"/>
+          <p:cNvSpPr txBox="1"/>
+          <p:nvPr/>
+        </p:nvSpPr>
+        <p:spPr>
+          <a:xfrm>
+            <a:off x="1508760" y="4370831"/>
             <a:ext cx="4297680" cy="868680"/>
           </a:xfrm>
           <a:prstGeom prst="rect">
@@ -21325,44 +21275,38 @@
             <a:r>
               <a:rPr sz="1450" b="0" i="0">
                 <a:solidFill>
-                  <a:srgbClr val="6B7280"/>
-                </a:solidFill>
-                <a:latin typeface="Calibri"/>
-              </a:rPr>
-              <a:t>Chemical → nuclear</a:t>
-            </a:r>
-          </a:p>
-        </p:txBody>
-      </p:sp>
-      <p:sp>
-        <p:nvSpPr>
-          <p:cNvPr id="24" name="Rounded Rectangle 23"/>
+                  <a:srgbClr val="1D2433"/>
+                </a:solidFill>
+                <a:latin typeface="Calibri"/>
+              </a:rPr>
+              <a:t>Sound → electrical</a:t>
+            </a:r>
+          </a:p>
+        </p:txBody>
+      </p:sp>
+      <p:sp>
+        <p:nvSpPr>
+          <p:cNvPr id="20" name="Rounded Rectangle 19"/>
           <p:cNvSpPr/>
           <p:nvPr/>
         </p:nvSpPr>
         <p:spPr>
           <a:xfrm>
-            <a:off x="640080" y="5440680"/>
-            <a:ext cx="10881360" cy="1097280"/>
+            <a:off x="6172200" y="4370831"/>
+            <a:ext cx="5349240" cy="868680"/>
           </a:xfrm>
           <a:prstGeom prst="roundRect">
             <a:avLst>
-              <a:gd name="adj" fmla="val 5000"/>
+              <a:gd name="adj" fmla="val 12000"/>
             </a:avLst>
           </a:prstGeom>
           <a:solidFill>
-            <a:srgbClr val="FFFFFF"/>
+            <a:srgbClr val="EAF1F4"/>
           </a:solidFill>
           <a:ln>
             <a:noFill/>
           </a:ln>
-          <a:effectLst>
-            <a:outerShdw blurRad="88900" dist="38100" dir="5400000" rotWithShape="0" algn="bl">
-              <a:srgbClr val="000000">
-                <a:alpha val="16000"/>
-              </a:srgbClr>
-            </a:outerShdw>
-          </a:effectLst>
+          <a:effectLst/>
         </p:spPr>
         <p:style>
           <a:lnRef idx="1">
@@ -21388,74 +21332,114 @@
       </p:sp>
       <p:sp>
         <p:nvSpPr>
-          <p:cNvPr id="25" name="TextBox 24"/>
-          <p:cNvSpPr txBox="1"/>
-          <p:nvPr/>
-        </p:nvSpPr>
-        <p:spPr>
-          <a:xfrm>
-            <a:off x="1005840" y="5596128"/>
-            <a:ext cx="4572000" cy="320040"/>
-          </a:xfrm>
-          <a:prstGeom prst="rect">
-            <a:avLst/>
-          </a:prstGeom>
-          <a:noFill/>
-        </p:spPr>
-        <p:txBody>
-          <a:bodyPr wrap="square" anchor="t" lIns="0" rIns="0" tIns="0" bIns="0">
+          <p:cNvPr id="21" name="Oval 20"/>
+          <p:cNvSpPr/>
+          <p:nvPr/>
+        </p:nvSpPr>
+        <p:spPr>
+          <a:xfrm>
+            <a:off x="6446520" y="4599431"/>
+            <a:ext cx="411480" cy="411480"/>
+          </a:xfrm>
+          <a:prstGeom prst="ellipse">
+            <a:avLst/>
+          </a:prstGeom>
+          <a:solidFill>
+            <a:srgbClr val="0A9396"/>
+          </a:solidFill>
+          <a:ln>
+            <a:noFill/>
+          </a:ln>
+          <a:effectLst/>
+        </p:spPr>
+        <p:style>
+          <a:lnRef idx="1">
+            <a:schemeClr val="accent1"/>
+          </a:lnRef>
+          <a:fillRef idx="3">
+            <a:schemeClr val="accent1"/>
+          </a:fillRef>
+          <a:effectRef idx="2">
+            <a:schemeClr val="accent1"/>
+          </a:effectRef>
+          <a:fontRef idx="minor">
+            <a:schemeClr val="lt1"/>
+          </a:fontRef>
+        </p:style>
+        <p:txBody>
+          <a:bodyPr rtlCol="0" anchor="ctr"/>
+          <a:lstStyle/>
+          <a:p>
+            <a:pPr algn="ctr"/>
+          </a:p>
+        </p:txBody>
+      </p:sp>
+      <p:sp>
+        <p:nvSpPr>
+          <p:cNvPr id="22" name="TextBox 21"/>
+          <p:cNvSpPr txBox="1"/>
+          <p:nvPr/>
+        </p:nvSpPr>
+        <p:spPr>
+          <a:xfrm>
+            <a:off x="6446520" y="4599431"/>
+            <a:ext cx="411480" cy="411480"/>
+          </a:xfrm>
+          <a:prstGeom prst="rect">
+            <a:avLst/>
+          </a:prstGeom>
+          <a:noFill/>
+        </p:spPr>
+        <p:txBody>
+          <a:bodyPr wrap="square" anchor="ctr" lIns="0" rIns="0" tIns="0" bIns="0">
+            <a:spAutoFit/>
+          </a:bodyPr>
+          <a:lstStyle/>
+          <a:p>
+            <a:pPr algn="ctr"/>
+            <a:r>
+              <a:rPr sz="1400" b="1" i="0">
+                <a:solidFill>
+                  <a:srgbClr val="FFFFFF"/>
+                </a:solidFill>
+                <a:latin typeface="Calibri"/>
+              </a:rPr>
+              <a:t>D</a:t>
+            </a:r>
+          </a:p>
+        </p:txBody>
+      </p:sp>
+      <p:sp>
+        <p:nvSpPr>
+          <p:cNvPr id="23" name="TextBox 22"/>
+          <p:cNvSpPr txBox="1"/>
+          <p:nvPr/>
+        </p:nvSpPr>
+        <p:spPr>
+          <a:xfrm>
+            <a:off x="7040880" y="4370831"/>
+            <a:ext cx="4297680" cy="868680"/>
+          </a:xfrm>
+          <a:prstGeom prst="rect">
+            <a:avLst/>
+          </a:prstGeom>
+          <a:noFill/>
+        </p:spPr>
+        <p:txBody>
+          <a:bodyPr wrap="square" anchor="ctr" lIns="0" rIns="0" tIns="0" bIns="0">
             <a:spAutoFit/>
           </a:bodyPr>
           <a:lstStyle/>
           <a:p>
             <a:pPr algn="l"/>
             <a:r>
-              <a:rPr sz="1300" b="1" i="0">
-                <a:solidFill>
-                  <a:srgbClr val="2A9D8F"/>
-                </a:solidFill>
-                <a:latin typeface="Arial"/>
-              </a:rPr>
-              <a:t>WHY</a:t>
-            </a:r>
-          </a:p>
-        </p:txBody>
-      </p:sp>
-      <p:sp>
-        <p:nvSpPr>
-          <p:cNvPr id="26" name="TextBox 25"/>
-          <p:cNvSpPr txBox="1"/>
-          <p:nvPr/>
-        </p:nvSpPr>
-        <p:spPr>
-          <a:xfrm>
-            <a:off x="1005840" y="5943600"/>
-            <a:ext cx="10149840" cy="548640"/>
-          </a:xfrm>
-          <a:prstGeom prst="rect">
-            <a:avLst/>
-          </a:prstGeom>
-          <a:noFill/>
-        </p:spPr>
-        <p:txBody>
-          <a:bodyPr wrap="square" anchor="t" lIns="0" rIns="0" tIns="0" bIns="0">
-            <a:spAutoFit/>
-          </a:bodyPr>
-          <a:lstStyle/>
-          <a:p>
-            <a:pPr algn="l">
-              <a:lnSpc>
-                <a:spcPct val="105000"/>
-              </a:lnSpc>
-            </a:pPr>
-            <a:r>
               <a:rPr sz="1450" b="0" i="0">
                 <a:solidFill>
                   <a:srgbClr val="1D2433"/>
                 </a:solidFill>
                 <a:latin typeface="Calibri"/>
               </a:rPr>
-              <a:t>Water stored high up has potential energy. Falling, it gains kinetic energy, which spins turbines and generators to produce electrical energy.</a:t>
+              <a:t>Chemical → nuclear</a:t>
             </a:r>
           </a:p>
         </p:txBody>
@@ -21545,7 +21529,7 @@
             <a:avLst/>
           </a:prstGeom>
           <a:solidFill>
-            <a:srgbClr val="0A9396"/>
+            <a:srgbClr val="2A9D8F"/>
           </a:solidFill>
           <a:ln>
             <a:noFill/>
@@ -21600,11 +21584,11 @@
             <a:r>
               <a:rPr sz="1300" b="1" i="0">
                 <a:solidFill>
-                  <a:srgbClr val="0A9396"/>
+                  <a:srgbClr val="2A9D8F"/>
                 </a:solidFill>
                 <a:latin typeface="Arial"/>
               </a:rPr>
-              <a:t>QUIZ QUESTION</a:t>
+              <a:t>ANSWER REVEALED</a:t>
             </a:r>
           </a:p>
         </p:txBody>
@@ -21639,7 +21623,7 @@
                 </a:solidFill>
                 <a:latin typeface="Calibri"/>
               </a:rPr>
-              <a:t>Q3 — Energy Lost?</a:t>
+              <a:t>Q2 — Hydroelectric</a:t>
             </a:r>
           </a:p>
         </p:txBody>
@@ -21726,7 +21710,7 @@
                 </a:solidFill>
                 <a:latin typeface="Calibri"/>
               </a:rPr>
-              <a:t>A bouncing ball rises a little less after each bounce. The 'lost' energy has mainly become:</a:t>
+              <a:t>In a hydroelectric dam, the main energy transformation is:</a:t>
             </a:r>
           </a:p>
         </p:txBody>
@@ -21792,7 +21776,7 @@
             <a:avLst/>
           </a:prstGeom>
           <a:solidFill>
-            <a:srgbClr val="0A9396"/>
+            <a:srgbClr val="B7C2CC"/>
           </a:solidFill>
           <a:ln>
             <a:noFill/>
@@ -21882,11 +21866,11 @@
             <a:r>
               <a:rPr sz="1450" b="0" i="0">
                 <a:solidFill>
-                  <a:srgbClr val="1D2433"/>
-                </a:solidFill>
-                <a:latin typeface="Calibri"/>
-              </a:rPr>
-              <a:t>Destroyed</a:t>
+                  <a:srgbClr val="6B7280"/>
+                </a:solidFill>
+                <a:latin typeface="Calibri"/>
+              </a:rPr>
+              <a:t>Heat → light</a:t>
             </a:r>
           </a:p>
         </p:txBody>
@@ -21900,6 +21884,168 @@
         <p:spPr>
           <a:xfrm>
             <a:off x="6172200" y="3337560"/>
+            <a:ext cx="5349240" cy="868680"/>
+          </a:xfrm>
+          <a:prstGeom prst="roundRect">
+            <a:avLst>
+              <a:gd name="adj" fmla="val 12000"/>
+            </a:avLst>
+          </a:prstGeom>
+          <a:solidFill>
+            <a:srgbClr val="E9F5F0"/>
+          </a:solidFill>
+          <a:ln w="25400">
+            <a:solidFill>
+              <a:srgbClr val="2A9D8F"/>
+            </a:solidFill>
+          </a:ln>
+          <a:effectLst/>
+        </p:spPr>
+        <p:style>
+          <a:lnRef idx="1">
+            <a:schemeClr val="accent1"/>
+          </a:lnRef>
+          <a:fillRef idx="3">
+            <a:schemeClr val="accent1"/>
+          </a:fillRef>
+          <a:effectRef idx="2">
+            <a:schemeClr val="accent1"/>
+          </a:effectRef>
+          <a:fontRef idx="minor">
+            <a:schemeClr val="lt1"/>
+          </a:fontRef>
+        </p:style>
+        <p:txBody>
+          <a:bodyPr rtlCol="0" anchor="ctr"/>
+          <a:lstStyle/>
+          <a:p>
+            <a:pPr algn="ctr"/>
+          </a:p>
+        </p:txBody>
+      </p:sp>
+      <p:sp>
+        <p:nvSpPr>
+          <p:cNvPr id="13" name="Oval 12"/>
+          <p:cNvSpPr/>
+          <p:nvPr/>
+        </p:nvSpPr>
+        <p:spPr>
+          <a:xfrm>
+            <a:off x="6446520" y="3566160"/>
+            <a:ext cx="411480" cy="411480"/>
+          </a:xfrm>
+          <a:prstGeom prst="ellipse">
+            <a:avLst/>
+          </a:prstGeom>
+          <a:solidFill>
+            <a:srgbClr val="2A9D8F"/>
+          </a:solidFill>
+          <a:ln>
+            <a:noFill/>
+          </a:ln>
+          <a:effectLst/>
+        </p:spPr>
+        <p:style>
+          <a:lnRef idx="1">
+            <a:schemeClr val="accent1"/>
+          </a:lnRef>
+          <a:fillRef idx="3">
+            <a:schemeClr val="accent1"/>
+          </a:fillRef>
+          <a:effectRef idx="2">
+            <a:schemeClr val="accent1"/>
+          </a:effectRef>
+          <a:fontRef idx="minor">
+            <a:schemeClr val="lt1"/>
+          </a:fontRef>
+        </p:style>
+        <p:txBody>
+          <a:bodyPr rtlCol="0" anchor="ctr"/>
+          <a:lstStyle/>
+          <a:p>
+            <a:pPr algn="ctr"/>
+          </a:p>
+        </p:txBody>
+      </p:sp>
+      <p:sp>
+        <p:nvSpPr>
+          <p:cNvPr id="14" name="TextBox 13"/>
+          <p:cNvSpPr txBox="1"/>
+          <p:nvPr/>
+        </p:nvSpPr>
+        <p:spPr>
+          <a:xfrm>
+            <a:off x="6446520" y="3566160"/>
+            <a:ext cx="411480" cy="411480"/>
+          </a:xfrm>
+          <a:prstGeom prst="rect">
+            <a:avLst/>
+          </a:prstGeom>
+          <a:noFill/>
+        </p:spPr>
+        <p:txBody>
+          <a:bodyPr wrap="square" anchor="ctr" lIns="0" rIns="0" tIns="0" bIns="0">
+            <a:spAutoFit/>
+          </a:bodyPr>
+          <a:lstStyle/>
+          <a:p>
+            <a:pPr algn="ctr"/>
+            <a:r>
+              <a:rPr sz="1400" b="1" i="0">
+                <a:solidFill>
+                  <a:srgbClr val="FFFFFF"/>
+                </a:solidFill>
+                <a:latin typeface="Calibri"/>
+              </a:rPr>
+              <a:t>✓</a:t>
+            </a:r>
+          </a:p>
+        </p:txBody>
+      </p:sp>
+      <p:sp>
+        <p:nvSpPr>
+          <p:cNvPr id="15" name="TextBox 14"/>
+          <p:cNvSpPr txBox="1"/>
+          <p:nvPr/>
+        </p:nvSpPr>
+        <p:spPr>
+          <a:xfrm>
+            <a:off x="7040880" y="3337560"/>
+            <a:ext cx="4297680" cy="868680"/>
+          </a:xfrm>
+          <a:prstGeom prst="rect">
+            <a:avLst/>
+          </a:prstGeom>
+          <a:noFill/>
+        </p:spPr>
+        <p:txBody>
+          <a:bodyPr wrap="square" anchor="ctr" lIns="0" rIns="0" tIns="0" bIns="0">
+            <a:spAutoFit/>
+          </a:bodyPr>
+          <a:lstStyle/>
+          <a:p>
+            <a:pPr algn="l"/>
+            <a:r>
+              <a:rPr sz="1450" b="1" i="0">
+                <a:solidFill>
+                  <a:srgbClr val="1D2433"/>
+                </a:solidFill>
+                <a:latin typeface="Calibri"/>
+              </a:rPr>
+              <a:t>Potential → kinetic → electrical</a:t>
+            </a:r>
+          </a:p>
+        </p:txBody>
+      </p:sp>
+      <p:sp>
+        <p:nvSpPr>
+          <p:cNvPr id="16" name="Rounded Rectangle 15"/>
+          <p:cNvSpPr/>
+          <p:nvPr/>
+        </p:nvSpPr>
+        <p:spPr>
+          <a:xfrm>
+            <a:off x="640080" y="4370831"/>
             <a:ext cx="5349240" cy="868680"/>
           </a:xfrm>
           <a:prstGeom prst="roundRect">
@@ -21939,20 +22085,20 @@
       </p:sp>
       <p:sp>
         <p:nvSpPr>
-          <p:cNvPr id="13" name="Oval 12"/>
+          <p:cNvPr id="17" name="Oval 16"/>
           <p:cNvSpPr/>
           <p:nvPr/>
         </p:nvSpPr>
         <p:spPr>
           <a:xfrm>
-            <a:off x="6446520" y="3566160"/>
+            <a:off x="914400" y="4599431"/>
             <a:ext cx="411480" cy="411480"/>
           </a:xfrm>
           <a:prstGeom prst="ellipse">
             <a:avLst/>
           </a:prstGeom>
           <a:solidFill>
-            <a:srgbClr val="0A9396"/>
+            <a:srgbClr val="B7C2CC"/>
           </a:solidFill>
           <a:ln>
             <a:noFill/>
@@ -21983,13 +22129,13 @@
       </p:sp>
       <p:sp>
         <p:nvSpPr>
-          <p:cNvPr id="14" name="TextBox 13"/>
-          <p:cNvSpPr txBox="1"/>
-          <p:nvPr/>
-        </p:nvSpPr>
-        <p:spPr>
-          <a:xfrm>
-            <a:off x="6446520" y="3566160"/>
+          <p:cNvPr id="18" name="TextBox 17"/>
+          <p:cNvSpPr txBox="1"/>
+          <p:nvPr/>
+        </p:nvSpPr>
+        <p:spPr>
+          <a:xfrm>
+            <a:off x="914400" y="4599431"/>
             <a:ext cx="411480" cy="411480"/>
           </a:xfrm>
           <a:prstGeom prst="rect">
@@ -22011,20 +22157,20 @@
                 </a:solidFill>
                 <a:latin typeface="Calibri"/>
               </a:rPr>
-              <a:t>B</a:t>
-            </a:r>
-          </a:p>
-        </p:txBody>
-      </p:sp>
-      <p:sp>
-        <p:nvSpPr>
-          <p:cNvPr id="15" name="TextBox 14"/>
-          <p:cNvSpPr txBox="1"/>
-          <p:nvPr/>
-        </p:nvSpPr>
-        <p:spPr>
-          <a:xfrm>
-            <a:off x="7040880" y="3337560"/>
+              <a:t>C</a:t>
+            </a:r>
+          </a:p>
+        </p:txBody>
+      </p:sp>
+      <p:sp>
+        <p:nvSpPr>
+          <p:cNvPr id="19" name="TextBox 18"/>
+          <p:cNvSpPr txBox="1"/>
+          <p:nvPr/>
+        </p:nvSpPr>
+        <p:spPr>
+          <a:xfrm>
+            <a:off x="1508760" y="4370831"/>
             <a:ext cx="4297680" cy="868680"/>
           </a:xfrm>
           <a:prstGeom prst="rect">
@@ -22042,24 +22188,24 @@
             <a:r>
               <a:rPr sz="1450" b="0" i="0">
                 <a:solidFill>
-                  <a:srgbClr val="1D2433"/>
-                </a:solidFill>
-                <a:latin typeface="Calibri"/>
-              </a:rPr>
-              <a:t>Heat and sound</a:t>
-            </a:r>
-          </a:p>
-        </p:txBody>
-      </p:sp>
-      <p:sp>
-        <p:nvSpPr>
-          <p:cNvPr id="16" name="Rounded Rectangle 15"/>
+                  <a:srgbClr val="6B7280"/>
+                </a:solidFill>
+                <a:latin typeface="Calibri"/>
+              </a:rPr>
+              <a:t>Sound → electrical</a:t>
+            </a:r>
+          </a:p>
+        </p:txBody>
+      </p:sp>
+      <p:sp>
+        <p:nvSpPr>
+          <p:cNvPr id="20" name="Rounded Rectangle 19"/>
           <p:cNvSpPr/>
           <p:nvPr/>
         </p:nvSpPr>
         <p:spPr>
           <a:xfrm>
-            <a:off x="640080" y="4370831"/>
+            <a:off x="6172200" y="4370831"/>
             <a:ext cx="5349240" cy="868680"/>
           </a:xfrm>
           <a:prstGeom prst="roundRect">
@@ -22099,20 +22245,20 @@
       </p:sp>
       <p:sp>
         <p:nvSpPr>
-          <p:cNvPr id="17" name="Oval 16"/>
+          <p:cNvPr id="21" name="Oval 20"/>
           <p:cNvSpPr/>
           <p:nvPr/>
         </p:nvSpPr>
         <p:spPr>
           <a:xfrm>
-            <a:off x="914400" y="4599431"/>
+            <a:off x="6446520" y="4599431"/>
             <a:ext cx="411480" cy="411480"/>
           </a:xfrm>
           <a:prstGeom prst="ellipse">
             <a:avLst/>
           </a:prstGeom>
           <a:solidFill>
-            <a:srgbClr val="0A9396"/>
+            <a:srgbClr val="B7C2CC"/>
           </a:solidFill>
           <a:ln>
             <a:noFill/>
@@ -22143,13 +22289,13 @@
       </p:sp>
       <p:sp>
         <p:nvSpPr>
-          <p:cNvPr id="18" name="TextBox 17"/>
-          <p:cNvSpPr txBox="1"/>
-          <p:nvPr/>
-        </p:nvSpPr>
-        <p:spPr>
-          <a:xfrm>
-            <a:off x="914400" y="4599431"/>
+          <p:cNvPr id="22" name="TextBox 21"/>
+          <p:cNvSpPr txBox="1"/>
+          <p:nvPr/>
+        </p:nvSpPr>
+        <p:spPr>
+          <a:xfrm>
+            <a:off x="6446520" y="4599431"/>
             <a:ext cx="411480" cy="411480"/>
           </a:xfrm>
           <a:prstGeom prst="rect">
@@ -22171,20 +22317,20 @@
                 </a:solidFill>
                 <a:latin typeface="Calibri"/>
               </a:rPr>
-              <a:t>C</a:t>
-            </a:r>
-          </a:p>
-        </p:txBody>
-      </p:sp>
-      <p:sp>
-        <p:nvSpPr>
-          <p:cNvPr id="19" name="TextBox 18"/>
-          <p:cNvSpPr txBox="1"/>
-          <p:nvPr/>
-        </p:nvSpPr>
-        <p:spPr>
-          <a:xfrm>
-            <a:off x="1508760" y="4370831"/>
+              <a:t>D</a:t>
+            </a:r>
+          </a:p>
+        </p:txBody>
+      </p:sp>
+      <p:sp>
+        <p:nvSpPr>
+          <p:cNvPr id="23" name="TextBox 22"/>
+          <p:cNvSpPr txBox="1"/>
+          <p:nvPr/>
+        </p:nvSpPr>
+        <p:spPr>
+          <a:xfrm>
+            <a:off x="7040880" y="4370831"/>
             <a:ext cx="4297680" cy="868680"/>
           </a:xfrm>
           <a:prstGeom prst="rect">
@@ -22202,38 +22348,44 @@
             <a:r>
               <a:rPr sz="1450" b="0" i="0">
                 <a:solidFill>
-                  <a:srgbClr val="1D2433"/>
-                </a:solidFill>
-                <a:latin typeface="Calibri"/>
-              </a:rPr>
-              <a:t>Light</a:t>
-            </a:r>
-          </a:p>
-        </p:txBody>
-      </p:sp>
-      <p:sp>
-        <p:nvSpPr>
-          <p:cNvPr id="20" name="Rounded Rectangle 19"/>
+                  <a:srgbClr val="6B7280"/>
+                </a:solidFill>
+                <a:latin typeface="Calibri"/>
+              </a:rPr>
+              <a:t>Chemical → nuclear</a:t>
+            </a:r>
+          </a:p>
+        </p:txBody>
+      </p:sp>
+      <p:sp>
+        <p:nvSpPr>
+          <p:cNvPr id="24" name="Rounded Rectangle 23"/>
           <p:cNvSpPr/>
           <p:nvPr/>
         </p:nvSpPr>
         <p:spPr>
           <a:xfrm>
-            <a:off x="6172200" y="4370831"/>
-            <a:ext cx="5349240" cy="868680"/>
+            <a:off x="640080" y="5440680"/>
+            <a:ext cx="10881360" cy="1097280"/>
           </a:xfrm>
           <a:prstGeom prst="roundRect">
             <a:avLst>
-              <a:gd name="adj" fmla="val 12000"/>
+              <a:gd name="adj" fmla="val 5000"/>
             </a:avLst>
           </a:prstGeom>
           <a:solidFill>
-            <a:srgbClr val="EAF1F4"/>
+            <a:srgbClr val="FFFFFF"/>
           </a:solidFill>
           <a:ln>
             <a:noFill/>
           </a:ln>
-          <a:effectLst/>
+          <a:effectLst>
+            <a:outerShdw blurRad="88900" dist="38100" dir="5400000" rotWithShape="0" algn="bl">
+              <a:srgbClr val="000000">
+                <a:alpha val="16000"/>
+              </a:srgbClr>
+            </a:outerShdw>
+          </a:effectLst>
         </p:spPr>
         <p:style>
           <a:lnRef idx="1">
@@ -22259,114 +22411,74 @@
       </p:sp>
       <p:sp>
         <p:nvSpPr>
-          <p:cNvPr id="21" name="Oval 20"/>
-          <p:cNvSpPr/>
-          <p:nvPr/>
-        </p:nvSpPr>
-        <p:spPr>
-          <a:xfrm>
-            <a:off x="6446520" y="4599431"/>
-            <a:ext cx="411480" cy="411480"/>
-          </a:xfrm>
-          <a:prstGeom prst="ellipse">
-            <a:avLst/>
-          </a:prstGeom>
-          <a:solidFill>
-            <a:srgbClr val="0A9396"/>
-          </a:solidFill>
-          <a:ln>
-            <a:noFill/>
-          </a:ln>
-          <a:effectLst/>
-        </p:spPr>
-        <p:style>
-          <a:lnRef idx="1">
-            <a:schemeClr val="accent1"/>
-          </a:lnRef>
-          <a:fillRef idx="3">
-            <a:schemeClr val="accent1"/>
-          </a:fillRef>
-          <a:effectRef idx="2">
-            <a:schemeClr val="accent1"/>
-          </a:effectRef>
-          <a:fontRef idx="minor">
-            <a:schemeClr val="lt1"/>
-          </a:fontRef>
-        </p:style>
-        <p:txBody>
-          <a:bodyPr rtlCol="0" anchor="ctr"/>
-          <a:lstStyle/>
-          <a:p>
-            <a:pPr algn="ctr"/>
-          </a:p>
-        </p:txBody>
-      </p:sp>
-      <p:sp>
-        <p:nvSpPr>
-          <p:cNvPr id="22" name="TextBox 21"/>
-          <p:cNvSpPr txBox="1"/>
-          <p:nvPr/>
-        </p:nvSpPr>
-        <p:spPr>
-          <a:xfrm>
-            <a:off x="6446520" y="4599431"/>
-            <a:ext cx="411480" cy="411480"/>
-          </a:xfrm>
-          <a:prstGeom prst="rect">
-            <a:avLst/>
-          </a:prstGeom>
-          <a:noFill/>
-        </p:spPr>
-        <p:txBody>
-          <a:bodyPr wrap="square" anchor="ctr" lIns="0" rIns="0" tIns="0" bIns="0">
-            <a:spAutoFit/>
-          </a:bodyPr>
-          <a:lstStyle/>
-          <a:p>
-            <a:pPr algn="ctr"/>
-            <a:r>
-              <a:rPr sz="1400" b="1" i="0">
-                <a:solidFill>
-                  <a:srgbClr val="FFFFFF"/>
-                </a:solidFill>
-                <a:latin typeface="Calibri"/>
-              </a:rPr>
-              <a:t>D</a:t>
-            </a:r>
-          </a:p>
-        </p:txBody>
-      </p:sp>
-      <p:sp>
-        <p:nvSpPr>
-          <p:cNvPr id="23" name="TextBox 22"/>
-          <p:cNvSpPr txBox="1"/>
-          <p:nvPr/>
-        </p:nvSpPr>
-        <p:spPr>
-          <a:xfrm>
-            <a:off x="7040880" y="4370831"/>
-            <a:ext cx="4297680" cy="868680"/>
-          </a:xfrm>
-          <a:prstGeom prst="rect">
-            <a:avLst/>
-          </a:prstGeom>
-          <a:noFill/>
-        </p:spPr>
-        <p:txBody>
-          <a:bodyPr wrap="square" anchor="ctr" lIns="0" rIns="0" tIns="0" bIns="0">
+          <p:cNvPr id="25" name="TextBox 24"/>
+          <p:cNvSpPr txBox="1"/>
+          <p:nvPr/>
+        </p:nvSpPr>
+        <p:spPr>
+          <a:xfrm>
+            <a:off x="1005840" y="5596128"/>
+            <a:ext cx="4572000" cy="320040"/>
+          </a:xfrm>
+          <a:prstGeom prst="rect">
+            <a:avLst/>
+          </a:prstGeom>
+          <a:noFill/>
+        </p:spPr>
+        <p:txBody>
+          <a:bodyPr wrap="square" anchor="t" lIns="0" rIns="0" tIns="0" bIns="0">
             <a:spAutoFit/>
           </a:bodyPr>
           <a:lstStyle/>
           <a:p>
             <a:pPr algn="l"/>
             <a:r>
+              <a:rPr sz="1300" b="1" i="0">
+                <a:solidFill>
+                  <a:srgbClr val="2A9D8F"/>
+                </a:solidFill>
+                <a:latin typeface="Arial"/>
+              </a:rPr>
+              <a:t>WHY</a:t>
+            </a:r>
+          </a:p>
+        </p:txBody>
+      </p:sp>
+      <p:sp>
+        <p:nvSpPr>
+          <p:cNvPr id="26" name="TextBox 25"/>
+          <p:cNvSpPr txBox="1"/>
+          <p:nvPr/>
+        </p:nvSpPr>
+        <p:spPr>
+          <a:xfrm>
+            <a:off x="1005840" y="5943600"/>
+            <a:ext cx="10149840" cy="548640"/>
+          </a:xfrm>
+          <a:prstGeom prst="rect">
+            <a:avLst/>
+          </a:prstGeom>
+          <a:noFill/>
+        </p:spPr>
+        <p:txBody>
+          <a:bodyPr wrap="square" anchor="t" lIns="0" rIns="0" tIns="0" bIns="0">
+            <a:spAutoFit/>
+          </a:bodyPr>
+          <a:lstStyle/>
+          <a:p>
+            <a:pPr algn="l">
+              <a:lnSpc>
+                <a:spcPct val="105000"/>
+              </a:lnSpc>
+            </a:pPr>
+            <a:r>
               <a:rPr sz="1450" b="0" i="0">
                 <a:solidFill>
                   <a:srgbClr val="1D2433"/>
                 </a:solidFill>
                 <a:latin typeface="Calibri"/>
               </a:rPr>
-              <a:t>Chemical energy</a:t>
+              <a:t>Water stored high up has potential energy. Falling, it gains kinetic energy, which spins turbines and generators to produce electrical energy.</a:t>
             </a:r>
           </a:p>
         </p:txBody>
@@ -22666,7 +22778,7 @@
             <a:avLst/>
           </a:prstGeom>
           <a:solidFill>
-            <a:srgbClr val="2A9D8F"/>
+            <a:srgbClr val="0A9396"/>
           </a:solidFill>
           <a:ln>
             <a:noFill/>
@@ -22721,11 +22833,11 @@
             <a:r>
               <a:rPr sz="1300" b="1" i="0">
                 <a:solidFill>
-                  <a:srgbClr val="2A9D8F"/>
+                  <a:srgbClr val="0A9396"/>
                 </a:solidFill>
                 <a:latin typeface="Arial"/>
               </a:rPr>
-              <a:t>ANSWER REVEALED</a:t>
+              <a:t>QUIZ QUESTION</a:t>
             </a:r>
           </a:p>
         </p:txBody>
@@ -22913,7 +23025,7 @@
             <a:avLst/>
           </a:prstGeom>
           <a:solidFill>
-            <a:srgbClr val="B7C2CC"/>
+            <a:srgbClr val="0A9396"/>
           </a:solidFill>
           <a:ln>
             <a:noFill/>
@@ -23003,7 +23115,7 @@
             <a:r>
               <a:rPr sz="1450" b="0" i="0">
                 <a:solidFill>
-                  <a:srgbClr val="6B7280"/>
+                  <a:srgbClr val="1D2433"/>
                 </a:solidFill>
                 <a:latin typeface="Calibri"/>
               </a:rPr>
@@ -23021,168 +23133,6 @@
         <p:spPr>
           <a:xfrm>
             <a:off x="6172200" y="3337560"/>
-            <a:ext cx="5349240" cy="868680"/>
-          </a:xfrm>
-          <a:prstGeom prst="roundRect">
-            <a:avLst>
-              <a:gd name="adj" fmla="val 12000"/>
-            </a:avLst>
-          </a:prstGeom>
-          <a:solidFill>
-            <a:srgbClr val="E9F5F0"/>
-          </a:solidFill>
-          <a:ln w="25400">
-            <a:solidFill>
-              <a:srgbClr val="2A9D8F"/>
-            </a:solidFill>
-          </a:ln>
-          <a:effectLst/>
-        </p:spPr>
-        <p:style>
-          <a:lnRef idx="1">
-            <a:schemeClr val="accent1"/>
-          </a:lnRef>
-          <a:fillRef idx="3">
-            <a:schemeClr val="accent1"/>
-          </a:fillRef>
-          <a:effectRef idx="2">
-            <a:schemeClr val="accent1"/>
-          </a:effectRef>
-          <a:fontRef idx="minor">
-            <a:schemeClr val="lt1"/>
-          </a:fontRef>
-        </p:style>
-        <p:txBody>
-          <a:bodyPr rtlCol="0" anchor="ctr"/>
-          <a:lstStyle/>
-          <a:p>
-            <a:pPr algn="ctr"/>
-          </a:p>
-        </p:txBody>
-      </p:sp>
-      <p:sp>
-        <p:nvSpPr>
-          <p:cNvPr id="13" name="Oval 12"/>
-          <p:cNvSpPr/>
-          <p:nvPr/>
-        </p:nvSpPr>
-        <p:spPr>
-          <a:xfrm>
-            <a:off x="6446520" y="3566160"/>
-            <a:ext cx="411480" cy="411480"/>
-          </a:xfrm>
-          <a:prstGeom prst="ellipse">
-            <a:avLst/>
-          </a:prstGeom>
-          <a:solidFill>
-            <a:srgbClr val="2A9D8F"/>
-          </a:solidFill>
-          <a:ln>
-            <a:noFill/>
-          </a:ln>
-          <a:effectLst/>
-        </p:spPr>
-        <p:style>
-          <a:lnRef idx="1">
-            <a:schemeClr val="accent1"/>
-          </a:lnRef>
-          <a:fillRef idx="3">
-            <a:schemeClr val="accent1"/>
-          </a:fillRef>
-          <a:effectRef idx="2">
-            <a:schemeClr val="accent1"/>
-          </a:effectRef>
-          <a:fontRef idx="minor">
-            <a:schemeClr val="lt1"/>
-          </a:fontRef>
-        </p:style>
-        <p:txBody>
-          <a:bodyPr rtlCol="0" anchor="ctr"/>
-          <a:lstStyle/>
-          <a:p>
-            <a:pPr algn="ctr"/>
-          </a:p>
-        </p:txBody>
-      </p:sp>
-      <p:sp>
-        <p:nvSpPr>
-          <p:cNvPr id="14" name="TextBox 13"/>
-          <p:cNvSpPr txBox="1"/>
-          <p:nvPr/>
-        </p:nvSpPr>
-        <p:spPr>
-          <a:xfrm>
-            <a:off x="6446520" y="3566160"/>
-            <a:ext cx="411480" cy="411480"/>
-          </a:xfrm>
-          <a:prstGeom prst="rect">
-            <a:avLst/>
-          </a:prstGeom>
-          <a:noFill/>
-        </p:spPr>
-        <p:txBody>
-          <a:bodyPr wrap="square" anchor="ctr" lIns="0" rIns="0" tIns="0" bIns="0">
-            <a:spAutoFit/>
-          </a:bodyPr>
-          <a:lstStyle/>
-          <a:p>
-            <a:pPr algn="ctr"/>
-            <a:r>
-              <a:rPr sz="1400" b="1" i="0">
-                <a:solidFill>
-                  <a:srgbClr val="FFFFFF"/>
-                </a:solidFill>
-                <a:latin typeface="Calibri"/>
-              </a:rPr>
-              <a:t>✓</a:t>
-            </a:r>
-          </a:p>
-        </p:txBody>
-      </p:sp>
-      <p:sp>
-        <p:nvSpPr>
-          <p:cNvPr id="15" name="TextBox 14"/>
-          <p:cNvSpPr txBox="1"/>
-          <p:nvPr/>
-        </p:nvSpPr>
-        <p:spPr>
-          <a:xfrm>
-            <a:off x="7040880" y="3337560"/>
-            <a:ext cx="4297680" cy="868680"/>
-          </a:xfrm>
-          <a:prstGeom prst="rect">
-            <a:avLst/>
-          </a:prstGeom>
-          <a:noFill/>
-        </p:spPr>
-        <p:txBody>
-          <a:bodyPr wrap="square" anchor="ctr" lIns="0" rIns="0" tIns="0" bIns="0">
-            <a:spAutoFit/>
-          </a:bodyPr>
-          <a:lstStyle/>
-          <a:p>
-            <a:pPr algn="l"/>
-            <a:r>
-              <a:rPr sz="1450" b="1" i="0">
-                <a:solidFill>
-                  <a:srgbClr val="1D2433"/>
-                </a:solidFill>
-                <a:latin typeface="Calibri"/>
-              </a:rPr>
-              <a:t>Heat and sound</a:t>
-            </a:r>
-          </a:p>
-        </p:txBody>
-      </p:sp>
-      <p:sp>
-        <p:nvSpPr>
-          <p:cNvPr id="16" name="Rounded Rectangle 15"/>
-          <p:cNvSpPr/>
-          <p:nvPr/>
-        </p:nvSpPr>
-        <p:spPr>
-          <a:xfrm>
-            <a:off x="640080" y="4370831"/>
             <a:ext cx="5349240" cy="868680"/>
           </a:xfrm>
           <a:prstGeom prst="roundRect">
@@ -23222,20 +23172,20 @@
       </p:sp>
       <p:sp>
         <p:nvSpPr>
-          <p:cNvPr id="17" name="Oval 16"/>
+          <p:cNvPr id="13" name="Oval 12"/>
           <p:cNvSpPr/>
           <p:nvPr/>
         </p:nvSpPr>
         <p:spPr>
           <a:xfrm>
-            <a:off x="914400" y="4599431"/>
+            <a:off x="6446520" y="3566160"/>
             <a:ext cx="411480" cy="411480"/>
           </a:xfrm>
           <a:prstGeom prst="ellipse">
             <a:avLst/>
           </a:prstGeom>
           <a:solidFill>
-            <a:srgbClr val="B7C2CC"/>
+            <a:srgbClr val="0A9396"/>
           </a:solidFill>
           <a:ln>
             <a:noFill/>
@@ -23266,13 +23216,13 @@
       </p:sp>
       <p:sp>
         <p:nvSpPr>
-          <p:cNvPr id="18" name="TextBox 17"/>
-          <p:cNvSpPr txBox="1"/>
-          <p:nvPr/>
-        </p:nvSpPr>
-        <p:spPr>
-          <a:xfrm>
-            <a:off x="914400" y="4599431"/>
+          <p:cNvPr id="14" name="TextBox 13"/>
+          <p:cNvSpPr txBox="1"/>
+          <p:nvPr/>
+        </p:nvSpPr>
+        <p:spPr>
+          <a:xfrm>
+            <a:off x="6446520" y="3566160"/>
             <a:ext cx="411480" cy="411480"/>
           </a:xfrm>
           <a:prstGeom prst="rect">
@@ -23294,20 +23244,20 @@
                 </a:solidFill>
                 <a:latin typeface="Calibri"/>
               </a:rPr>
-              <a:t>C</a:t>
-            </a:r>
-          </a:p>
-        </p:txBody>
-      </p:sp>
-      <p:sp>
-        <p:nvSpPr>
-          <p:cNvPr id="19" name="TextBox 18"/>
-          <p:cNvSpPr txBox="1"/>
-          <p:nvPr/>
-        </p:nvSpPr>
-        <p:spPr>
-          <a:xfrm>
-            <a:off x="1508760" y="4370831"/>
+              <a:t>B</a:t>
+            </a:r>
+          </a:p>
+        </p:txBody>
+      </p:sp>
+      <p:sp>
+        <p:nvSpPr>
+          <p:cNvPr id="15" name="TextBox 14"/>
+          <p:cNvSpPr txBox="1"/>
+          <p:nvPr/>
+        </p:nvSpPr>
+        <p:spPr>
+          <a:xfrm>
+            <a:off x="7040880" y="3337560"/>
             <a:ext cx="4297680" cy="868680"/>
           </a:xfrm>
           <a:prstGeom prst="rect">
@@ -23325,24 +23275,24 @@
             <a:r>
               <a:rPr sz="1450" b="0" i="0">
                 <a:solidFill>
-                  <a:srgbClr val="6B7280"/>
-                </a:solidFill>
-                <a:latin typeface="Calibri"/>
-              </a:rPr>
-              <a:t>Light</a:t>
-            </a:r>
-          </a:p>
-        </p:txBody>
-      </p:sp>
-      <p:sp>
-        <p:nvSpPr>
-          <p:cNvPr id="20" name="Rounded Rectangle 19"/>
+                  <a:srgbClr val="1D2433"/>
+                </a:solidFill>
+                <a:latin typeface="Calibri"/>
+              </a:rPr>
+              <a:t>Heat and sound</a:t>
+            </a:r>
+          </a:p>
+        </p:txBody>
+      </p:sp>
+      <p:sp>
+        <p:nvSpPr>
+          <p:cNvPr id="16" name="Rounded Rectangle 15"/>
           <p:cNvSpPr/>
           <p:nvPr/>
         </p:nvSpPr>
         <p:spPr>
           <a:xfrm>
-            <a:off x="6172200" y="4370831"/>
+            <a:off x="640080" y="4370831"/>
             <a:ext cx="5349240" cy="868680"/>
           </a:xfrm>
           <a:prstGeom prst="roundRect">
@@ -23382,20 +23332,20 @@
       </p:sp>
       <p:sp>
         <p:nvSpPr>
-          <p:cNvPr id="21" name="Oval 20"/>
+          <p:cNvPr id="17" name="Oval 16"/>
           <p:cNvSpPr/>
           <p:nvPr/>
         </p:nvSpPr>
         <p:spPr>
           <a:xfrm>
-            <a:off x="6446520" y="4599431"/>
+            <a:off x="914400" y="4599431"/>
             <a:ext cx="411480" cy="411480"/>
           </a:xfrm>
           <a:prstGeom prst="ellipse">
             <a:avLst/>
           </a:prstGeom>
           <a:solidFill>
-            <a:srgbClr val="B7C2CC"/>
+            <a:srgbClr val="0A9396"/>
           </a:solidFill>
           <a:ln>
             <a:noFill/>
@@ -23426,13 +23376,13 @@
       </p:sp>
       <p:sp>
         <p:nvSpPr>
-          <p:cNvPr id="22" name="TextBox 21"/>
-          <p:cNvSpPr txBox="1"/>
-          <p:nvPr/>
-        </p:nvSpPr>
-        <p:spPr>
-          <a:xfrm>
-            <a:off x="6446520" y="4599431"/>
+          <p:cNvPr id="18" name="TextBox 17"/>
+          <p:cNvSpPr txBox="1"/>
+          <p:nvPr/>
+        </p:nvSpPr>
+        <p:spPr>
+          <a:xfrm>
+            <a:off x="914400" y="4599431"/>
             <a:ext cx="411480" cy="411480"/>
           </a:xfrm>
           <a:prstGeom prst="rect">
@@ -23454,20 +23404,20 @@
                 </a:solidFill>
                 <a:latin typeface="Calibri"/>
               </a:rPr>
-              <a:t>D</a:t>
-            </a:r>
-          </a:p>
-        </p:txBody>
-      </p:sp>
-      <p:sp>
-        <p:nvSpPr>
-          <p:cNvPr id="23" name="TextBox 22"/>
-          <p:cNvSpPr txBox="1"/>
-          <p:nvPr/>
-        </p:nvSpPr>
-        <p:spPr>
-          <a:xfrm>
-            <a:off x="7040880" y="4370831"/>
+              <a:t>C</a:t>
+            </a:r>
+          </a:p>
+        </p:txBody>
+      </p:sp>
+      <p:sp>
+        <p:nvSpPr>
+          <p:cNvPr id="19" name="TextBox 18"/>
+          <p:cNvSpPr txBox="1"/>
+          <p:nvPr/>
+        </p:nvSpPr>
+        <p:spPr>
+          <a:xfrm>
+            <a:off x="1508760" y="4370831"/>
             <a:ext cx="4297680" cy="868680"/>
           </a:xfrm>
           <a:prstGeom prst="rect">
@@ -23485,44 +23435,38 @@
             <a:r>
               <a:rPr sz="1450" b="0" i="0">
                 <a:solidFill>
-                  <a:srgbClr val="6B7280"/>
-                </a:solidFill>
-                <a:latin typeface="Calibri"/>
-              </a:rPr>
-              <a:t>Chemical energy</a:t>
-            </a:r>
-          </a:p>
-        </p:txBody>
-      </p:sp>
-      <p:sp>
-        <p:nvSpPr>
-          <p:cNvPr id="24" name="Rounded Rectangle 23"/>
+                  <a:srgbClr val="1D2433"/>
+                </a:solidFill>
+                <a:latin typeface="Calibri"/>
+              </a:rPr>
+              <a:t>Light</a:t>
+            </a:r>
+          </a:p>
+        </p:txBody>
+      </p:sp>
+      <p:sp>
+        <p:nvSpPr>
+          <p:cNvPr id="20" name="Rounded Rectangle 19"/>
           <p:cNvSpPr/>
           <p:nvPr/>
         </p:nvSpPr>
         <p:spPr>
           <a:xfrm>
-            <a:off x="640080" y="5440680"/>
-            <a:ext cx="10881360" cy="1097280"/>
+            <a:off x="6172200" y="4370831"/>
+            <a:ext cx="5349240" cy="868680"/>
           </a:xfrm>
           <a:prstGeom prst="roundRect">
             <a:avLst>
-              <a:gd name="adj" fmla="val 5000"/>
+              <a:gd name="adj" fmla="val 12000"/>
             </a:avLst>
           </a:prstGeom>
           <a:solidFill>
-            <a:srgbClr val="FFFFFF"/>
+            <a:srgbClr val="EAF1F4"/>
           </a:solidFill>
           <a:ln>
             <a:noFill/>
           </a:ln>
-          <a:effectLst>
-            <a:outerShdw blurRad="88900" dist="38100" dir="5400000" rotWithShape="0" algn="bl">
-              <a:srgbClr val="000000">
-                <a:alpha val="16000"/>
-              </a:srgbClr>
-            </a:outerShdw>
-          </a:effectLst>
+          <a:effectLst/>
         </p:spPr>
         <p:style>
           <a:lnRef idx="1">
@@ -23548,74 +23492,114 @@
       </p:sp>
       <p:sp>
         <p:nvSpPr>
-          <p:cNvPr id="25" name="TextBox 24"/>
-          <p:cNvSpPr txBox="1"/>
-          <p:nvPr/>
-        </p:nvSpPr>
-        <p:spPr>
-          <a:xfrm>
-            <a:off x="1005840" y="5596128"/>
-            <a:ext cx="4572000" cy="320040"/>
-          </a:xfrm>
-          <a:prstGeom prst="rect">
-            <a:avLst/>
-          </a:prstGeom>
-          <a:noFill/>
-        </p:spPr>
-        <p:txBody>
-          <a:bodyPr wrap="square" anchor="t" lIns="0" rIns="0" tIns="0" bIns="0">
+          <p:cNvPr id="21" name="Oval 20"/>
+          <p:cNvSpPr/>
+          <p:nvPr/>
+        </p:nvSpPr>
+        <p:spPr>
+          <a:xfrm>
+            <a:off x="6446520" y="4599431"/>
+            <a:ext cx="411480" cy="411480"/>
+          </a:xfrm>
+          <a:prstGeom prst="ellipse">
+            <a:avLst/>
+          </a:prstGeom>
+          <a:solidFill>
+            <a:srgbClr val="0A9396"/>
+          </a:solidFill>
+          <a:ln>
+            <a:noFill/>
+          </a:ln>
+          <a:effectLst/>
+        </p:spPr>
+        <p:style>
+          <a:lnRef idx="1">
+            <a:schemeClr val="accent1"/>
+          </a:lnRef>
+          <a:fillRef idx="3">
+            <a:schemeClr val="accent1"/>
+          </a:fillRef>
+          <a:effectRef idx="2">
+            <a:schemeClr val="accent1"/>
+          </a:effectRef>
+          <a:fontRef idx="minor">
+            <a:schemeClr val="lt1"/>
+          </a:fontRef>
+        </p:style>
+        <p:txBody>
+          <a:bodyPr rtlCol="0" anchor="ctr"/>
+          <a:lstStyle/>
+          <a:p>
+            <a:pPr algn="ctr"/>
+          </a:p>
+        </p:txBody>
+      </p:sp>
+      <p:sp>
+        <p:nvSpPr>
+          <p:cNvPr id="22" name="TextBox 21"/>
+          <p:cNvSpPr txBox="1"/>
+          <p:nvPr/>
+        </p:nvSpPr>
+        <p:spPr>
+          <a:xfrm>
+            <a:off x="6446520" y="4599431"/>
+            <a:ext cx="411480" cy="411480"/>
+          </a:xfrm>
+          <a:prstGeom prst="rect">
+            <a:avLst/>
+          </a:prstGeom>
+          <a:noFill/>
+        </p:spPr>
+        <p:txBody>
+          <a:bodyPr wrap="square" anchor="ctr" lIns="0" rIns="0" tIns="0" bIns="0">
+            <a:spAutoFit/>
+          </a:bodyPr>
+          <a:lstStyle/>
+          <a:p>
+            <a:pPr algn="ctr"/>
+            <a:r>
+              <a:rPr sz="1400" b="1" i="0">
+                <a:solidFill>
+                  <a:srgbClr val="FFFFFF"/>
+                </a:solidFill>
+                <a:latin typeface="Calibri"/>
+              </a:rPr>
+              <a:t>D</a:t>
+            </a:r>
+          </a:p>
+        </p:txBody>
+      </p:sp>
+      <p:sp>
+        <p:nvSpPr>
+          <p:cNvPr id="23" name="TextBox 22"/>
+          <p:cNvSpPr txBox="1"/>
+          <p:nvPr/>
+        </p:nvSpPr>
+        <p:spPr>
+          <a:xfrm>
+            <a:off x="7040880" y="4370831"/>
+            <a:ext cx="4297680" cy="868680"/>
+          </a:xfrm>
+          <a:prstGeom prst="rect">
+            <a:avLst/>
+          </a:prstGeom>
+          <a:noFill/>
+        </p:spPr>
+        <p:txBody>
+          <a:bodyPr wrap="square" anchor="ctr" lIns="0" rIns="0" tIns="0" bIns="0">
             <a:spAutoFit/>
           </a:bodyPr>
           <a:lstStyle/>
           <a:p>
             <a:pPr algn="l"/>
             <a:r>
-              <a:rPr sz="1300" b="1" i="0">
-                <a:solidFill>
-                  <a:srgbClr val="2A9D8F"/>
-                </a:solidFill>
-                <a:latin typeface="Arial"/>
-              </a:rPr>
-              <a:t>WHY</a:t>
-            </a:r>
-          </a:p>
-        </p:txBody>
-      </p:sp>
-      <p:sp>
-        <p:nvSpPr>
-          <p:cNvPr id="26" name="TextBox 25"/>
-          <p:cNvSpPr txBox="1"/>
-          <p:nvPr/>
-        </p:nvSpPr>
-        <p:spPr>
-          <a:xfrm>
-            <a:off x="1005840" y="5943600"/>
-            <a:ext cx="10149840" cy="548640"/>
-          </a:xfrm>
-          <a:prstGeom prst="rect">
-            <a:avLst/>
-          </a:prstGeom>
-          <a:noFill/>
-        </p:spPr>
-        <p:txBody>
-          <a:bodyPr wrap="square" anchor="t" lIns="0" rIns="0" tIns="0" bIns="0">
-            <a:spAutoFit/>
-          </a:bodyPr>
-          <a:lstStyle/>
-          <a:p>
-            <a:pPr algn="l">
-              <a:lnSpc>
-                <a:spcPct val="105000"/>
-              </a:lnSpc>
-            </a:pPr>
-            <a:r>
               <a:rPr sz="1450" b="0" i="0">
                 <a:solidFill>
                   <a:srgbClr val="1D2433"/>
                 </a:solidFill>
                 <a:latin typeface="Calibri"/>
               </a:rPr>
-              <a:t>Energy is conserved, not destroyed. At each bounce some mechanical energy is converted into heat (from the impact) and sound, so less is left to lift the ball.</a:t>
+              <a:t>Chemical energy</a:t>
             </a:r>
           </a:p>
         </p:txBody>
@@ -23705,7 +23689,7 @@
             <a:avLst/>
           </a:prstGeom>
           <a:solidFill>
-            <a:srgbClr val="0A9396"/>
+            <a:srgbClr val="2A9D8F"/>
           </a:solidFill>
           <a:ln>
             <a:noFill/>
@@ -23760,11 +23744,11 @@
             <a:r>
               <a:rPr sz="1300" b="1" i="0">
                 <a:solidFill>
-                  <a:srgbClr val="0A9396"/>
+                  <a:srgbClr val="2A9D8F"/>
                 </a:solidFill>
                 <a:latin typeface="Arial"/>
               </a:rPr>
-              <a:t>QUIZ QUESTION</a:t>
+              <a:t>ANSWER REVEALED</a:t>
             </a:r>
           </a:p>
         </p:txBody>
@@ -23799,7 +23783,7 @@
                 </a:solidFill>
                 <a:latin typeface="Calibri"/>
               </a:rPr>
-              <a:t>Q4 — Conservation Law</a:t>
+              <a:t>Q3 — Energy Lost?</a:t>
             </a:r>
           </a:p>
         </p:txBody>
@@ -23886,7 +23870,7 @@
                 </a:solidFill>
                 <a:latin typeface="Calibri"/>
               </a:rPr>
-              <a:t>The law of conservation of energy states that energy can be:</a:t>
+              <a:t>A bouncing ball rises a little less after each bounce. The 'lost' energy has mainly become:</a:t>
             </a:r>
           </a:p>
         </p:txBody>
@@ -23952,7 +23936,7 @@
             <a:avLst/>
           </a:prstGeom>
           <a:solidFill>
-            <a:srgbClr val="0A9396"/>
+            <a:srgbClr val="B7C2CC"/>
           </a:solidFill>
           <a:ln>
             <a:noFill/>
@@ -24042,11 +24026,11 @@
             <a:r>
               <a:rPr sz="1450" b="0" i="0">
                 <a:solidFill>
-                  <a:srgbClr val="1D2433"/>
-                </a:solidFill>
-                <a:latin typeface="Calibri"/>
-              </a:rPr>
-              <a:t>Created but not destroyed</a:t>
+                  <a:srgbClr val="6B7280"/>
+                </a:solidFill>
+                <a:latin typeface="Calibri"/>
+              </a:rPr>
+              <a:t>Destroyed</a:t>
             </a:r>
           </a:p>
         </p:txBody>
@@ -24060,6 +24044,168 @@
         <p:spPr>
           <a:xfrm>
             <a:off x="6172200" y="3337560"/>
+            <a:ext cx="5349240" cy="868680"/>
+          </a:xfrm>
+          <a:prstGeom prst="roundRect">
+            <a:avLst>
+              <a:gd name="adj" fmla="val 12000"/>
+            </a:avLst>
+          </a:prstGeom>
+          <a:solidFill>
+            <a:srgbClr val="E9F5F0"/>
+          </a:solidFill>
+          <a:ln w="25400">
+            <a:solidFill>
+              <a:srgbClr val="2A9D8F"/>
+            </a:solidFill>
+          </a:ln>
+          <a:effectLst/>
+        </p:spPr>
+        <p:style>
+          <a:lnRef idx="1">
+            <a:schemeClr val="accent1"/>
+          </a:lnRef>
+          <a:fillRef idx="3">
+            <a:schemeClr val="accent1"/>
+          </a:fillRef>
+          <a:effectRef idx="2">
+            <a:schemeClr val="accent1"/>
+          </a:effectRef>
+          <a:fontRef idx="minor">
+            <a:schemeClr val="lt1"/>
+          </a:fontRef>
+        </p:style>
+        <p:txBody>
+          <a:bodyPr rtlCol="0" anchor="ctr"/>
+          <a:lstStyle/>
+          <a:p>
+            <a:pPr algn="ctr"/>
+          </a:p>
+        </p:txBody>
+      </p:sp>
+      <p:sp>
+        <p:nvSpPr>
+          <p:cNvPr id="13" name="Oval 12"/>
+          <p:cNvSpPr/>
+          <p:nvPr/>
+        </p:nvSpPr>
+        <p:spPr>
+          <a:xfrm>
+            <a:off x="6446520" y="3566160"/>
+            <a:ext cx="411480" cy="411480"/>
+          </a:xfrm>
+          <a:prstGeom prst="ellipse">
+            <a:avLst/>
+          </a:prstGeom>
+          <a:solidFill>
+            <a:srgbClr val="2A9D8F"/>
+          </a:solidFill>
+          <a:ln>
+            <a:noFill/>
+          </a:ln>
+          <a:effectLst/>
+        </p:spPr>
+        <p:style>
+          <a:lnRef idx="1">
+            <a:schemeClr val="accent1"/>
+          </a:lnRef>
+          <a:fillRef idx="3">
+            <a:schemeClr val="accent1"/>
+          </a:fillRef>
+          <a:effectRef idx="2">
+            <a:schemeClr val="accent1"/>
+          </a:effectRef>
+          <a:fontRef idx="minor">
+            <a:schemeClr val="lt1"/>
+          </a:fontRef>
+        </p:style>
+        <p:txBody>
+          <a:bodyPr rtlCol="0" anchor="ctr"/>
+          <a:lstStyle/>
+          <a:p>
+            <a:pPr algn="ctr"/>
+          </a:p>
+        </p:txBody>
+      </p:sp>
+      <p:sp>
+        <p:nvSpPr>
+          <p:cNvPr id="14" name="TextBox 13"/>
+          <p:cNvSpPr txBox="1"/>
+          <p:nvPr/>
+        </p:nvSpPr>
+        <p:spPr>
+          <a:xfrm>
+            <a:off x="6446520" y="3566160"/>
+            <a:ext cx="411480" cy="411480"/>
+          </a:xfrm>
+          <a:prstGeom prst="rect">
+            <a:avLst/>
+          </a:prstGeom>
+          <a:noFill/>
+        </p:spPr>
+        <p:txBody>
+          <a:bodyPr wrap="square" anchor="ctr" lIns="0" rIns="0" tIns="0" bIns="0">
+            <a:spAutoFit/>
+          </a:bodyPr>
+          <a:lstStyle/>
+          <a:p>
+            <a:pPr algn="ctr"/>
+            <a:r>
+              <a:rPr sz="1400" b="1" i="0">
+                <a:solidFill>
+                  <a:srgbClr val="FFFFFF"/>
+                </a:solidFill>
+                <a:latin typeface="Calibri"/>
+              </a:rPr>
+              <a:t>✓</a:t>
+            </a:r>
+          </a:p>
+        </p:txBody>
+      </p:sp>
+      <p:sp>
+        <p:nvSpPr>
+          <p:cNvPr id="15" name="TextBox 14"/>
+          <p:cNvSpPr txBox="1"/>
+          <p:nvPr/>
+        </p:nvSpPr>
+        <p:spPr>
+          <a:xfrm>
+            <a:off x="7040880" y="3337560"/>
+            <a:ext cx="4297680" cy="868680"/>
+          </a:xfrm>
+          <a:prstGeom prst="rect">
+            <a:avLst/>
+          </a:prstGeom>
+          <a:noFill/>
+        </p:spPr>
+        <p:txBody>
+          <a:bodyPr wrap="square" anchor="ctr" lIns="0" rIns="0" tIns="0" bIns="0">
+            <a:spAutoFit/>
+          </a:bodyPr>
+          <a:lstStyle/>
+          <a:p>
+            <a:pPr algn="l"/>
+            <a:r>
+              <a:rPr sz="1450" b="1" i="0">
+                <a:solidFill>
+                  <a:srgbClr val="1D2433"/>
+                </a:solidFill>
+                <a:latin typeface="Calibri"/>
+              </a:rPr>
+              <a:t>Heat and sound</a:t>
+            </a:r>
+          </a:p>
+        </p:txBody>
+      </p:sp>
+      <p:sp>
+        <p:nvSpPr>
+          <p:cNvPr id="16" name="Rounded Rectangle 15"/>
+          <p:cNvSpPr/>
+          <p:nvPr/>
+        </p:nvSpPr>
+        <p:spPr>
+          <a:xfrm>
+            <a:off x="640080" y="4370831"/>
             <a:ext cx="5349240" cy="868680"/>
           </a:xfrm>
           <a:prstGeom prst="roundRect">
@@ -24099,20 +24245,20 @@
       </p:sp>
       <p:sp>
         <p:nvSpPr>
-          <p:cNvPr id="13" name="Oval 12"/>
+          <p:cNvPr id="17" name="Oval 16"/>
           <p:cNvSpPr/>
           <p:nvPr/>
         </p:nvSpPr>
         <p:spPr>
           <a:xfrm>
-            <a:off x="6446520" y="3566160"/>
+            <a:off x="914400" y="4599431"/>
             <a:ext cx="411480" cy="411480"/>
           </a:xfrm>
           <a:prstGeom prst="ellipse">
             <a:avLst/>
           </a:prstGeom>
           <a:solidFill>
-            <a:srgbClr val="0A9396"/>
+            <a:srgbClr val="B7C2CC"/>
           </a:solidFill>
           <a:ln>
             <a:noFill/>
@@ -24143,13 +24289,13 @@
       </p:sp>
       <p:sp>
         <p:nvSpPr>
-          <p:cNvPr id="14" name="TextBox 13"/>
-          <p:cNvSpPr txBox="1"/>
-          <p:nvPr/>
-        </p:nvSpPr>
-        <p:spPr>
-          <a:xfrm>
-            <a:off x="6446520" y="3566160"/>
+          <p:cNvPr id="18" name="TextBox 17"/>
+          <p:cNvSpPr txBox="1"/>
+          <p:nvPr/>
+        </p:nvSpPr>
+        <p:spPr>
+          <a:xfrm>
+            <a:off x="914400" y="4599431"/>
             <a:ext cx="411480" cy="411480"/>
           </a:xfrm>
           <a:prstGeom prst="rect">
@@ -24171,20 +24317,20 @@
                 </a:solidFill>
                 <a:latin typeface="Calibri"/>
               </a:rPr>
-              <a:t>B</a:t>
-            </a:r>
-          </a:p>
-        </p:txBody>
-      </p:sp>
-      <p:sp>
-        <p:nvSpPr>
-          <p:cNvPr id="15" name="TextBox 14"/>
-          <p:cNvSpPr txBox="1"/>
-          <p:nvPr/>
-        </p:nvSpPr>
-        <p:spPr>
-          <a:xfrm>
-            <a:off x="7040880" y="3337560"/>
+              <a:t>C</a:t>
+            </a:r>
+          </a:p>
+        </p:txBody>
+      </p:sp>
+      <p:sp>
+        <p:nvSpPr>
+          <p:cNvPr id="19" name="TextBox 18"/>
+          <p:cNvSpPr txBox="1"/>
+          <p:nvPr/>
+        </p:nvSpPr>
+        <p:spPr>
+          <a:xfrm>
+            <a:off x="1508760" y="4370831"/>
             <a:ext cx="4297680" cy="868680"/>
           </a:xfrm>
           <a:prstGeom prst="rect">
@@ -24202,24 +24348,24 @@
             <a:r>
               <a:rPr sz="1450" b="0" i="0">
                 <a:solidFill>
-                  <a:srgbClr val="1D2433"/>
-                </a:solidFill>
-                <a:latin typeface="Calibri"/>
-              </a:rPr>
-              <a:t>Destroyed but not created</a:t>
-            </a:r>
-          </a:p>
-        </p:txBody>
-      </p:sp>
-      <p:sp>
-        <p:nvSpPr>
-          <p:cNvPr id="16" name="Rounded Rectangle 15"/>
+                  <a:srgbClr val="6B7280"/>
+                </a:solidFill>
+                <a:latin typeface="Calibri"/>
+              </a:rPr>
+              <a:t>Light</a:t>
+            </a:r>
+          </a:p>
+        </p:txBody>
+      </p:sp>
+      <p:sp>
+        <p:nvSpPr>
+          <p:cNvPr id="20" name="Rounded Rectangle 19"/>
           <p:cNvSpPr/>
           <p:nvPr/>
         </p:nvSpPr>
         <p:spPr>
           <a:xfrm>
-            <a:off x="640080" y="4370831"/>
+            <a:off x="6172200" y="4370831"/>
             <a:ext cx="5349240" cy="868680"/>
           </a:xfrm>
           <a:prstGeom prst="roundRect">
@@ -24259,20 +24405,20 @@
       </p:sp>
       <p:sp>
         <p:nvSpPr>
-          <p:cNvPr id="17" name="Oval 16"/>
+          <p:cNvPr id="21" name="Oval 20"/>
           <p:cNvSpPr/>
           <p:nvPr/>
         </p:nvSpPr>
         <p:spPr>
           <a:xfrm>
-            <a:off x="914400" y="4599431"/>
+            <a:off x="6446520" y="4599431"/>
             <a:ext cx="411480" cy="411480"/>
           </a:xfrm>
           <a:prstGeom prst="ellipse">
             <a:avLst/>
           </a:prstGeom>
           <a:solidFill>
-            <a:srgbClr val="0A9396"/>
+            <a:srgbClr val="B7C2CC"/>
           </a:solidFill>
           <a:ln>
             <a:noFill/>
@@ -24303,13 +24449,13 @@
       </p:sp>
       <p:sp>
         <p:nvSpPr>
-          <p:cNvPr id="18" name="TextBox 17"/>
-          <p:cNvSpPr txBox="1"/>
-          <p:nvPr/>
-        </p:nvSpPr>
-        <p:spPr>
-          <a:xfrm>
-            <a:off x="914400" y="4599431"/>
+          <p:cNvPr id="22" name="TextBox 21"/>
+          <p:cNvSpPr txBox="1"/>
+          <p:nvPr/>
+        </p:nvSpPr>
+        <p:spPr>
+          <a:xfrm>
+            <a:off x="6446520" y="4599431"/>
             <a:ext cx="411480" cy="411480"/>
           </a:xfrm>
           <a:prstGeom prst="rect">
@@ -24331,20 +24477,20 @@
                 </a:solidFill>
                 <a:latin typeface="Calibri"/>
               </a:rPr>
-              <a:t>C</a:t>
-            </a:r>
-          </a:p>
-        </p:txBody>
-      </p:sp>
-      <p:sp>
-        <p:nvSpPr>
-          <p:cNvPr id="19" name="TextBox 18"/>
-          <p:cNvSpPr txBox="1"/>
-          <p:nvPr/>
-        </p:nvSpPr>
-        <p:spPr>
-          <a:xfrm>
-            <a:off x="1508760" y="4370831"/>
+              <a:t>D</a:t>
+            </a:r>
+          </a:p>
+        </p:txBody>
+      </p:sp>
+      <p:sp>
+        <p:nvSpPr>
+          <p:cNvPr id="23" name="TextBox 22"/>
+          <p:cNvSpPr txBox="1"/>
+          <p:nvPr/>
+        </p:nvSpPr>
+        <p:spPr>
+          <a:xfrm>
+            <a:off x="7040880" y="4370831"/>
             <a:ext cx="4297680" cy="868680"/>
           </a:xfrm>
           <a:prstGeom prst="rect">
@@ -24362,38 +24508,44 @@
             <a:r>
               <a:rPr sz="1450" b="0" i="0">
                 <a:solidFill>
-                  <a:srgbClr val="1D2433"/>
-                </a:solidFill>
-                <a:latin typeface="Calibri"/>
-              </a:rPr>
-              <a:t>Transformed but neither created nor destroyed</a:t>
-            </a:r>
-          </a:p>
-        </p:txBody>
-      </p:sp>
-      <p:sp>
-        <p:nvSpPr>
-          <p:cNvPr id="20" name="Rounded Rectangle 19"/>
+                  <a:srgbClr val="6B7280"/>
+                </a:solidFill>
+                <a:latin typeface="Calibri"/>
+              </a:rPr>
+              <a:t>Chemical energy</a:t>
+            </a:r>
+          </a:p>
+        </p:txBody>
+      </p:sp>
+      <p:sp>
+        <p:nvSpPr>
+          <p:cNvPr id="24" name="Rounded Rectangle 23"/>
           <p:cNvSpPr/>
           <p:nvPr/>
         </p:nvSpPr>
         <p:spPr>
           <a:xfrm>
-            <a:off x="6172200" y="4370831"/>
-            <a:ext cx="5349240" cy="868680"/>
+            <a:off x="640080" y="5440680"/>
+            <a:ext cx="10881360" cy="1097280"/>
           </a:xfrm>
           <a:prstGeom prst="roundRect">
             <a:avLst>
-              <a:gd name="adj" fmla="val 12000"/>
+              <a:gd name="adj" fmla="val 5000"/>
             </a:avLst>
           </a:prstGeom>
           <a:solidFill>
-            <a:srgbClr val="EAF1F4"/>
+            <a:srgbClr val="FFFFFF"/>
           </a:solidFill>
           <a:ln>
             <a:noFill/>
           </a:ln>
-          <a:effectLst/>
+          <a:effectLst>
+            <a:outerShdw blurRad="88900" dist="38100" dir="5400000" rotWithShape="0" algn="bl">
+              <a:srgbClr val="000000">
+                <a:alpha val="16000"/>
+              </a:srgbClr>
+            </a:outerShdw>
+          </a:effectLst>
         </p:spPr>
         <p:style>
           <a:lnRef idx="1">
@@ -24419,114 +24571,74 @@
       </p:sp>
       <p:sp>
         <p:nvSpPr>
-          <p:cNvPr id="21" name="Oval 20"/>
-          <p:cNvSpPr/>
-          <p:nvPr/>
-        </p:nvSpPr>
-        <p:spPr>
-          <a:xfrm>
-            <a:off x="6446520" y="4599431"/>
-            <a:ext cx="411480" cy="411480"/>
-          </a:xfrm>
-          <a:prstGeom prst="ellipse">
-            <a:avLst/>
-          </a:prstGeom>
-          <a:solidFill>
-            <a:srgbClr val="0A9396"/>
-          </a:solidFill>
-          <a:ln>
-            <a:noFill/>
-          </a:ln>
-          <a:effectLst/>
-        </p:spPr>
-        <p:style>
-          <a:lnRef idx="1">
-            <a:schemeClr val="accent1"/>
-          </a:lnRef>
-          <a:fillRef idx="3">
-            <a:schemeClr val="accent1"/>
-          </a:fillRef>
-          <a:effectRef idx="2">
-            <a:schemeClr val="accent1"/>
-          </a:effectRef>
-          <a:fontRef idx="minor">
-            <a:schemeClr val="lt1"/>
-          </a:fontRef>
-        </p:style>
-        <p:txBody>
-          <a:bodyPr rtlCol="0" anchor="ctr"/>
-          <a:lstStyle/>
-          <a:p>
-            <a:pPr algn="ctr"/>
-          </a:p>
-        </p:txBody>
-      </p:sp>
-      <p:sp>
-        <p:nvSpPr>
-          <p:cNvPr id="22" name="TextBox 21"/>
-          <p:cNvSpPr txBox="1"/>
-          <p:nvPr/>
-        </p:nvSpPr>
-        <p:spPr>
-          <a:xfrm>
-            <a:off x="6446520" y="4599431"/>
-            <a:ext cx="411480" cy="411480"/>
-          </a:xfrm>
-          <a:prstGeom prst="rect">
-            <a:avLst/>
-          </a:prstGeom>
-          <a:noFill/>
-        </p:spPr>
-        <p:txBody>
-          <a:bodyPr wrap="square" anchor="ctr" lIns="0" rIns="0" tIns="0" bIns="0">
-            <a:spAutoFit/>
-          </a:bodyPr>
-          <a:lstStyle/>
-          <a:p>
-            <a:pPr algn="ctr"/>
-            <a:r>
-              <a:rPr sz="1400" b="1" i="0">
-                <a:solidFill>
-                  <a:srgbClr val="FFFFFF"/>
-                </a:solidFill>
-                <a:latin typeface="Calibri"/>
-              </a:rPr>
-              <a:t>D</a:t>
-            </a:r>
-          </a:p>
-        </p:txBody>
-      </p:sp>
-      <p:sp>
-        <p:nvSpPr>
-          <p:cNvPr id="23" name="TextBox 22"/>
-          <p:cNvSpPr txBox="1"/>
-          <p:nvPr/>
-        </p:nvSpPr>
-        <p:spPr>
-          <a:xfrm>
-            <a:off x="7040880" y="4370831"/>
-            <a:ext cx="4297680" cy="868680"/>
-          </a:xfrm>
-          <a:prstGeom prst="rect">
-            <a:avLst/>
-          </a:prstGeom>
-          <a:noFill/>
-        </p:spPr>
-        <p:txBody>
-          <a:bodyPr wrap="square" anchor="ctr" lIns="0" rIns="0" tIns="0" bIns="0">
+          <p:cNvPr id="25" name="TextBox 24"/>
+          <p:cNvSpPr txBox="1"/>
+          <p:nvPr/>
+        </p:nvSpPr>
+        <p:spPr>
+          <a:xfrm>
+            <a:off x="1005840" y="5596128"/>
+            <a:ext cx="4572000" cy="320040"/>
+          </a:xfrm>
+          <a:prstGeom prst="rect">
+            <a:avLst/>
+          </a:prstGeom>
+          <a:noFill/>
+        </p:spPr>
+        <p:txBody>
+          <a:bodyPr wrap="square" anchor="t" lIns="0" rIns="0" tIns="0" bIns="0">
             <a:spAutoFit/>
           </a:bodyPr>
           <a:lstStyle/>
           <a:p>
             <a:pPr algn="l"/>
             <a:r>
+              <a:rPr sz="1300" b="1" i="0">
+                <a:solidFill>
+                  <a:srgbClr val="2A9D8F"/>
+                </a:solidFill>
+                <a:latin typeface="Arial"/>
+              </a:rPr>
+              <a:t>WHY</a:t>
+            </a:r>
+          </a:p>
+        </p:txBody>
+      </p:sp>
+      <p:sp>
+        <p:nvSpPr>
+          <p:cNvPr id="26" name="TextBox 25"/>
+          <p:cNvSpPr txBox="1"/>
+          <p:nvPr/>
+        </p:nvSpPr>
+        <p:spPr>
+          <a:xfrm>
+            <a:off x="1005840" y="5943600"/>
+            <a:ext cx="10149840" cy="548640"/>
+          </a:xfrm>
+          <a:prstGeom prst="rect">
+            <a:avLst/>
+          </a:prstGeom>
+          <a:noFill/>
+        </p:spPr>
+        <p:txBody>
+          <a:bodyPr wrap="square" anchor="t" lIns="0" rIns="0" tIns="0" bIns="0">
+            <a:spAutoFit/>
+          </a:bodyPr>
+          <a:lstStyle/>
+          <a:p>
+            <a:pPr algn="l">
+              <a:lnSpc>
+                <a:spcPct val="105000"/>
+              </a:lnSpc>
+            </a:pPr>
+            <a:r>
               <a:rPr sz="1450" b="0" i="0">
                 <a:solidFill>
                   <a:srgbClr val="1D2433"/>
                 </a:solidFill>
                 <a:latin typeface="Calibri"/>
               </a:rPr>
-              <a:t>Both created and destroyed</a:t>
+              <a:t>Energy is conserved, not destroyed. At each bounce some mechanical energy is converted into heat (from the impact) and sound, so less is left to lift the ball.</a:t>
             </a:r>
           </a:p>
         </p:txBody>
@@ -24616,7 +24728,7 @@
             <a:avLst/>
           </a:prstGeom>
           <a:solidFill>
-            <a:srgbClr val="2A9D8F"/>
+            <a:srgbClr val="0A9396"/>
           </a:solidFill>
           <a:ln>
             <a:noFill/>
@@ -24671,11 +24783,11 @@
             <a:r>
               <a:rPr sz="1300" b="1" i="0">
                 <a:solidFill>
-                  <a:srgbClr val="2A9D8F"/>
+                  <a:srgbClr val="0A9396"/>
                 </a:solidFill>
                 <a:latin typeface="Arial"/>
               </a:rPr>
-              <a:t>ANSWER REVEALED</a:t>
+              <a:t>QUIZ QUESTION</a:t>
             </a:r>
           </a:p>
         </p:txBody>
@@ -24863,7 +24975,7 @@
             <a:avLst/>
           </a:prstGeom>
           <a:solidFill>
-            <a:srgbClr val="B7C2CC"/>
+            <a:srgbClr val="0A9396"/>
           </a:solidFill>
           <a:ln>
             <a:noFill/>
@@ -24953,7 +25065,7 @@
             <a:r>
               <a:rPr sz="1450" b="0" i="0">
                 <a:solidFill>
-                  <a:srgbClr val="6B7280"/>
+                  <a:srgbClr val="1D2433"/>
                 </a:solidFill>
                 <a:latin typeface="Calibri"/>
               </a:rPr>
@@ -25023,7 +25135,7 @@
             <a:avLst/>
           </a:prstGeom>
           <a:solidFill>
-            <a:srgbClr val="B7C2CC"/>
+            <a:srgbClr val="0A9396"/>
           </a:solidFill>
           <a:ln>
             <a:noFill/>
@@ -25113,7 +25225,7 @@
             <a:r>
               <a:rPr sz="1450" b="0" i="0">
                 <a:solidFill>
-                  <a:srgbClr val="6B7280"/>
+                  <a:srgbClr val="1D2433"/>
                 </a:solidFill>
                 <a:latin typeface="Calibri"/>
               </a:rPr>
@@ -25131,168 +25243,6 @@
         <p:spPr>
           <a:xfrm>
             <a:off x="640080" y="4370831"/>
-            <a:ext cx="5349240" cy="868680"/>
-          </a:xfrm>
-          <a:prstGeom prst="roundRect">
-            <a:avLst>
-              <a:gd name="adj" fmla="val 12000"/>
-            </a:avLst>
-          </a:prstGeom>
-          <a:solidFill>
-            <a:srgbClr val="E9F5F0"/>
-          </a:solidFill>
-          <a:ln w="25400">
-            <a:solidFill>
-              <a:srgbClr val="2A9D8F"/>
-            </a:solidFill>
-          </a:ln>
-          <a:effectLst/>
-        </p:spPr>
-        <p:style>
-          <a:lnRef idx="1">
-            <a:schemeClr val="accent1"/>
-          </a:lnRef>
-          <a:fillRef idx="3">
-            <a:schemeClr val="accent1"/>
-          </a:fillRef>
-          <a:effectRef idx="2">
-            <a:schemeClr val="accent1"/>
-          </a:effectRef>
-          <a:fontRef idx="minor">
-            <a:schemeClr val="lt1"/>
-          </a:fontRef>
-        </p:style>
-        <p:txBody>
-          <a:bodyPr rtlCol="0" anchor="ctr"/>
-          <a:lstStyle/>
-          <a:p>
-            <a:pPr algn="ctr"/>
-          </a:p>
-        </p:txBody>
-      </p:sp>
-      <p:sp>
-        <p:nvSpPr>
-          <p:cNvPr id="17" name="Oval 16"/>
-          <p:cNvSpPr/>
-          <p:nvPr/>
-        </p:nvSpPr>
-        <p:spPr>
-          <a:xfrm>
-            <a:off x="914400" y="4599431"/>
-            <a:ext cx="411480" cy="411480"/>
-          </a:xfrm>
-          <a:prstGeom prst="ellipse">
-            <a:avLst/>
-          </a:prstGeom>
-          <a:solidFill>
-            <a:srgbClr val="2A9D8F"/>
-          </a:solidFill>
-          <a:ln>
-            <a:noFill/>
-          </a:ln>
-          <a:effectLst/>
-        </p:spPr>
-        <p:style>
-          <a:lnRef idx="1">
-            <a:schemeClr val="accent1"/>
-          </a:lnRef>
-          <a:fillRef idx="3">
-            <a:schemeClr val="accent1"/>
-          </a:fillRef>
-          <a:effectRef idx="2">
-            <a:schemeClr val="accent1"/>
-          </a:effectRef>
-          <a:fontRef idx="minor">
-            <a:schemeClr val="lt1"/>
-          </a:fontRef>
-        </p:style>
-        <p:txBody>
-          <a:bodyPr rtlCol="0" anchor="ctr"/>
-          <a:lstStyle/>
-          <a:p>
-            <a:pPr algn="ctr"/>
-          </a:p>
-        </p:txBody>
-      </p:sp>
-      <p:sp>
-        <p:nvSpPr>
-          <p:cNvPr id="18" name="TextBox 17"/>
-          <p:cNvSpPr txBox="1"/>
-          <p:nvPr/>
-        </p:nvSpPr>
-        <p:spPr>
-          <a:xfrm>
-            <a:off x="914400" y="4599431"/>
-            <a:ext cx="411480" cy="411480"/>
-          </a:xfrm>
-          <a:prstGeom prst="rect">
-            <a:avLst/>
-          </a:prstGeom>
-          <a:noFill/>
-        </p:spPr>
-        <p:txBody>
-          <a:bodyPr wrap="square" anchor="ctr" lIns="0" rIns="0" tIns="0" bIns="0">
-            <a:spAutoFit/>
-          </a:bodyPr>
-          <a:lstStyle/>
-          <a:p>
-            <a:pPr algn="ctr"/>
-            <a:r>
-              <a:rPr sz="1400" b="1" i="0">
-                <a:solidFill>
-                  <a:srgbClr val="FFFFFF"/>
-                </a:solidFill>
-                <a:latin typeface="Calibri"/>
-              </a:rPr>
-              <a:t>✓</a:t>
-            </a:r>
-          </a:p>
-        </p:txBody>
-      </p:sp>
-      <p:sp>
-        <p:nvSpPr>
-          <p:cNvPr id="19" name="TextBox 18"/>
-          <p:cNvSpPr txBox="1"/>
-          <p:nvPr/>
-        </p:nvSpPr>
-        <p:spPr>
-          <a:xfrm>
-            <a:off x="1508760" y="4370831"/>
-            <a:ext cx="4297680" cy="868680"/>
-          </a:xfrm>
-          <a:prstGeom prst="rect">
-            <a:avLst/>
-          </a:prstGeom>
-          <a:noFill/>
-        </p:spPr>
-        <p:txBody>
-          <a:bodyPr wrap="square" anchor="ctr" lIns="0" rIns="0" tIns="0" bIns="0">
-            <a:spAutoFit/>
-          </a:bodyPr>
-          <a:lstStyle/>
-          <a:p>
-            <a:pPr algn="l"/>
-            <a:r>
-              <a:rPr sz="1450" b="1" i="0">
-                <a:solidFill>
-                  <a:srgbClr val="1D2433"/>
-                </a:solidFill>
-                <a:latin typeface="Calibri"/>
-              </a:rPr>
-              <a:t>Transformed but neither created nor destroyed</a:t>
-            </a:r>
-          </a:p>
-        </p:txBody>
-      </p:sp>
-      <p:sp>
-        <p:nvSpPr>
-          <p:cNvPr id="20" name="Rounded Rectangle 19"/>
-          <p:cNvSpPr/>
-          <p:nvPr/>
-        </p:nvSpPr>
-        <p:spPr>
-          <a:xfrm>
-            <a:off x="6172200" y="4370831"/>
             <a:ext cx="5349240" cy="868680"/>
           </a:xfrm>
           <a:prstGeom prst="roundRect">
@@ -25332,20 +25282,20 @@
       </p:sp>
       <p:sp>
         <p:nvSpPr>
-          <p:cNvPr id="21" name="Oval 20"/>
+          <p:cNvPr id="17" name="Oval 16"/>
           <p:cNvSpPr/>
           <p:nvPr/>
         </p:nvSpPr>
         <p:spPr>
           <a:xfrm>
-            <a:off x="6446520" y="4599431"/>
+            <a:off x="914400" y="4599431"/>
             <a:ext cx="411480" cy="411480"/>
           </a:xfrm>
           <a:prstGeom prst="ellipse">
             <a:avLst/>
           </a:prstGeom>
           <a:solidFill>
-            <a:srgbClr val="B7C2CC"/>
+            <a:srgbClr val="0A9396"/>
           </a:solidFill>
           <a:ln>
             <a:noFill/>
@@ -25376,13 +25326,13 @@
       </p:sp>
       <p:sp>
         <p:nvSpPr>
-          <p:cNvPr id="22" name="TextBox 21"/>
-          <p:cNvSpPr txBox="1"/>
-          <p:nvPr/>
-        </p:nvSpPr>
-        <p:spPr>
-          <a:xfrm>
-            <a:off x="6446520" y="4599431"/>
+          <p:cNvPr id="18" name="TextBox 17"/>
+          <p:cNvSpPr txBox="1"/>
+          <p:nvPr/>
+        </p:nvSpPr>
+        <p:spPr>
+          <a:xfrm>
+            <a:off x="914400" y="4599431"/>
             <a:ext cx="411480" cy="411480"/>
           </a:xfrm>
           <a:prstGeom prst="rect">
@@ -25404,20 +25354,20 @@
                 </a:solidFill>
                 <a:latin typeface="Calibri"/>
               </a:rPr>
-              <a:t>D</a:t>
-            </a:r>
-          </a:p>
-        </p:txBody>
-      </p:sp>
-      <p:sp>
-        <p:nvSpPr>
-          <p:cNvPr id="23" name="TextBox 22"/>
-          <p:cNvSpPr txBox="1"/>
-          <p:nvPr/>
-        </p:nvSpPr>
-        <p:spPr>
-          <a:xfrm>
-            <a:off x="7040880" y="4370831"/>
+              <a:t>C</a:t>
+            </a:r>
+          </a:p>
+        </p:txBody>
+      </p:sp>
+      <p:sp>
+        <p:nvSpPr>
+          <p:cNvPr id="19" name="TextBox 18"/>
+          <p:cNvSpPr txBox="1"/>
+          <p:nvPr/>
+        </p:nvSpPr>
+        <p:spPr>
+          <a:xfrm>
+            <a:off x="1508760" y="4370831"/>
             <a:ext cx="4297680" cy="868680"/>
           </a:xfrm>
           <a:prstGeom prst="rect">
@@ -25435,44 +25385,38 @@
             <a:r>
               <a:rPr sz="1450" b="0" i="0">
                 <a:solidFill>
-                  <a:srgbClr val="6B7280"/>
-                </a:solidFill>
-                <a:latin typeface="Calibri"/>
-              </a:rPr>
-              <a:t>Both created and destroyed</a:t>
-            </a:r>
-          </a:p>
-        </p:txBody>
-      </p:sp>
-      <p:sp>
-        <p:nvSpPr>
-          <p:cNvPr id="24" name="Rounded Rectangle 23"/>
+                  <a:srgbClr val="1D2433"/>
+                </a:solidFill>
+                <a:latin typeface="Calibri"/>
+              </a:rPr>
+              <a:t>Transformed but neither created nor destroyed</a:t>
+            </a:r>
+          </a:p>
+        </p:txBody>
+      </p:sp>
+      <p:sp>
+        <p:nvSpPr>
+          <p:cNvPr id="20" name="Rounded Rectangle 19"/>
           <p:cNvSpPr/>
           <p:nvPr/>
         </p:nvSpPr>
         <p:spPr>
           <a:xfrm>
-            <a:off x="640080" y="5440680"/>
-            <a:ext cx="10881360" cy="1097280"/>
+            <a:off x="6172200" y="4370831"/>
+            <a:ext cx="5349240" cy="868680"/>
           </a:xfrm>
           <a:prstGeom prst="roundRect">
             <a:avLst>
-              <a:gd name="adj" fmla="val 5000"/>
+              <a:gd name="adj" fmla="val 12000"/>
             </a:avLst>
           </a:prstGeom>
           <a:solidFill>
-            <a:srgbClr val="FFFFFF"/>
+            <a:srgbClr val="EAF1F4"/>
           </a:solidFill>
           <a:ln>
             <a:noFill/>
           </a:ln>
-          <a:effectLst>
-            <a:outerShdw blurRad="88900" dist="38100" dir="5400000" rotWithShape="0" algn="bl">
-              <a:srgbClr val="000000">
-                <a:alpha val="16000"/>
-              </a:srgbClr>
-            </a:outerShdw>
-          </a:effectLst>
+          <a:effectLst/>
         </p:spPr>
         <p:style>
           <a:lnRef idx="1">
@@ -25498,74 +25442,114 @@
       </p:sp>
       <p:sp>
         <p:nvSpPr>
-          <p:cNvPr id="25" name="TextBox 24"/>
-          <p:cNvSpPr txBox="1"/>
-          <p:nvPr/>
-        </p:nvSpPr>
-        <p:spPr>
-          <a:xfrm>
-            <a:off x="1005840" y="5596128"/>
-            <a:ext cx="4572000" cy="320040"/>
-          </a:xfrm>
-          <a:prstGeom prst="rect">
-            <a:avLst/>
-          </a:prstGeom>
-          <a:noFill/>
-        </p:spPr>
-        <p:txBody>
-          <a:bodyPr wrap="square" anchor="t" lIns="0" rIns="0" tIns="0" bIns="0">
+          <p:cNvPr id="21" name="Oval 20"/>
+          <p:cNvSpPr/>
+          <p:nvPr/>
+        </p:nvSpPr>
+        <p:spPr>
+          <a:xfrm>
+            <a:off x="6446520" y="4599431"/>
+            <a:ext cx="411480" cy="411480"/>
+          </a:xfrm>
+          <a:prstGeom prst="ellipse">
+            <a:avLst/>
+          </a:prstGeom>
+          <a:solidFill>
+            <a:srgbClr val="0A9396"/>
+          </a:solidFill>
+          <a:ln>
+            <a:noFill/>
+          </a:ln>
+          <a:effectLst/>
+        </p:spPr>
+        <p:style>
+          <a:lnRef idx="1">
+            <a:schemeClr val="accent1"/>
+          </a:lnRef>
+          <a:fillRef idx="3">
+            <a:schemeClr val="accent1"/>
+          </a:fillRef>
+          <a:effectRef idx="2">
+            <a:schemeClr val="accent1"/>
+          </a:effectRef>
+          <a:fontRef idx="minor">
+            <a:schemeClr val="lt1"/>
+          </a:fontRef>
+        </p:style>
+        <p:txBody>
+          <a:bodyPr rtlCol="0" anchor="ctr"/>
+          <a:lstStyle/>
+          <a:p>
+            <a:pPr algn="ctr"/>
+          </a:p>
+        </p:txBody>
+      </p:sp>
+      <p:sp>
+        <p:nvSpPr>
+          <p:cNvPr id="22" name="TextBox 21"/>
+          <p:cNvSpPr txBox="1"/>
+          <p:nvPr/>
+        </p:nvSpPr>
+        <p:spPr>
+          <a:xfrm>
+            <a:off x="6446520" y="4599431"/>
+            <a:ext cx="411480" cy="411480"/>
+          </a:xfrm>
+          <a:prstGeom prst="rect">
+            <a:avLst/>
+          </a:prstGeom>
+          <a:noFill/>
+        </p:spPr>
+        <p:txBody>
+          <a:bodyPr wrap="square" anchor="ctr" lIns="0" rIns="0" tIns="0" bIns="0">
+            <a:spAutoFit/>
+          </a:bodyPr>
+          <a:lstStyle/>
+          <a:p>
+            <a:pPr algn="ctr"/>
+            <a:r>
+              <a:rPr sz="1400" b="1" i="0">
+                <a:solidFill>
+                  <a:srgbClr val="FFFFFF"/>
+                </a:solidFill>
+                <a:latin typeface="Calibri"/>
+              </a:rPr>
+              <a:t>D</a:t>
+            </a:r>
+          </a:p>
+        </p:txBody>
+      </p:sp>
+      <p:sp>
+        <p:nvSpPr>
+          <p:cNvPr id="23" name="TextBox 22"/>
+          <p:cNvSpPr txBox="1"/>
+          <p:nvPr/>
+        </p:nvSpPr>
+        <p:spPr>
+          <a:xfrm>
+            <a:off x="7040880" y="4370831"/>
+            <a:ext cx="4297680" cy="868680"/>
+          </a:xfrm>
+          <a:prstGeom prst="rect">
+            <a:avLst/>
+          </a:prstGeom>
+          <a:noFill/>
+        </p:spPr>
+        <p:txBody>
+          <a:bodyPr wrap="square" anchor="ctr" lIns="0" rIns="0" tIns="0" bIns="0">
             <a:spAutoFit/>
           </a:bodyPr>
           <a:lstStyle/>
           <a:p>
             <a:pPr algn="l"/>
             <a:r>
-              <a:rPr sz="1300" b="1" i="0">
-                <a:solidFill>
-                  <a:srgbClr val="2A9D8F"/>
-                </a:solidFill>
-                <a:latin typeface="Arial"/>
-              </a:rPr>
-              <a:t>WHY</a:t>
-            </a:r>
-          </a:p>
-        </p:txBody>
-      </p:sp>
-      <p:sp>
-        <p:nvSpPr>
-          <p:cNvPr id="26" name="TextBox 25"/>
-          <p:cNvSpPr txBox="1"/>
-          <p:nvPr/>
-        </p:nvSpPr>
-        <p:spPr>
-          <a:xfrm>
-            <a:off x="1005840" y="5943600"/>
-            <a:ext cx="10149840" cy="548640"/>
-          </a:xfrm>
-          <a:prstGeom prst="rect">
-            <a:avLst/>
-          </a:prstGeom>
-          <a:noFill/>
-        </p:spPr>
-        <p:txBody>
-          <a:bodyPr wrap="square" anchor="t" lIns="0" rIns="0" tIns="0" bIns="0">
-            <a:spAutoFit/>
-          </a:bodyPr>
-          <a:lstStyle/>
-          <a:p>
-            <a:pPr algn="l">
-              <a:lnSpc>
-                <a:spcPct val="105000"/>
-              </a:lnSpc>
-            </a:pPr>
-            <a:r>
               <a:rPr sz="1450" b="0" i="0">
                 <a:solidFill>
                   <a:srgbClr val="1D2433"/>
                 </a:solidFill>
                 <a:latin typeface="Calibri"/>
               </a:rPr>
-              <a:t>Energy only changes form. The total amount in a closed system stays constant — it is never made from nothing or lost to nothing.</a:t>
+              <a:t>Both created and destroyed</a:t>
             </a:r>
           </a:p>
         </p:txBody>
@@ -25655,7 +25639,7 @@
             <a:avLst/>
           </a:prstGeom>
           <a:solidFill>
-            <a:srgbClr val="0A9396"/>
+            <a:srgbClr val="2A9D8F"/>
           </a:solidFill>
           <a:ln>
             <a:noFill/>
@@ -25710,11 +25694,11 @@
             <a:r>
               <a:rPr sz="1300" b="1" i="0">
                 <a:solidFill>
-                  <a:srgbClr val="0A9396"/>
+                  <a:srgbClr val="2A9D8F"/>
                 </a:solidFill>
                 <a:latin typeface="Arial"/>
               </a:rPr>
-              <a:t>QUIZ QUESTION</a:t>
+              <a:t>ANSWER REVEALED</a:t>
             </a:r>
           </a:p>
         </p:txBody>
@@ -25749,7 +25733,7 @@
                 </a:solidFill>
                 <a:latin typeface="Calibri"/>
               </a:rPr>
-              <a:t>Q5 — In a Torch</a:t>
+              <a:t>Q4 — Conservation Law</a:t>
             </a:r>
           </a:p>
         </p:txBody>
@@ -25836,7 +25820,7 @@
                 </a:solidFill>
                 <a:latin typeface="Calibri"/>
               </a:rPr>
-              <a:t>The sequence of energy changes in a working torch is:</a:t>
+              <a:t>The law of conservation of energy states that energy can be:</a:t>
             </a:r>
           </a:p>
         </p:txBody>
@@ -25902,7 +25886,7 @@
             <a:avLst/>
           </a:prstGeom>
           <a:solidFill>
-            <a:srgbClr val="0A9396"/>
+            <a:srgbClr val="B7C2CC"/>
           </a:solidFill>
           <a:ln>
             <a:noFill/>
@@ -25992,11 +25976,11 @@
             <a:r>
               <a:rPr sz="1450" b="0" i="0">
                 <a:solidFill>
-                  <a:srgbClr val="1D2433"/>
-                </a:solidFill>
-                <a:latin typeface="Calibri"/>
-              </a:rPr>
-              <a:t>Light → electrical → chemical</a:t>
+                  <a:srgbClr val="6B7280"/>
+                </a:solidFill>
+                <a:latin typeface="Calibri"/>
+              </a:rPr>
+              <a:t>Created but not destroyed</a:t>
             </a:r>
           </a:p>
         </p:txBody>
@@ -26062,7 +26046,7 @@
             <a:avLst/>
           </a:prstGeom>
           <a:solidFill>
-            <a:srgbClr val="0A9396"/>
+            <a:srgbClr val="B7C2CC"/>
           </a:solidFill>
           <a:ln>
             <a:noFill/>
@@ -26152,11 +26136,11 @@
             <a:r>
               <a:rPr sz="1450" b="0" i="0">
                 <a:solidFill>
-                  <a:srgbClr val="1D2433"/>
-                </a:solidFill>
-                <a:latin typeface="Calibri"/>
-              </a:rPr>
-              <a:t>Chemical → electrical → light and heat</a:t>
+                  <a:srgbClr val="6B7280"/>
+                </a:solidFill>
+                <a:latin typeface="Calibri"/>
+              </a:rPr>
+              <a:t>Destroyed but not created</a:t>
             </a:r>
           </a:p>
         </p:txBody>
@@ -26170,6 +26154,168 @@
         <p:spPr>
           <a:xfrm>
             <a:off x="640080" y="4370831"/>
+            <a:ext cx="5349240" cy="868680"/>
+          </a:xfrm>
+          <a:prstGeom prst="roundRect">
+            <a:avLst>
+              <a:gd name="adj" fmla="val 12000"/>
+            </a:avLst>
+          </a:prstGeom>
+          <a:solidFill>
+            <a:srgbClr val="E9F5F0"/>
+          </a:solidFill>
+          <a:ln w="25400">
+            <a:solidFill>
+              <a:srgbClr val="2A9D8F"/>
+            </a:solidFill>
+          </a:ln>
+          <a:effectLst/>
+        </p:spPr>
+        <p:style>
+          <a:lnRef idx="1">
+            <a:schemeClr val="accent1"/>
+          </a:lnRef>
+          <a:fillRef idx="3">
+            <a:schemeClr val="accent1"/>
+          </a:fillRef>
+          <a:effectRef idx="2">
+            <a:schemeClr val="accent1"/>
+          </a:effectRef>
+          <a:fontRef idx="minor">
+            <a:schemeClr val="lt1"/>
+          </a:fontRef>
+        </p:style>
+        <p:txBody>
+          <a:bodyPr rtlCol="0" anchor="ctr"/>
+          <a:lstStyle/>
+          <a:p>
+            <a:pPr algn="ctr"/>
+          </a:p>
+        </p:txBody>
+      </p:sp>
+      <p:sp>
+        <p:nvSpPr>
+          <p:cNvPr id="17" name="Oval 16"/>
+          <p:cNvSpPr/>
+          <p:nvPr/>
+        </p:nvSpPr>
+        <p:spPr>
+          <a:xfrm>
+            <a:off x="914400" y="4599431"/>
+            <a:ext cx="411480" cy="411480"/>
+          </a:xfrm>
+          <a:prstGeom prst="ellipse">
+            <a:avLst/>
+          </a:prstGeom>
+          <a:solidFill>
+            <a:srgbClr val="2A9D8F"/>
+          </a:solidFill>
+          <a:ln>
+            <a:noFill/>
+          </a:ln>
+          <a:effectLst/>
+        </p:spPr>
+        <p:style>
+          <a:lnRef idx="1">
+            <a:schemeClr val="accent1"/>
+          </a:lnRef>
+          <a:fillRef idx="3">
+            <a:schemeClr val="accent1"/>
+          </a:fillRef>
+          <a:effectRef idx="2">
+            <a:schemeClr val="accent1"/>
+          </a:effectRef>
+          <a:fontRef idx="minor">
+            <a:schemeClr val="lt1"/>
+          </a:fontRef>
+        </p:style>
+        <p:txBody>
+          <a:bodyPr rtlCol="0" anchor="ctr"/>
+          <a:lstStyle/>
+          <a:p>
+            <a:pPr algn="ctr"/>
+          </a:p>
+        </p:txBody>
+      </p:sp>
+      <p:sp>
+        <p:nvSpPr>
+          <p:cNvPr id="18" name="TextBox 17"/>
+          <p:cNvSpPr txBox="1"/>
+          <p:nvPr/>
+        </p:nvSpPr>
+        <p:spPr>
+          <a:xfrm>
+            <a:off x="914400" y="4599431"/>
+            <a:ext cx="411480" cy="411480"/>
+          </a:xfrm>
+          <a:prstGeom prst="rect">
+            <a:avLst/>
+          </a:prstGeom>
+          <a:noFill/>
+        </p:spPr>
+        <p:txBody>
+          <a:bodyPr wrap="square" anchor="ctr" lIns="0" rIns="0" tIns="0" bIns="0">
+            <a:spAutoFit/>
+          </a:bodyPr>
+          <a:lstStyle/>
+          <a:p>
+            <a:pPr algn="ctr"/>
+            <a:r>
+              <a:rPr sz="1400" b="1" i="0">
+                <a:solidFill>
+                  <a:srgbClr val="FFFFFF"/>
+                </a:solidFill>
+                <a:latin typeface="Calibri"/>
+              </a:rPr>
+              <a:t>✓</a:t>
+            </a:r>
+          </a:p>
+        </p:txBody>
+      </p:sp>
+      <p:sp>
+        <p:nvSpPr>
+          <p:cNvPr id="19" name="TextBox 18"/>
+          <p:cNvSpPr txBox="1"/>
+          <p:nvPr/>
+        </p:nvSpPr>
+        <p:spPr>
+          <a:xfrm>
+            <a:off x="1508760" y="4370831"/>
+            <a:ext cx="4297680" cy="868680"/>
+          </a:xfrm>
+          <a:prstGeom prst="rect">
+            <a:avLst/>
+          </a:prstGeom>
+          <a:noFill/>
+        </p:spPr>
+        <p:txBody>
+          <a:bodyPr wrap="square" anchor="ctr" lIns="0" rIns="0" tIns="0" bIns="0">
+            <a:spAutoFit/>
+          </a:bodyPr>
+          <a:lstStyle/>
+          <a:p>
+            <a:pPr algn="l"/>
+            <a:r>
+              <a:rPr sz="1450" b="1" i="0">
+                <a:solidFill>
+                  <a:srgbClr val="1D2433"/>
+                </a:solidFill>
+                <a:latin typeface="Calibri"/>
+              </a:rPr>
+              <a:t>Transformed but neither created nor destroyed</a:t>
+            </a:r>
+          </a:p>
+        </p:txBody>
+      </p:sp>
+      <p:sp>
+        <p:nvSpPr>
+          <p:cNvPr id="20" name="Rounded Rectangle 19"/>
+          <p:cNvSpPr/>
+          <p:nvPr/>
+        </p:nvSpPr>
+        <p:spPr>
+          <a:xfrm>
+            <a:off x="6172200" y="4370831"/>
             <a:ext cx="5349240" cy="868680"/>
           </a:xfrm>
           <a:prstGeom prst="roundRect">
@@ -26209,20 +26355,20 @@
       </p:sp>
       <p:sp>
         <p:nvSpPr>
-          <p:cNvPr id="17" name="Oval 16"/>
+          <p:cNvPr id="21" name="Oval 20"/>
           <p:cNvSpPr/>
           <p:nvPr/>
         </p:nvSpPr>
         <p:spPr>
           <a:xfrm>
-            <a:off x="914400" y="4599431"/>
+            <a:off x="6446520" y="4599431"/>
             <a:ext cx="411480" cy="411480"/>
           </a:xfrm>
           <a:prstGeom prst="ellipse">
             <a:avLst/>
           </a:prstGeom>
           <a:solidFill>
-            <a:srgbClr val="0A9396"/>
+            <a:srgbClr val="B7C2CC"/>
           </a:solidFill>
           <a:ln>
             <a:noFill/>
@@ -26253,13 +26399,13 @@
       </p:sp>
       <p:sp>
         <p:nvSpPr>
-          <p:cNvPr id="18" name="TextBox 17"/>
-          <p:cNvSpPr txBox="1"/>
-          <p:nvPr/>
-        </p:nvSpPr>
-        <p:spPr>
-          <a:xfrm>
-            <a:off x="914400" y="4599431"/>
+          <p:cNvPr id="22" name="TextBox 21"/>
+          <p:cNvSpPr txBox="1"/>
+          <p:nvPr/>
+        </p:nvSpPr>
+        <p:spPr>
+          <a:xfrm>
+            <a:off x="6446520" y="4599431"/>
             <a:ext cx="411480" cy="411480"/>
           </a:xfrm>
           <a:prstGeom prst="rect">
@@ -26281,20 +26427,20 @@
                 </a:solidFill>
                 <a:latin typeface="Calibri"/>
               </a:rPr>
-              <a:t>C</a:t>
-            </a:r>
-          </a:p>
-        </p:txBody>
-      </p:sp>
-      <p:sp>
-        <p:nvSpPr>
-          <p:cNvPr id="19" name="TextBox 18"/>
-          <p:cNvSpPr txBox="1"/>
-          <p:nvPr/>
-        </p:nvSpPr>
-        <p:spPr>
-          <a:xfrm>
-            <a:off x="1508760" y="4370831"/>
+              <a:t>D</a:t>
+            </a:r>
+          </a:p>
+        </p:txBody>
+      </p:sp>
+      <p:sp>
+        <p:nvSpPr>
+          <p:cNvPr id="23" name="TextBox 22"/>
+          <p:cNvSpPr txBox="1"/>
+          <p:nvPr/>
+        </p:nvSpPr>
+        <p:spPr>
+          <a:xfrm>
+            <a:off x="7040880" y="4370831"/>
             <a:ext cx="4297680" cy="868680"/>
           </a:xfrm>
           <a:prstGeom prst="rect">
@@ -26312,38 +26458,44 @@
             <a:r>
               <a:rPr sz="1450" b="0" i="0">
                 <a:solidFill>
-                  <a:srgbClr val="1D2433"/>
-                </a:solidFill>
-                <a:latin typeface="Calibri"/>
-              </a:rPr>
-              <a:t>Electrical → chemical → sound</a:t>
-            </a:r>
-          </a:p>
-        </p:txBody>
-      </p:sp>
-      <p:sp>
-        <p:nvSpPr>
-          <p:cNvPr id="20" name="Rounded Rectangle 19"/>
+                  <a:srgbClr val="6B7280"/>
+                </a:solidFill>
+                <a:latin typeface="Calibri"/>
+              </a:rPr>
+              <a:t>Both created and destroyed</a:t>
+            </a:r>
+          </a:p>
+        </p:txBody>
+      </p:sp>
+      <p:sp>
+        <p:nvSpPr>
+          <p:cNvPr id="24" name="Rounded Rectangle 23"/>
           <p:cNvSpPr/>
           <p:nvPr/>
         </p:nvSpPr>
         <p:spPr>
           <a:xfrm>
-            <a:off x="6172200" y="4370831"/>
-            <a:ext cx="5349240" cy="868680"/>
+            <a:off x="640080" y="5440680"/>
+            <a:ext cx="10881360" cy="1097280"/>
           </a:xfrm>
           <a:prstGeom prst="roundRect">
             <a:avLst>
-              <a:gd name="adj" fmla="val 12000"/>
+              <a:gd name="adj" fmla="val 5000"/>
             </a:avLst>
           </a:prstGeom>
           <a:solidFill>
-            <a:srgbClr val="EAF1F4"/>
+            <a:srgbClr val="FFFFFF"/>
           </a:solidFill>
           <a:ln>
             <a:noFill/>
           </a:ln>
-          <a:effectLst/>
+          <a:effectLst>
+            <a:outerShdw blurRad="88900" dist="38100" dir="5400000" rotWithShape="0" algn="bl">
+              <a:srgbClr val="000000">
+                <a:alpha val="16000"/>
+              </a:srgbClr>
+            </a:outerShdw>
+          </a:effectLst>
         </p:spPr>
         <p:style>
           <a:lnRef idx="1">
@@ -26369,114 +26521,74 @@
       </p:sp>
       <p:sp>
         <p:nvSpPr>
-          <p:cNvPr id="21" name="Oval 20"/>
-          <p:cNvSpPr/>
-          <p:nvPr/>
-        </p:nvSpPr>
-        <p:spPr>
-          <a:xfrm>
-            <a:off x="6446520" y="4599431"/>
-            <a:ext cx="411480" cy="411480"/>
-          </a:xfrm>
-          <a:prstGeom prst="ellipse">
-            <a:avLst/>
-          </a:prstGeom>
-          <a:solidFill>
-            <a:srgbClr val="0A9396"/>
-          </a:solidFill>
-          <a:ln>
-            <a:noFill/>
-          </a:ln>
-          <a:effectLst/>
-        </p:spPr>
-        <p:style>
-          <a:lnRef idx="1">
-            <a:schemeClr val="accent1"/>
-          </a:lnRef>
-          <a:fillRef idx="3">
-            <a:schemeClr val="accent1"/>
-          </a:fillRef>
-          <a:effectRef idx="2">
-            <a:schemeClr val="accent1"/>
-          </a:effectRef>
-          <a:fontRef idx="minor">
-            <a:schemeClr val="lt1"/>
-          </a:fontRef>
-        </p:style>
-        <p:txBody>
-          <a:bodyPr rtlCol="0" anchor="ctr"/>
-          <a:lstStyle/>
-          <a:p>
-            <a:pPr algn="ctr"/>
-          </a:p>
-        </p:txBody>
-      </p:sp>
-      <p:sp>
-        <p:nvSpPr>
-          <p:cNvPr id="22" name="TextBox 21"/>
-          <p:cNvSpPr txBox="1"/>
-          <p:nvPr/>
-        </p:nvSpPr>
-        <p:spPr>
-          <a:xfrm>
-            <a:off x="6446520" y="4599431"/>
-            <a:ext cx="411480" cy="411480"/>
-          </a:xfrm>
-          <a:prstGeom prst="rect">
-            <a:avLst/>
-          </a:prstGeom>
-          <a:noFill/>
-        </p:spPr>
-        <p:txBody>
-          <a:bodyPr wrap="square" anchor="ctr" lIns="0" rIns="0" tIns="0" bIns="0">
-            <a:spAutoFit/>
-          </a:bodyPr>
-          <a:lstStyle/>
-          <a:p>
-            <a:pPr algn="ctr"/>
-            <a:r>
-              <a:rPr sz="1400" b="1" i="0">
-                <a:solidFill>
-                  <a:srgbClr val="FFFFFF"/>
-                </a:solidFill>
-                <a:latin typeface="Calibri"/>
-              </a:rPr>
-              <a:t>D</a:t>
-            </a:r>
-          </a:p>
-        </p:txBody>
-      </p:sp>
-      <p:sp>
-        <p:nvSpPr>
-          <p:cNvPr id="23" name="TextBox 22"/>
-          <p:cNvSpPr txBox="1"/>
-          <p:nvPr/>
-        </p:nvSpPr>
-        <p:spPr>
-          <a:xfrm>
-            <a:off x="7040880" y="4370831"/>
-            <a:ext cx="4297680" cy="868680"/>
-          </a:xfrm>
-          <a:prstGeom prst="rect">
-            <a:avLst/>
-          </a:prstGeom>
-          <a:noFill/>
-        </p:spPr>
-        <p:txBody>
-          <a:bodyPr wrap="square" anchor="ctr" lIns="0" rIns="0" tIns="0" bIns="0">
+          <p:cNvPr id="25" name="TextBox 24"/>
+          <p:cNvSpPr txBox="1"/>
+          <p:nvPr/>
+        </p:nvSpPr>
+        <p:spPr>
+          <a:xfrm>
+            <a:off x="1005840" y="5596128"/>
+            <a:ext cx="4572000" cy="320040"/>
+          </a:xfrm>
+          <a:prstGeom prst="rect">
+            <a:avLst/>
+          </a:prstGeom>
+          <a:noFill/>
+        </p:spPr>
+        <p:txBody>
+          <a:bodyPr wrap="square" anchor="t" lIns="0" rIns="0" tIns="0" bIns="0">
             <a:spAutoFit/>
           </a:bodyPr>
           <a:lstStyle/>
           <a:p>
             <a:pPr algn="l"/>
             <a:r>
+              <a:rPr sz="1300" b="1" i="0">
+                <a:solidFill>
+                  <a:srgbClr val="2A9D8F"/>
+                </a:solidFill>
+                <a:latin typeface="Arial"/>
+              </a:rPr>
+              <a:t>WHY</a:t>
+            </a:r>
+          </a:p>
+        </p:txBody>
+      </p:sp>
+      <p:sp>
+        <p:nvSpPr>
+          <p:cNvPr id="26" name="TextBox 25"/>
+          <p:cNvSpPr txBox="1"/>
+          <p:nvPr/>
+        </p:nvSpPr>
+        <p:spPr>
+          <a:xfrm>
+            <a:off x="1005840" y="5943600"/>
+            <a:ext cx="10149840" cy="548640"/>
+          </a:xfrm>
+          <a:prstGeom prst="rect">
+            <a:avLst/>
+          </a:prstGeom>
+          <a:noFill/>
+        </p:spPr>
+        <p:txBody>
+          <a:bodyPr wrap="square" anchor="t" lIns="0" rIns="0" tIns="0" bIns="0">
+            <a:spAutoFit/>
+          </a:bodyPr>
+          <a:lstStyle/>
+          <a:p>
+            <a:pPr algn="l">
+              <a:lnSpc>
+                <a:spcPct val="105000"/>
+              </a:lnSpc>
+            </a:pPr>
+            <a:r>
               <a:rPr sz="1450" b="0" i="0">
                 <a:solidFill>
                   <a:srgbClr val="1D2433"/>
                 </a:solidFill>
                 <a:latin typeface="Calibri"/>
               </a:rPr>
-              <a:t>Heat → light → chemical</a:t>
+              <a:t>Energy only changes form. The total amount in a closed system stays constant — it is never made from nothing or lost to nothing.</a:t>
             </a:r>
           </a:p>
         </p:txBody>
@@ -26566,7 +26678,7 @@
             <a:avLst/>
           </a:prstGeom>
           <a:solidFill>
-            <a:srgbClr val="2A9D8F"/>
+            <a:srgbClr val="0A9396"/>
           </a:solidFill>
           <a:ln>
             <a:noFill/>
@@ -26621,11 +26733,11 @@
             <a:r>
               <a:rPr sz="1300" b="1" i="0">
                 <a:solidFill>
-                  <a:srgbClr val="2A9D8F"/>
+                  <a:srgbClr val="0A9396"/>
                 </a:solidFill>
                 <a:latin typeface="Arial"/>
               </a:rPr>
-              <a:t>ANSWER REVEALED</a:t>
+              <a:t>QUIZ QUESTION</a:t>
             </a:r>
           </a:p>
         </p:txBody>
@@ -26813,7 +26925,7 @@
             <a:avLst/>
           </a:prstGeom>
           <a:solidFill>
-            <a:srgbClr val="B7C2CC"/>
+            <a:srgbClr val="0A9396"/>
           </a:solidFill>
           <a:ln>
             <a:noFill/>
@@ -26903,7 +27015,7 @@
             <a:r>
               <a:rPr sz="1450" b="0" i="0">
                 <a:solidFill>
-                  <a:srgbClr val="6B7280"/>
+                  <a:srgbClr val="1D2433"/>
                 </a:solidFill>
                 <a:latin typeface="Calibri"/>
               </a:rPr>
@@ -26929,12 +27041,10 @@
             </a:avLst>
           </a:prstGeom>
           <a:solidFill>
-            <a:srgbClr val="E9F5F0"/>
+            <a:srgbClr val="EAF1F4"/>
           </a:solidFill>
-          <a:ln w="25400">
-            <a:solidFill>
-              <a:srgbClr val="2A9D8F"/>
-            </a:solidFill>
+          <a:ln>
+            <a:noFill/>
           </a:ln>
           <a:effectLst/>
         </p:spPr>
@@ -26972,6 +27082,510 @@
             <a:ext cx="411480" cy="411480"/>
           </a:xfrm>
           <a:prstGeom prst="ellipse">
+            <a:avLst/>
+          </a:prstGeom>
+          <a:solidFill>
+            <a:srgbClr val="0A9396"/>
+          </a:solidFill>
+          <a:ln>
+            <a:noFill/>
+          </a:ln>
+          <a:effectLst/>
+        </p:spPr>
+        <p:style>
+          <a:lnRef idx="1">
+            <a:schemeClr val="accent1"/>
+          </a:lnRef>
+          <a:fillRef idx="3">
+            <a:schemeClr val="accent1"/>
+          </a:fillRef>
+          <a:effectRef idx="2">
+            <a:schemeClr val="accent1"/>
+          </a:effectRef>
+          <a:fontRef idx="minor">
+            <a:schemeClr val="lt1"/>
+          </a:fontRef>
+        </p:style>
+        <p:txBody>
+          <a:bodyPr rtlCol="0" anchor="ctr"/>
+          <a:lstStyle/>
+          <a:p>
+            <a:pPr algn="ctr"/>
+          </a:p>
+        </p:txBody>
+      </p:sp>
+      <p:sp>
+        <p:nvSpPr>
+          <p:cNvPr id="14" name="TextBox 13"/>
+          <p:cNvSpPr txBox="1"/>
+          <p:nvPr/>
+        </p:nvSpPr>
+        <p:spPr>
+          <a:xfrm>
+            <a:off x="6446520" y="3566160"/>
+            <a:ext cx="411480" cy="411480"/>
+          </a:xfrm>
+          <a:prstGeom prst="rect">
+            <a:avLst/>
+          </a:prstGeom>
+          <a:noFill/>
+        </p:spPr>
+        <p:txBody>
+          <a:bodyPr wrap="square" anchor="ctr" lIns="0" rIns="0" tIns="0" bIns="0">
+            <a:spAutoFit/>
+          </a:bodyPr>
+          <a:lstStyle/>
+          <a:p>
+            <a:pPr algn="ctr"/>
+            <a:r>
+              <a:rPr sz="1400" b="1" i="0">
+                <a:solidFill>
+                  <a:srgbClr val="FFFFFF"/>
+                </a:solidFill>
+                <a:latin typeface="Calibri"/>
+              </a:rPr>
+              <a:t>B</a:t>
+            </a:r>
+          </a:p>
+        </p:txBody>
+      </p:sp>
+      <p:sp>
+        <p:nvSpPr>
+          <p:cNvPr id="15" name="TextBox 14"/>
+          <p:cNvSpPr txBox="1"/>
+          <p:nvPr/>
+        </p:nvSpPr>
+        <p:spPr>
+          <a:xfrm>
+            <a:off x="7040880" y="3337560"/>
+            <a:ext cx="4297680" cy="868680"/>
+          </a:xfrm>
+          <a:prstGeom prst="rect">
+            <a:avLst/>
+          </a:prstGeom>
+          <a:noFill/>
+        </p:spPr>
+        <p:txBody>
+          <a:bodyPr wrap="square" anchor="ctr" lIns="0" rIns="0" tIns="0" bIns="0">
+            <a:spAutoFit/>
+          </a:bodyPr>
+          <a:lstStyle/>
+          <a:p>
+            <a:pPr algn="l"/>
+            <a:r>
+              <a:rPr sz="1450" b="0" i="0">
+                <a:solidFill>
+                  <a:srgbClr val="1D2433"/>
+                </a:solidFill>
+                <a:latin typeface="Calibri"/>
+              </a:rPr>
+              <a:t>Chemical → electrical → light and heat</a:t>
+            </a:r>
+          </a:p>
+        </p:txBody>
+      </p:sp>
+      <p:sp>
+        <p:nvSpPr>
+          <p:cNvPr id="16" name="Rounded Rectangle 15"/>
+          <p:cNvSpPr/>
+          <p:nvPr/>
+        </p:nvSpPr>
+        <p:spPr>
+          <a:xfrm>
+            <a:off x="640080" y="4370831"/>
+            <a:ext cx="5349240" cy="868680"/>
+          </a:xfrm>
+          <a:prstGeom prst="roundRect">
+            <a:avLst>
+              <a:gd name="adj" fmla="val 12000"/>
+            </a:avLst>
+          </a:prstGeom>
+          <a:solidFill>
+            <a:srgbClr val="EAF1F4"/>
+          </a:solidFill>
+          <a:ln>
+            <a:noFill/>
+          </a:ln>
+          <a:effectLst/>
+        </p:spPr>
+        <p:style>
+          <a:lnRef idx="1">
+            <a:schemeClr val="accent1"/>
+          </a:lnRef>
+          <a:fillRef idx="3">
+            <a:schemeClr val="accent1"/>
+          </a:fillRef>
+          <a:effectRef idx="2">
+            <a:schemeClr val="accent1"/>
+          </a:effectRef>
+          <a:fontRef idx="minor">
+            <a:schemeClr val="lt1"/>
+          </a:fontRef>
+        </p:style>
+        <p:txBody>
+          <a:bodyPr rtlCol="0" anchor="ctr"/>
+          <a:lstStyle/>
+          <a:p>
+            <a:pPr algn="ctr"/>
+          </a:p>
+        </p:txBody>
+      </p:sp>
+      <p:sp>
+        <p:nvSpPr>
+          <p:cNvPr id="17" name="Oval 16"/>
+          <p:cNvSpPr/>
+          <p:nvPr/>
+        </p:nvSpPr>
+        <p:spPr>
+          <a:xfrm>
+            <a:off x="914400" y="4599431"/>
+            <a:ext cx="411480" cy="411480"/>
+          </a:xfrm>
+          <a:prstGeom prst="ellipse">
+            <a:avLst/>
+          </a:prstGeom>
+          <a:solidFill>
+            <a:srgbClr val="0A9396"/>
+          </a:solidFill>
+          <a:ln>
+            <a:noFill/>
+          </a:ln>
+          <a:effectLst/>
+        </p:spPr>
+        <p:style>
+          <a:lnRef idx="1">
+            <a:schemeClr val="accent1"/>
+          </a:lnRef>
+          <a:fillRef idx="3">
+            <a:schemeClr val="accent1"/>
+          </a:fillRef>
+          <a:effectRef idx="2">
+            <a:schemeClr val="accent1"/>
+          </a:effectRef>
+          <a:fontRef idx="minor">
+            <a:schemeClr val="lt1"/>
+          </a:fontRef>
+        </p:style>
+        <p:txBody>
+          <a:bodyPr rtlCol="0" anchor="ctr"/>
+          <a:lstStyle/>
+          <a:p>
+            <a:pPr algn="ctr"/>
+          </a:p>
+        </p:txBody>
+      </p:sp>
+      <p:sp>
+        <p:nvSpPr>
+          <p:cNvPr id="18" name="TextBox 17"/>
+          <p:cNvSpPr txBox="1"/>
+          <p:nvPr/>
+        </p:nvSpPr>
+        <p:spPr>
+          <a:xfrm>
+            <a:off x="914400" y="4599431"/>
+            <a:ext cx="411480" cy="411480"/>
+          </a:xfrm>
+          <a:prstGeom prst="rect">
+            <a:avLst/>
+          </a:prstGeom>
+          <a:noFill/>
+        </p:spPr>
+        <p:txBody>
+          <a:bodyPr wrap="square" anchor="ctr" lIns="0" rIns="0" tIns="0" bIns="0">
+            <a:spAutoFit/>
+          </a:bodyPr>
+          <a:lstStyle/>
+          <a:p>
+            <a:pPr algn="ctr"/>
+            <a:r>
+              <a:rPr sz="1400" b="1" i="0">
+                <a:solidFill>
+                  <a:srgbClr val="FFFFFF"/>
+                </a:solidFill>
+                <a:latin typeface="Calibri"/>
+              </a:rPr>
+              <a:t>C</a:t>
+            </a:r>
+          </a:p>
+        </p:txBody>
+      </p:sp>
+      <p:sp>
+        <p:nvSpPr>
+          <p:cNvPr id="19" name="TextBox 18"/>
+          <p:cNvSpPr txBox="1"/>
+          <p:nvPr/>
+        </p:nvSpPr>
+        <p:spPr>
+          <a:xfrm>
+            <a:off x="1508760" y="4370831"/>
+            <a:ext cx="4297680" cy="868680"/>
+          </a:xfrm>
+          <a:prstGeom prst="rect">
+            <a:avLst/>
+          </a:prstGeom>
+          <a:noFill/>
+        </p:spPr>
+        <p:txBody>
+          <a:bodyPr wrap="square" anchor="ctr" lIns="0" rIns="0" tIns="0" bIns="0">
+            <a:spAutoFit/>
+          </a:bodyPr>
+          <a:lstStyle/>
+          <a:p>
+            <a:pPr algn="l"/>
+            <a:r>
+              <a:rPr sz="1450" b="0" i="0">
+                <a:solidFill>
+                  <a:srgbClr val="1D2433"/>
+                </a:solidFill>
+                <a:latin typeface="Calibri"/>
+              </a:rPr>
+              <a:t>Electrical → chemical → sound</a:t>
+            </a:r>
+          </a:p>
+        </p:txBody>
+      </p:sp>
+      <p:sp>
+        <p:nvSpPr>
+          <p:cNvPr id="20" name="Rounded Rectangle 19"/>
+          <p:cNvSpPr/>
+          <p:nvPr/>
+        </p:nvSpPr>
+        <p:spPr>
+          <a:xfrm>
+            <a:off x="6172200" y="4370831"/>
+            <a:ext cx="5349240" cy="868680"/>
+          </a:xfrm>
+          <a:prstGeom prst="roundRect">
+            <a:avLst>
+              <a:gd name="adj" fmla="val 12000"/>
+            </a:avLst>
+          </a:prstGeom>
+          <a:solidFill>
+            <a:srgbClr val="EAF1F4"/>
+          </a:solidFill>
+          <a:ln>
+            <a:noFill/>
+          </a:ln>
+          <a:effectLst/>
+        </p:spPr>
+        <p:style>
+          <a:lnRef idx="1">
+            <a:schemeClr val="accent1"/>
+          </a:lnRef>
+          <a:fillRef idx="3">
+            <a:schemeClr val="accent1"/>
+          </a:fillRef>
+          <a:effectRef idx="2">
+            <a:schemeClr val="accent1"/>
+          </a:effectRef>
+          <a:fontRef idx="minor">
+            <a:schemeClr val="lt1"/>
+          </a:fontRef>
+        </p:style>
+        <p:txBody>
+          <a:bodyPr rtlCol="0" anchor="ctr"/>
+          <a:lstStyle/>
+          <a:p>
+            <a:pPr algn="ctr"/>
+          </a:p>
+        </p:txBody>
+      </p:sp>
+      <p:sp>
+        <p:nvSpPr>
+          <p:cNvPr id="21" name="Oval 20"/>
+          <p:cNvSpPr/>
+          <p:nvPr/>
+        </p:nvSpPr>
+        <p:spPr>
+          <a:xfrm>
+            <a:off x="6446520" y="4599431"/>
+            <a:ext cx="411480" cy="411480"/>
+          </a:xfrm>
+          <a:prstGeom prst="ellipse">
+            <a:avLst/>
+          </a:prstGeom>
+          <a:solidFill>
+            <a:srgbClr val="0A9396"/>
+          </a:solidFill>
+          <a:ln>
+            <a:noFill/>
+          </a:ln>
+          <a:effectLst/>
+        </p:spPr>
+        <p:style>
+          <a:lnRef idx="1">
+            <a:schemeClr val="accent1"/>
+          </a:lnRef>
+          <a:fillRef idx="3">
+            <a:schemeClr val="accent1"/>
+          </a:fillRef>
+          <a:effectRef idx="2">
+            <a:schemeClr val="accent1"/>
+          </a:effectRef>
+          <a:fontRef idx="minor">
+            <a:schemeClr val="lt1"/>
+          </a:fontRef>
+        </p:style>
+        <p:txBody>
+          <a:bodyPr rtlCol="0" anchor="ctr"/>
+          <a:lstStyle/>
+          <a:p>
+            <a:pPr algn="ctr"/>
+          </a:p>
+        </p:txBody>
+      </p:sp>
+      <p:sp>
+        <p:nvSpPr>
+          <p:cNvPr id="22" name="TextBox 21"/>
+          <p:cNvSpPr txBox="1"/>
+          <p:nvPr/>
+        </p:nvSpPr>
+        <p:spPr>
+          <a:xfrm>
+            <a:off x="6446520" y="4599431"/>
+            <a:ext cx="411480" cy="411480"/>
+          </a:xfrm>
+          <a:prstGeom prst="rect">
+            <a:avLst/>
+          </a:prstGeom>
+          <a:noFill/>
+        </p:spPr>
+        <p:txBody>
+          <a:bodyPr wrap="square" anchor="ctr" lIns="0" rIns="0" tIns="0" bIns="0">
+            <a:spAutoFit/>
+          </a:bodyPr>
+          <a:lstStyle/>
+          <a:p>
+            <a:pPr algn="ctr"/>
+            <a:r>
+              <a:rPr sz="1400" b="1" i="0">
+                <a:solidFill>
+                  <a:srgbClr val="FFFFFF"/>
+                </a:solidFill>
+                <a:latin typeface="Calibri"/>
+              </a:rPr>
+              <a:t>D</a:t>
+            </a:r>
+          </a:p>
+        </p:txBody>
+      </p:sp>
+      <p:sp>
+        <p:nvSpPr>
+          <p:cNvPr id="23" name="TextBox 22"/>
+          <p:cNvSpPr txBox="1"/>
+          <p:nvPr/>
+        </p:nvSpPr>
+        <p:spPr>
+          <a:xfrm>
+            <a:off x="7040880" y="4370831"/>
+            <a:ext cx="4297680" cy="868680"/>
+          </a:xfrm>
+          <a:prstGeom prst="rect">
+            <a:avLst/>
+          </a:prstGeom>
+          <a:noFill/>
+        </p:spPr>
+        <p:txBody>
+          <a:bodyPr wrap="square" anchor="ctr" lIns="0" rIns="0" tIns="0" bIns="0">
+            <a:spAutoFit/>
+          </a:bodyPr>
+          <a:lstStyle/>
+          <a:p>
+            <a:pPr algn="l"/>
+            <a:r>
+              <a:rPr sz="1450" b="0" i="0">
+                <a:solidFill>
+                  <a:srgbClr val="1D2433"/>
+                </a:solidFill>
+                <a:latin typeface="Calibri"/>
+              </a:rPr>
+              <a:t>Heat → light → chemical</a:t>
+            </a:r>
+          </a:p>
+        </p:txBody>
+      </p:sp>
+    </p:spTree>
+  </p:cSld>
+  <p:clrMapOvr>
+    <a:masterClrMapping/>
+  </p:clrMapOvr>
+</p:sld>
+</file>
+
+<file path=ppt/slides/slide35.xml><?xml version="1.0" encoding="utf-8"?>
+<p:sld xmlns:a="http://schemas.openxmlformats.org/drawingml/2006/main" xmlns:p="http://schemas.openxmlformats.org/presentationml/2006/main" xmlns:r="http://schemas.openxmlformats.org/officeDocument/2006/relationships">
+  <p:cSld>
+    <p:bg>
+      <p:bgPr>
+        <a:solidFill>
+          <a:srgbClr val="F4F6F8"/>
+        </a:solidFill>
+        <a:effectLst/>
+      </p:bgPr>
+    </p:bg>
+    <p:spTree>
+      <p:nvGrpSpPr>
+        <p:cNvPr id="1" name=""/>
+        <p:cNvGrpSpPr/>
+        <p:nvPr/>
+      </p:nvGrpSpPr>
+      <p:grpSpPr/>
+      <p:sp>
+        <p:nvSpPr>
+          <p:cNvPr id="2" name="Oval 1"/>
+          <p:cNvSpPr/>
+          <p:nvPr/>
+        </p:nvSpPr>
+        <p:spPr>
+          <a:xfrm>
+            <a:off x="10927080" y="365760"/>
+            <a:ext cx="868680" cy="868680"/>
+          </a:xfrm>
+          <a:prstGeom prst="ellipse">
+            <a:avLst/>
+          </a:prstGeom>
+          <a:noFill/>
+          <a:ln w="15875">
+            <a:solidFill>
+              <a:srgbClr val="DDE2E8"/>
+            </a:solidFill>
+          </a:ln>
+          <a:effectLst/>
+        </p:spPr>
+        <p:style>
+          <a:lnRef idx="1">
+            <a:schemeClr val="accent1"/>
+          </a:lnRef>
+          <a:fillRef idx="3">
+            <a:schemeClr val="accent1"/>
+          </a:fillRef>
+          <a:effectRef idx="2">
+            <a:schemeClr val="accent1"/>
+          </a:effectRef>
+          <a:fontRef idx="minor">
+            <a:schemeClr val="lt1"/>
+          </a:fontRef>
+        </p:style>
+        <p:txBody>
+          <a:bodyPr rtlCol="0" anchor="ctr"/>
+          <a:lstStyle/>
+          <a:p>
+            <a:pPr algn="ctr"/>
+          </a:p>
+        </p:txBody>
+      </p:sp>
+      <p:sp>
+        <p:nvSpPr>
+          <p:cNvPr id="3" name="Rectangle 2"/>
+          <p:cNvSpPr/>
+          <p:nvPr/>
+        </p:nvSpPr>
+        <p:spPr>
+          <a:xfrm>
+            <a:off x="548640" y="502920"/>
+            <a:ext cx="256032" cy="256032"/>
+          </a:xfrm>
+          <a:prstGeom prst="rect">
             <a:avLst/>
           </a:prstGeom>
           <a:solidFill>
@@ -27006,408 +27620,88 @@
       </p:sp>
       <p:sp>
         <p:nvSpPr>
-          <p:cNvPr id="14" name="TextBox 13"/>
-          <p:cNvSpPr txBox="1"/>
-          <p:nvPr/>
-        </p:nvSpPr>
-        <p:spPr>
-          <a:xfrm>
-            <a:off x="6446520" y="3566160"/>
-            <a:ext cx="411480" cy="411480"/>
-          </a:xfrm>
-          <a:prstGeom prst="rect">
-            <a:avLst/>
-          </a:prstGeom>
-          <a:noFill/>
-        </p:spPr>
-        <p:txBody>
-          <a:bodyPr wrap="square" anchor="ctr" lIns="0" rIns="0" tIns="0" bIns="0">
-            <a:spAutoFit/>
-          </a:bodyPr>
-          <a:lstStyle/>
-          <a:p>
-            <a:pPr algn="ctr"/>
-            <a:r>
-              <a:rPr sz="1400" b="1" i="0">
-                <a:solidFill>
-                  <a:srgbClr val="FFFFFF"/>
-                </a:solidFill>
-                <a:latin typeface="Calibri"/>
-              </a:rPr>
-              <a:t>✓</a:t>
-            </a:r>
-          </a:p>
-        </p:txBody>
-      </p:sp>
-      <p:sp>
-        <p:nvSpPr>
-          <p:cNvPr id="15" name="TextBox 14"/>
-          <p:cNvSpPr txBox="1"/>
-          <p:nvPr/>
-        </p:nvSpPr>
-        <p:spPr>
-          <a:xfrm>
-            <a:off x="7040880" y="3337560"/>
-            <a:ext cx="4297680" cy="868680"/>
-          </a:xfrm>
-          <a:prstGeom prst="rect">
-            <a:avLst/>
-          </a:prstGeom>
-          <a:noFill/>
-        </p:spPr>
-        <p:txBody>
-          <a:bodyPr wrap="square" anchor="ctr" lIns="0" rIns="0" tIns="0" bIns="0">
+          <p:cNvPr id="4" name="TextBox 3"/>
+          <p:cNvSpPr txBox="1"/>
+          <p:nvPr/>
+        </p:nvSpPr>
+        <p:spPr>
+          <a:xfrm>
+            <a:off x="914400" y="457200"/>
+            <a:ext cx="9509760" cy="320040"/>
+          </a:xfrm>
+          <a:prstGeom prst="rect">
+            <a:avLst/>
+          </a:prstGeom>
+          <a:noFill/>
+        </p:spPr>
+        <p:txBody>
+          <a:bodyPr wrap="square" anchor="t" lIns="0" rIns="0" tIns="0" bIns="0">
             <a:spAutoFit/>
           </a:bodyPr>
           <a:lstStyle/>
           <a:p>
             <a:pPr algn="l"/>
             <a:r>
-              <a:rPr sz="1450" b="1" i="0">
+              <a:rPr sz="1300" b="1" i="0">
+                <a:solidFill>
+                  <a:srgbClr val="2A9D8F"/>
+                </a:solidFill>
+                <a:latin typeface="Arial"/>
+              </a:rPr>
+              <a:t>ANSWER REVEALED</a:t>
+            </a:r>
+          </a:p>
+        </p:txBody>
+      </p:sp>
+      <p:sp>
+        <p:nvSpPr>
+          <p:cNvPr id="5" name="TextBox 4"/>
+          <p:cNvSpPr txBox="1"/>
+          <p:nvPr/>
+        </p:nvSpPr>
+        <p:spPr>
+          <a:xfrm>
+            <a:off x="548640" y="777240"/>
+            <a:ext cx="9966960" cy="822960"/>
+          </a:xfrm>
+          <a:prstGeom prst="rect">
+            <a:avLst/>
+          </a:prstGeom>
+          <a:noFill/>
+        </p:spPr>
+        <p:txBody>
+          <a:bodyPr wrap="square" anchor="t" lIns="0" rIns="0" tIns="0" bIns="0">
+            <a:spAutoFit/>
+          </a:bodyPr>
+          <a:lstStyle/>
+          <a:p>
+            <a:pPr algn="l"/>
+            <a:r>
+              <a:rPr sz="3000" b="1" i="0">
                 <a:solidFill>
                   <a:srgbClr val="1D2433"/>
                 </a:solidFill>
                 <a:latin typeface="Calibri"/>
               </a:rPr>
-              <a:t>Chemical → electrical → light and heat</a:t>
-            </a:r>
-          </a:p>
-        </p:txBody>
-      </p:sp>
-      <p:sp>
-        <p:nvSpPr>
-          <p:cNvPr id="16" name="Rounded Rectangle 15"/>
+              <a:t>Q5 — In a Torch</a:t>
+            </a:r>
+          </a:p>
+        </p:txBody>
+      </p:sp>
+      <p:sp>
+        <p:nvSpPr>
+          <p:cNvPr id="6" name="Rounded Rectangle 5"/>
           <p:cNvSpPr/>
           <p:nvPr/>
         </p:nvSpPr>
         <p:spPr>
           <a:xfrm>
-            <a:off x="640080" y="4370831"/>
-            <a:ext cx="5349240" cy="868680"/>
+            <a:off x="640080" y="1783080"/>
+            <a:ext cx="10881360" cy="1325880"/>
           </a:xfrm>
           <a:prstGeom prst="roundRect">
             <a:avLst>
-              <a:gd name="adj" fmla="val 12000"/>
-            </a:avLst>
-          </a:prstGeom>
-          <a:solidFill>
-            <a:srgbClr val="EAF1F4"/>
-          </a:solidFill>
-          <a:ln>
-            <a:noFill/>
-          </a:ln>
-          <a:effectLst/>
-        </p:spPr>
-        <p:style>
-          <a:lnRef idx="1">
-            <a:schemeClr val="accent1"/>
-          </a:lnRef>
-          <a:fillRef idx="3">
-            <a:schemeClr val="accent1"/>
-          </a:fillRef>
-          <a:effectRef idx="2">
-            <a:schemeClr val="accent1"/>
-          </a:effectRef>
-          <a:fontRef idx="minor">
-            <a:schemeClr val="lt1"/>
-          </a:fontRef>
-        </p:style>
-        <p:txBody>
-          <a:bodyPr rtlCol="0" anchor="ctr"/>
-          <a:lstStyle/>
-          <a:p>
-            <a:pPr algn="ctr"/>
-          </a:p>
-        </p:txBody>
-      </p:sp>
-      <p:sp>
-        <p:nvSpPr>
-          <p:cNvPr id="17" name="Oval 16"/>
-          <p:cNvSpPr/>
-          <p:nvPr/>
-        </p:nvSpPr>
-        <p:spPr>
-          <a:xfrm>
-            <a:off x="914400" y="4599431"/>
-            <a:ext cx="411480" cy="411480"/>
-          </a:xfrm>
-          <a:prstGeom prst="ellipse">
-            <a:avLst/>
-          </a:prstGeom>
-          <a:solidFill>
-            <a:srgbClr val="B7C2CC"/>
-          </a:solidFill>
-          <a:ln>
-            <a:noFill/>
-          </a:ln>
-          <a:effectLst/>
-        </p:spPr>
-        <p:style>
-          <a:lnRef idx="1">
-            <a:schemeClr val="accent1"/>
-          </a:lnRef>
-          <a:fillRef idx="3">
-            <a:schemeClr val="accent1"/>
-          </a:fillRef>
-          <a:effectRef idx="2">
-            <a:schemeClr val="accent1"/>
-          </a:effectRef>
-          <a:fontRef idx="minor">
-            <a:schemeClr val="lt1"/>
-          </a:fontRef>
-        </p:style>
-        <p:txBody>
-          <a:bodyPr rtlCol="0" anchor="ctr"/>
-          <a:lstStyle/>
-          <a:p>
-            <a:pPr algn="ctr"/>
-          </a:p>
-        </p:txBody>
-      </p:sp>
-      <p:sp>
-        <p:nvSpPr>
-          <p:cNvPr id="18" name="TextBox 17"/>
-          <p:cNvSpPr txBox="1"/>
-          <p:nvPr/>
-        </p:nvSpPr>
-        <p:spPr>
-          <a:xfrm>
-            <a:off x="914400" y="4599431"/>
-            <a:ext cx="411480" cy="411480"/>
-          </a:xfrm>
-          <a:prstGeom prst="rect">
-            <a:avLst/>
-          </a:prstGeom>
-          <a:noFill/>
-        </p:spPr>
-        <p:txBody>
-          <a:bodyPr wrap="square" anchor="ctr" lIns="0" rIns="0" tIns="0" bIns="0">
-            <a:spAutoFit/>
-          </a:bodyPr>
-          <a:lstStyle/>
-          <a:p>
-            <a:pPr algn="ctr"/>
-            <a:r>
-              <a:rPr sz="1400" b="1" i="0">
-                <a:solidFill>
-                  <a:srgbClr val="FFFFFF"/>
-                </a:solidFill>
-                <a:latin typeface="Calibri"/>
-              </a:rPr>
-              <a:t>C</a:t>
-            </a:r>
-          </a:p>
-        </p:txBody>
-      </p:sp>
-      <p:sp>
-        <p:nvSpPr>
-          <p:cNvPr id="19" name="TextBox 18"/>
-          <p:cNvSpPr txBox="1"/>
-          <p:nvPr/>
-        </p:nvSpPr>
-        <p:spPr>
-          <a:xfrm>
-            <a:off x="1508760" y="4370831"/>
-            <a:ext cx="4297680" cy="868680"/>
-          </a:xfrm>
-          <a:prstGeom prst="rect">
-            <a:avLst/>
-          </a:prstGeom>
-          <a:noFill/>
-        </p:spPr>
-        <p:txBody>
-          <a:bodyPr wrap="square" anchor="ctr" lIns="0" rIns="0" tIns="0" bIns="0">
-            <a:spAutoFit/>
-          </a:bodyPr>
-          <a:lstStyle/>
-          <a:p>
-            <a:pPr algn="l"/>
-            <a:r>
-              <a:rPr sz="1450" b="0" i="0">
-                <a:solidFill>
-                  <a:srgbClr val="6B7280"/>
-                </a:solidFill>
-                <a:latin typeface="Calibri"/>
-              </a:rPr>
-              <a:t>Electrical → chemical → sound</a:t>
-            </a:r>
-          </a:p>
-        </p:txBody>
-      </p:sp>
-      <p:sp>
-        <p:nvSpPr>
-          <p:cNvPr id="20" name="Rounded Rectangle 19"/>
-          <p:cNvSpPr/>
-          <p:nvPr/>
-        </p:nvSpPr>
-        <p:spPr>
-          <a:xfrm>
-            <a:off x="6172200" y="4370831"/>
-            <a:ext cx="5349240" cy="868680"/>
-          </a:xfrm>
-          <a:prstGeom prst="roundRect">
-            <a:avLst>
-              <a:gd name="adj" fmla="val 12000"/>
-            </a:avLst>
-          </a:prstGeom>
-          <a:solidFill>
-            <a:srgbClr val="EAF1F4"/>
-          </a:solidFill>
-          <a:ln>
-            <a:noFill/>
-          </a:ln>
-          <a:effectLst/>
-        </p:spPr>
-        <p:style>
-          <a:lnRef idx="1">
-            <a:schemeClr val="accent1"/>
-          </a:lnRef>
-          <a:fillRef idx="3">
-            <a:schemeClr val="accent1"/>
-          </a:fillRef>
-          <a:effectRef idx="2">
-            <a:schemeClr val="accent1"/>
-          </a:effectRef>
-          <a:fontRef idx="minor">
-            <a:schemeClr val="lt1"/>
-          </a:fontRef>
-        </p:style>
-        <p:txBody>
-          <a:bodyPr rtlCol="0" anchor="ctr"/>
-          <a:lstStyle/>
-          <a:p>
-            <a:pPr algn="ctr"/>
-          </a:p>
-        </p:txBody>
-      </p:sp>
-      <p:sp>
-        <p:nvSpPr>
-          <p:cNvPr id="21" name="Oval 20"/>
-          <p:cNvSpPr/>
-          <p:nvPr/>
-        </p:nvSpPr>
-        <p:spPr>
-          <a:xfrm>
-            <a:off x="6446520" y="4599431"/>
-            <a:ext cx="411480" cy="411480"/>
-          </a:xfrm>
-          <a:prstGeom prst="ellipse">
-            <a:avLst/>
-          </a:prstGeom>
-          <a:solidFill>
-            <a:srgbClr val="B7C2CC"/>
-          </a:solidFill>
-          <a:ln>
-            <a:noFill/>
-          </a:ln>
-          <a:effectLst/>
-        </p:spPr>
-        <p:style>
-          <a:lnRef idx="1">
-            <a:schemeClr val="accent1"/>
-          </a:lnRef>
-          <a:fillRef idx="3">
-            <a:schemeClr val="accent1"/>
-          </a:fillRef>
-          <a:effectRef idx="2">
-            <a:schemeClr val="accent1"/>
-          </a:effectRef>
-          <a:fontRef idx="minor">
-            <a:schemeClr val="lt1"/>
-          </a:fontRef>
-        </p:style>
-        <p:txBody>
-          <a:bodyPr rtlCol="0" anchor="ctr"/>
-          <a:lstStyle/>
-          <a:p>
-            <a:pPr algn="ctr"/>
-          </a:p>
-        </p:txBody>
-      </p:sp>
-      <p:sp>
-        <p:nvSpPr>
-          <p:cNvPr id="22" name="TextBox 21"/>
-          <p:cNvSpPr txBox="1"/>
-          <p:nvPr/>
-        </p:nvSpPr>
-        <p:spPr>
-          <a:xfrm>
-            <a:off x="6446520" y="4599431"/>
-            <a:ext cx="411480" cy="411480"/>
-          </a:xfrm>
-          <a:prstGeom prst="rect">
-            <a:avLst/>
-          </a:prstGeom>
-          <a:noFill/>
-        </p:spPr>
-        <p:txBody>
-          <a:bodyPr wrap="square" anchor="ctr" lIns="0" rIns="0" tIns="0" bIns="0">
-            <a:spAutoFit/>
-          </a:bodyPr>
-          <a:lstStyle/>
-          <a:p>
-            <a:pPr algn="ctr"/>
-            <a:r>
-              <a:rPr sz="1400" b="1" i="0">
-                <a:solidFill>
-                  <a:srgbClr val="FFFFFF"/>
-                </a:solidFill>
-                <a:latin typeface="Calibri"/>
-              </a:rPr>
-              <a:t>D</a:t>
-            </a:r>
-          </a:p>
-        </p:txBody>
-      </p:sp>
-      <p:sp>
-        <p:nvSpPr>
-          <p:cNvPr id="23" name="TextBox 22"/>
-          <p:cNvSpPr txBox="1"/>
-          <p:nvPr/>
-        </p:nvSpPr>
-        <p:spPr>
-          <a:xfrm>
-            <a:off x="7040880" y="4370831"/>
-            <a:ext cx="4297680" cy="868680"/>
-          </a:xfrm>
-          <a:prstGeom prst="rect">
-            <a:avLst/>
-          </a:prstGeom>
-          <a:noFill/>
-        </p:spPr>
-        <p:txBody>
-          <a:bodyPr wrap="square" anchor="ctr" lIns="0" rIns="0" tIns="0" bIns="0">
-            <a:spAutoFit/>
-          </a:bodyPr>
-          <a:lstStyle/>
-          <a:p>
-            <a:pPr algn="l"/>
-            <a:r>
-              <a:rPr sz="1450" b="0" i="0">
-                <a:solidFill>
-                  <a:srgbClr val="6B7280"/>
-                </a:solidFill>
-                <a:latin typeface="Calibri"/>
-              </a:rPr>
-              <a:t>Heat → light → chemical</a:t>
-            </a:r>
-          </a:p>
-        </p:txBody>
-      </p:sp>
-      <p:sp>
-        <p:nvSpPr>
-          <p:cNvPr id="24" name="Rounded Rectangle 23"/>
-          <p:cNvSpPr/>
-          <p:nvPr/>
-        </p:nvSpPr>
-        <p:spPr>
-          <a:xfrm>
-            <a:off x="640080" y="5440680"/>
-            <a:ext cx="10881360" cy="1097280"/>
-          </a:xfrm>
-          <a:prstGeom prst="roundRect">
-            <a:avLst>
-              <a:gd name="adj" fmla="val 5000"/>
+              <a:gd name="adj" fmla="val 4000"/>
             </a:avLst>
           </a:prstGeom>
           <a:solidFill>
@@ -27448,6 +27742,735 @@
       </p:sp>
       <p:sp>
         <p:nvSpPr>
+          <p:cNvPr id="7" name="TextBox 6"/>
+          <p:cNvSpPr txBox="1"/>
+          <p:nvPr/>
+        </p:nvSpPr>
+        <p:spPr>
+          <a:xfrm>
+            <a:off x="1005840" y="1783080"/>
+            <a:ext cx="10149840" cy="1325880"/>
+          </a:xfrm>
+          <a:prstGeom prst="rect">
+            <a:avLst/>
+          </a:prstGeom>
+          <a:noFill/>
+        </p:spPr>
+        <p:txBody>
+          <a:bodyPr wrap="square" anchor="ctr" lIns="0" rIns="0" tIns="0" bIns="0">
+            <a:spAutoFit/>
+          </a:bodyPr>
+          <a:lstStyle/>
+          <a:p>
+            <a:pPr algn="l"/>
+            <a:r>
+              <a:rPr sz="1800" b="1" i="0">
+                <a:solidFill>
+                  <a:srgbClr val="1D2433"/>
+                </a:solidFill>
+                <a:latin typeface="Calibri"/>
+              </a:rPr>
+              <a:t>The sequence of energy changes in a working torch is:</a:t>
+            </a:r>
+          </a:p>
+        </p:txBody>
+      </p:sp>
+      <p:sp>
+        <p:nvSpPr>
+          <p:cNvPr id="8" name="Rounded Rectangle 7"/>
+          <p:cNvSpPr/>
+          <p:nvPr/>
+        </p:nvSpPr>
+        <p:spPr>
+          <a:xfrm>
+            <a:off x="640080" y="3337560"/>
+            <a:ext cx="5349240" cy="868680"/>
+          </a:xfrm>
+          <a:prstGeom prst="roundRect">
+            <a:avLst>
+              <a:gd name="adj" fmla="val 12000"/>
+            </a:avLst>
+          </a:prstGeom>
+          <a:solidFill>
+            <a:srgbClr val="EAF1F4"/>
+          </a:solidFill>
+          <a:ln>
+            <a:noFill/>
+          </a:ln>
+          <a:effectLst/>
+        </p:spPr>
+        <p:style>
+          <a:lnRef idx="1">
+            <a:schemeClr val="accent1"/>
+          </a:lnRef>
+          <a:fillRef idx="3">
+            <a:schemeClr val="accent1"/>
+          </a:fillRef>
+          <a:effectRef idx="2">
+            <a:schemeClr val="accent1"/>
+          </a:effectRef>
+          <a:fontRef idx="minor">
+            <a:schemeClr val="lt1"/>
+          </a:fontRef>
+        </p:style>
+        <p:txBody>
+          <a:bodyPr rtlCol="0" anchor="ctr"/>
+          <a:lstStyle/>
+          <a:p>
+            <a:pPr algn="ctr"/>
+          </a:p>
+        </p:txBody>
+      </p:sp>
+      <p:sp>
+        <p:nvSpPr>
+          <p:cNvPr id="9" name="Oval 8"/>
+          <p:cNvSpPr/>
+          <p:nvPr/>
+        </p:nvSpPr>
+        <p:spPr>
+          <a:xfrm>
+            <a:off x="914400" y="3566160"/>
+            <a:ext cx="411480" cy="411480"/>
+          </a:xfrm>
+          <a:prstGeom prst="ellipse">
+            <a:avLst/>
+          </a:prstGeom>
+          <a:solidFill>
+            <a:srgbClr val="B7C2CC"/>
+          </a:solidFill>
+          <a:ln>
+            <a:noFill/>
+          </a:ln>
+          <a:effectLst/>
+        </p:spPr>
+        <p:style>
+          <a:lnRef idx="1">
+            <a:schemeClr val="accent1"/>
+          </a:lnRef>
+          <a:fillRef idx="3">
+            <a:schemeClr val="accent1"/>
+          </a:fillRef>
+          <a:effectRef idx="2">
+            <a:schemeClr val="accent1"/>
+          </a:effectRef>
+          <a:fontRef idx="minor">
+            <a:schemeClr val="lt1"/>
+          </a:fontRef>
+        </p:style>
+        <p:txBody>
+          <a:bodyPr rtlCol="0" anchor="ctr"/>
+          <a:lstStyle/>
+          <a:p>
+            <a:pPr algn="ctr"/>
+          </a:p>
+        </p:txBody>
+      </p:sp>
+      <p:sp>
+        <p:nvSpPr>
+          <p:cNvPr id="10" name="TextBox 9"/>
+          <p:cNvSpPr txBox="1"/>
+          <p:nvPr/>
+        </p:nvSpPr>
+        <p:spPr>
+          <a:xfrm>
+            <a:off x="914400" y="3566160"/>
+            <a:ext cx="411480" cy="411480"/>
+          </a:xfrm>
+          <a:prstGeom prst="rect">
+            <a:avLst/>
+          </a:prstGeom>
+          <a:noFill/>
+        </p:spPr>
+        <p:txBody>
+          <a:bodyPr wrap="square" anchor="ctr" lIns="0" rIns="0" tIns="0" bIns="0">
+            <a:spAutoFit/>
+          </a:bodyPr>
+          <a:lstStyle/>
+          <a:p>
+            <a:pPr algn="ctr"/>
+            <a:r>
+              <a:rPr sz="1400" b="1" i="0">
+                <a:solidFill>
+                  <a:srgbClr val="FFFFFF"/>
+                </a:solidFill>
+                <a:latin typeface="Calibri"/>
+              </a:rPr>
+              <a:t>A</a:t>
+            </a:r>
+          </a:p>
+        </p:txBody>
+      </p:sp>
+      <p:sp>
+        <p:nvSpPr>
+          <p:cNvPr id="11" name="TextBox 10"/>
+          <p:cNvSpPr txBox="1"/>
+          <p:nvPr/>
+        </p:nvSpPr>
+        <p:spPr>
+          <a:xfrm>
+            <a:off x="1508760" y="3337560"/>
+            <a:ext cx="4297680" cy="868680"/>
+          </a:xfrm>
+          <a:prstGeom prst="rect">
+            <a:avLst/>
+          </a:prstGeom>
+          <a:noFill/>
+        </p:spPr>
+        <p:txBody>
+          <a:bodyPr wrap="square" anchor="ctr" lIns="0" rIns="0" tIns="0" bIns="0">
+            <a:spAutoFit/>
+          </a:bodyPr>
+          <a:lstStyle/>
+          <a:p>
+            <a:pPr algn="l"/>
+            <a:r>
+              <a:rPr sz="1450" b="0" i="0">
+                <a:solidFill>
+                  <a:srgbClr val="6B7280"/>
+                </a:solidFill>
+                <a:latin typeface="Calibri"/>
+              </a:rPr>
+              <a:t>Light → electrical → chemical</a:t>
+            </a:r>
+          </a:p>
+        </p:txBody>
+      </p:sp>
+      <p:sp>
+        <p:nvSpPr>
+          <p:cNvPr id="12" name="Rounded Rectangle 11"/>
+          <p:cNvSpPr/>
+          <p:nvPr/>
+        </p:nvSpPr>
+        <p:spPr>
+          <a:xfrm>
+            <a:off x="6172200" y="3337560"/>
+            <a:ext cx="5349240" cy="868680"/>
+          </a:xfrm>
+          <a:prstGeom prst="roundRect">
+            <a:avLst>
+              <a:gd name="adj" fmla="val 12000"/>
+            </a:avLst>
+          </a:prstGeom>
+          <a:solidFill>
+            <a:srgbClr val="E9F5F0"/>
+          </a:solidFill>
+          <a:ln w="25400">
+            <a:solidFill>
+              <a:srgbClr val="2A9D8F"/>
+            </a:solidFill>
+          </a:ln>
+          <a:effectLst/>
+        </p:spPr>
+        <p:style>
+          <a:lnRef idx="1">
+            <a:schemeClr val="accent1"/>
+          </a:lnRef>
+          <a:fillRef idx="3">
+            <a:schemeClr val="accent1"/>
+          </a:fillRef>
+          <a:effectRef idx="2">
+            <a:schemeClr val="accent1"/>
+          </a:effectRef>
+          <a:fontRef idx="minor">
+            <a:schemeClr val="lt1"/>
+          </a:fontRef>
+        </p:style>
+        <p:txBody>
+          <a:bodyPr rtlCol="0" anchor="ctr"/>
+          <a:lstStyle/>
+          <a:p>
+            <a:pPr algn="ctr"/>
+          </a:p>
+        </p:txBody>
+      </p:sp>
+      <p:sp>
+        <p:nvSpPr>
+          <p:cNvPr id="13" name="Oval 12"/>
+          <p:cNvSpPr/>
+          <p:nvPr/>
+        </p:nvSpPr>
+        <p:spPr>
+          <a:xfrm>
+            <a:off x="6446520" y="3566160"/>
+            <a:ext cx="411480" cy="411480"/>
+          </a:xfrm>
+          <a:prstGeom prst="ellipse">
+            <a:avLst/>
+          </a:prstGeom>
+          <a:solidFill>
+            <a:srgbClr val="2A9D8F"/>
+          </a:solidFill>
+          <a:ln>
+            <a:noFill/>
+          </a:ln>
+          <a:effectLst/>
+        </p:spPr>
+        <p:style>
+          <a:lnRef idx="1">
+            <a:schemeClr val="accent1"/>
+          </a:lnRef>
+          <a:fillRef idx="3">
+            <a:schemeClr val="accent1"/>
+          </a:fillRef>
+          <a:effectRef idx="2">
+            <a:schemeClr val="accent1"/>
+          </a:effectRef>
+          <a:fontRef idx="minor">
+            <a:schemeClr val="lt1"/>
+          </a:fontRef>
+        </p:style>
+        <p:txBody>
+          <a:bodyPr rtlCol="0" anchor="ctr"/>
+          <a:lstStyle/>
+          <a:p>
+            <a:pPr algn="ctr"/>
+          </a:p>
+        </p:txBody>
+      </p:sp>
+      <p:sp>
+        <p:nvSpPr>
+          <p:cNvPr id="14" name="TextBox 13"/>
+          <p:cNvSpPr txBox="1"/>
+          <p:nvPr/>
+        </p:nvSpPr>
+        <p:spPr>
+          <a:xfrm>
+            <a:off x="6446520" y="3566160"/>
+            <a:ext cx="411480" cy="411480"/>
+          </a:xfrm>
+          <a:prstGeom prst="rect">
+            <a:avLst/>
+          </a:prstGeom>
+          <a:noFill/>
+        </p:spPr>
+        <p:txBody>
+          <a:bodyPr wrap="square" anchor="ctr" lIns="0" rIns="0" tIns="0" bIns="0">
+            <a:spAutoFit/>
+          </a:bodyPr>
+          <a:lstStyle/>
+          <a:p>
+            <a:pPr algn="ctr"/>
+            <a:r>
+              <a:rPr sz="1400" b="1" i="0">
+                <a:solidFill>
+                  <a:srgbClr val="FFFFFF"/>
+                </a:solidFill>
+                <a:latin typeface="Calibri"/>
+              </a:rPr>
+              <a:t>✓</a:t>
+            </a:r>
+          </a:p>
+        </p:txBody>
+      </p:sp>
+      <p:sp>
+        <p:nvSpPr>
+          <p:cNvPr id="15" name="TextBox 14"/>
+          <p:cNvSpPr txBox="1"/>
+          <p:nvPr/>
+        </p:nvSpPr>
+        <p:spPr>
+          <a:xfrm>
+            <a:off x="7040880" y="3337560"/>
+            <a:ext cx="4297680" cy="868680"/>
+          </a:xfrm>
+          <a:prstGeom prst="rect">
+            <a:avLst/>
+          </a:prstGeom>
+          <a:noFill/>
+        </p:spPr>
+        <p:txBody>
+          <a:bodyPr wrap="square" anchor="ctr" lIns="0" rIns="0" tIns="0" bIns="0">
+            <a:spAutoFit/>
+          </a:bodyPr>
+          <a:lstStyle/>
+          <a:p>
+            <a:pPr algn="l"/>
+            <a:r>
+              <a:rPr sz="1450" b="1" i="0">
+                <a:solidFill>
+                  <a:srgbClr val="1D2433"/>
+                </a:solidFill>
+                <a:latin typeface="Calibri"/>
+              </a:rPr>
+              <a:t>Chemical → electrical → light and heat</a:t>
+            </a:r>
+          </a:p>
+        </p:txBody>
+      </p:sp>
+      <p:sp>
+        <p:nvSpPr>
+          <p:cNvPr id="16" name="Rounded Rectangle 15"/>
+          <p:cNvSpPr/>
+          <p:nvPr/>
+        </p:nvSpPr>
+        <p:spPr>
+          <a:xfrm>
+            <a:off x="640080" y="4370831"/>
+            <a:ext cx="5349240" cy="868680"/>
+          </a:xfrm>
+          <a:prstGeom prst="roundRect">
+            <a:avLst>
+              <a:gd name="adj" fmla="val 12000"/>
+            </a:avLst>
+          </a:prstGeom>
+          <a:solidFill>
+            <a:srgbClr val="EAF1F4"/>
+          </a:solidFill>
+          <a:ln>
+            <a:noFill/>
+          </a:ln>
+          <a:effectLst/>
+        </p:spPr>
+        <p:style>
+          <a:lnRef idx="1">
+            <a:schemeClr val="accent1"/>
+          </a:lnRef>
+          <a:fillRef idx="3">
+            <a:schemeClr val="accent1"/>
+          </a:fillRef>
+          <a:effectRef idx="2">
+            <a:schemeClr val="accent1"/>
+          </a:effectRef>
+          <a:fontRef idx="minor">
+            <a:schemeClr val="lt1"/>
+          </a:fontRef>
+        </p:style>
+        <p:txBody>
+          <a:bodyPr rtlCol="0" anchor="ctr"/>
+          <a:lstStyle/>
+          <a:p>
+            <a:pPr algn="ctr"/>
+          </a:p>
+        </p:txBody>
+      </p:sp>
+      <p:sp>
+        <p:nvSpPr>
+          <p:cNvPr id="17" name="Oval 16"/>
+          <p:cNvSpPr/>
+          <p:nvPr/>
+        </p:nvSpPr>
+        <p:spPr>
+          <a:xfrm>
+            <a:off x="914400" y="4599431"/>
+            <a:ext cx="411480" cy="411480"/>
+          </a:xfrm>
+          <a:prstGeom prst="ellipse">
+            <a:avLst/>
+          </a:prstGeom>
+          <a:solidFill>
+            <a:srgbClr val="B7C2CC"/>
+          </a:solidFill>
+          <a:ln>
+            <a:noFill/>
+          </a:ln>
+          <a:effectLst/>
+        </p:spPr>
+        <p:style>
+          <a:lnRef idx="1">
+            <a:schemeClr val="accent1"/>
+          </a:lnRef>
+          <a:fillRef idx="3">
+            <a:schemeClr val="accent1"/>
+          </a:fillRef>
+          <a:effectRef idx="2">
+            <a:schemeClr val="accent1"/>
+          </a:effectRef>
+          <a:fontRef idx="minor">
+            <a:schemeClr val="lt1"/>
+          </a:fontRef>
+        </p:style>
+        <p:txBody>
+          <a:bodyPr rtlCol="0" anchor="ctr"/>
+          <a:lstStyle/>
+          <a:p>
+            <a:pPr algn="ctr"/>
+          </a:p>
+        </p:txBody>
+      </p:sp>
+      <p:sp>
+        <p:nvSpPr>
+          <p:cNvPr id="18" name="TextBox 17"/>
+          <p:cNvSpPr txBox="1"/>
+          <p:nvPr/>
+        </p:nvSpPr>
+        <p:spPr>
+          <a:xfrm>
+            <a:off x="914400" y="4599431"/>
+            <a:ext cx="411480" cy="411480"/>
+          </a:xfrm>
+          <a:prstGeom prst="rect">
+            <a:avLst/>
+          </a:prstGeom>
+          <a:noFill/>
+        </p:spPr>
+        <p:txBody>
+          <a:bodyPr wrap="square" anchor="ctr" lIns="0" rIns="0" tIns="0" bIns="0">
+            <a:spAutoFit/>
+          </a:bodyPr>
+          <a:lstStyle/>
+          <a:p>
+            <a:pPr algn="ctr"/>
+            <a:r>
+              <a:rPr sz="1400" b="1" i="0">
+                <a:solidFill>
+                  <a:srgbClr val="FFFFFF"/>
+                </a:solidFill>
+                <a:latin typeface="Calibri"/>
+              </a:rPr>
+              <a:t>C</a:t>
+            </a:r>
+          </a:p>
+        </p:txBody>
+      </p:sp>
+      <p:sp>
+        <p:nvSpPr>
+          <p:cNvPr id="19" name="TextBox 18"/>
+          <p:cNvSpPr txBox="1"/>
+          <p:nvPr/>
+        </p:nvSpPr>
+        <p:spPr>
+          <a:xfrm>
+            <a:off x="1508760" y="4370831"/>
+            <a:ext cx="4297680" cy="868680"/>
+          </a:xfrm>
+          <a:prstGeom prst="rect">
+            <a:avLst/>
+          </a:prstGeom>
+          <a:noFill/>
+        </p:spPr>
+        <p:txBody>
+          <a:bodyPr wrap="square" anchor="ctr" lIns="0" rIns="0" tIns="0" bIns="0">
+            <a:spAutoFit/>
+          </a:bodyPr>
+          <a:lstStyle/>
+          <a:p>
+            <a:pPr algn="l"/>
+            <a:r>
+              <a:rPr sz="1450" b="0" i="0">
+                <a:solidFill>
+                  <a:srgbClr val="6B7280"/>
+                </a:solidFill>
+                <a:latin typeface="Calibri"/>
+              </a:rPr>
+              <a:t>Electrical → chemical → sound</a:t>
+            </a:r>
+          </a:p>
+        </p:txBody>
+      </p:sp>
+      <p:sp>
+        <p:nvSpPr>
+          <p:cNvPr id="20" name="Rounded Rectangle 19"/>
+          <p:cNvSpPr/>
+          <p:nvPr/>
+        </p:nvSpPr>
+        <p:spPr>
+          <a:xfrm>
+            <a:off x="6172200" y="4370831"/>
+            <a:ext cx="5349240" cy="868680"/>
+          </a:xfrm>
+          <a:prstGeom prst="roundRect">
+            <a:avLst>
+              <a:gd name="adj" fmla="val 12000"/>
+            </a:avLst>
+          </a:prstGeom>
+          <a:solidFill>
+            <a:srgbClr val="EAF1F4"/>
+          </a:solidFill>
+          <a:ln>
+            <a:noFill/>
+          </a:ln>
+          <a:effectLst/>
+        </p:spPr>
+        <p:style>
+          <a:lnRef idx="1">
+            <a:schemeClr val="accent1"/>
+          </a:lnRef>
+          <a:fillRef idx="3">
+            <a:schemeClr val="accent1"/>
+          </a:fillRef>
+          <a:effectRef idx="2">
+            <a:schemeClr val="accent1"/>
+          </a:effectRef>
+          <a:fontRef idx="minor">
+            <a:schemeClr val="lt1"/>
+          </a:fontRef>
+        </p:style>
+        <p:txBody>
+          <a:bodyPr rtlCol="0" anchor="ctr"/>
+          <a:lstStyle/>
+          <a:p>
+            <a:pPr algn="ctr"/>
+          </a:p>
+        </p:txBody>
+      </p:sp>
+      <p:sp>
+        <p:nvSpPr>
+          <p:cNvPr id="21" name="Oval 20"/>
+          <p:cNvSpPr/>
+          <p:nvPr/>
+        </p:nvSpPr>
+        <p:spPr>
+          <a:xfrm>
+            <a:off x="6446520" y="4599431"/>
+            <a:ext cx="411480" cy="411480"/>
+          </a:xfrm>
+          <a:prstGeom prst="ellipse">
+            <a:avLst/>
+          </a:prstGeom>
+          <a:solidFill>
+            <a:srgbClr val="B7C2CC"/>
+          </a:solidFill>
+          <a:ln>
+            <a:noFill/>
+          </a:ln>
+          <a:effectLst/>
+        </p:spPr>
+        <p:style>
+          <a:lnRef idx="1">
+            <a:schemeClr val="accent1"/>
+          </a:lnRef>
+          <a:fillRef idx="3">
+            <a:schemeClr val="accent1"/>
+          </a:fillRef>
+          <a:effectRef idx="2">
+            <a:schemeClr val="accent1"/>
+          </a:effectRef>
+          <a:fontRef idx="minor">
+            <a:schemeClr val="lt1"/>
+          </a:fontRef>
+        </p:style>
+        <p:txBody>
+          <a:bodyPr rtlCol="0" anchor="ctr"/>
+          <a:lstStyle/>
+          <a:p>
+            <a:pPr algn="ctr"/>
+          </a:p>
+        </p:txBody>
+      </p:sp>
+      <p:sp>
+        <p:nvSpPr>
+          <p:cNvPr id="22" name="TextBox 21"/>
+          <p:cNvSpPr txBox="1"/>
+          <p:nvPr/>
+        </p:nvSpPr>
+        <p:spPr>
+          <a:xfrm>
+            <a:off x="6446520" y="4599431"/>
+            <a:ext cx="411480" cy="411480"/>
+          </a:xfrm>
+          <a:prstGeom prst="rect">
+            <a:avLst/>
+          </a:prstGeom>
+          <a:noFill/>
+        </p:spPr>
+        <p:txBody>
+          <a:bodyPr wrap="square" anchor="ctr" lIns="0" rIns="0" tIns="0" bIns="0">
+            <a:spAutoFit/>
+          </a:bodyPr>
+          <a:lstStyle/>
+          <a:p>
+            <a:pPr algn="ctr"/>
+            <a:r>
+              <a:rPr sz="1400" b="1" i="0">
+                <a:solidFill>
+                  <a:srgbClr val="FFFFFF"/>
+                </a:solidFill>
+                <a:latin typeface="Calibri"/>
+              </a:rPr>
+              <a:t>D</a:t>
+            </a:r>
+          </a:p>
+        </p:txBody>
+      </p:sp>
+      <p:sp>
+        <p:nvSpPr>
+          <p:cNvPr id="23" name="TextBox 22"/>
+          <p:cNvSpPr txBox="1"/>
+          <p:nvPr/>
+        </p:nvSpPr>
+        <p:spPr>
+          <a:xfrm>
+            <a:off x="7040880" y="4370831"/>
+            <a:ext cx="4297680" cy="868680"/>
+          </a:xfrm>
+          <a:prstGeom prst="rect">
+            <a:avLst/>
+          </a:prstGeom>
+          <a:noFill/>
+        </p:spPr>
+        <p:txBody>
+          <a:bodyPr wrap="square" anchor="ctr" lIns="0" rIns="0" tIns="0" bIns="0">
+            <a:spAutoFit/>
+          </a:bodyPr>
+          <a:lstStyle/>
+          <a:p>
+            <a:pPr algn="l"/>
+            <a:r>
+              <a:rPr sz="1450" b="0" i="0">
+                <a:solidFill>
+                  <a:srgbClr val="6B7280"/>
+                </a:solidFill>
+                <a:latin typeface="Calibri"/>
+              </a:rPr>
+              <a:t>Heat → light → chemical</a:t>
+            </a:r>
+          </a:p>
+        </p:txBody>
+      </p:sp>
+      <p:sp>
+        <p:nvSpPr>
+          <p:cNvPr id="24" name="Rounded Rectangle 23"/>
+          <p:cNvSpPr/>
+          <p:nvPr/>
+        </p:nvSpPr>
+        <p:spPr>
+          <a:xfrm>
+            <a:off x="640080" y="5440680"/>
+            <a:ext cx="10881360" cy="1097280"/>
+          </a:xfrm>
+          <a:prstGeom prst="roundRect">
+            <a:avLst>
+              <a:gd name="adj" fmla="val 5000"/>
+            </a:avLst>
+          </a:prstGeom>
+          <a:solidFill>
+            <a:srgbClr val="FFFFFF"/>
+          </a:solidFill>
+          <a:ln>
+            <a:noFill/>
+          </a:ln>
+          <a:effectLst>
+            <a:outerShdw blurRad="88900" dist="38100" dir="5400000" rotWithShape="0" algn="bl">
+              <a:srgbClr val="000000">
+                <a:alpha val="16000"/>
+              </a:srgbClr>
+            </a:outerShdw>
+          </a:effectLst>
+        </p:spPr>
+        <p:style>
+          <a:lnRef idx="1">
+            <a:schemeClr val="accent1"/>
+          </a:lnRef>
+          <a:fillRef idx="3">
+            <a:schemeClr val="accent1"/>
+          </a:fillRef>
+          <a:effectRef idx="2">
+            <a:schemeClr val="accent1"/>
+          </a:effectRef>
+          <a:fontRef idx="minor">
+            <a:schemeClr val="lt1"/>
+          </a:fontRef>
+        </p:style>
+        <p:txBody>
+          <a:bodyPr rtlCol="0" anchor="ctr"/>
+          <a:lstStyle/>
+          <a:p>
+            <a:pPr algn="ctr"/>
+          </a:p>
+        </p:txBody>
+      </p:sp>
+      <p:sp>
+        <p:nvSpPr>
           <p:cNvPr id="25" name="TextBox 24"/>
           <p:cNvSpPr txBox="1"/>
           <p:nvPr/>
@@ -27528,7 +28551,7 @@
 </p:sld>
 </file>
 
-<file path=ppt/slides/slide35.xml><?xml version="1.0" encoding="utf-8"?>
+<file path=ppt/slides/slide36.xml><?xml version="1.0" encoding="utf-8"?>
 <p:sld xmlns:a="http://schemas.openxmlformats.org/drawingml/2006/main" xmlns:p="http://schemas.openxmlformats.org/presentationml/2006/main" xmlns:r="http://schemas.openxmlformats.org/officeDocument/2006/relationships">
   <p:cSld>
     <p:bg>
